--- a/media/module1/slides.pptx
+++ b/media/module1/slides.pptx
@@ -41,6 +41,16 @@
     <p:sldId id="289" r:id="rId41"/>
     <p:sldId id="290" r:id="rId42"/>
     <p:sldId id="291" r:id="rId43"/>
+    <p:sldId id="292" r:id="rId44"/>
+    <p:sldId id="293" r:id="rId45"/>
+    <p:sldId id="294" r:id="rId46"/>
+    <p:sldId id="295" r:id="rId47"/>
+    <p:sldId id="296" r:id="rId48"/>
+    <p:sldId id="297" r:id="rId49"/>
+    <p:sldId id="298" r:id="rId50"/>
+    <p:sldId id="299" r:id="rId51"/>
+    <p:sldId id="300" r:id="rId52"/>
+    <p:sldId id="301" r:id="rId53"/>
   </p:sldIdLst>
   <p:sldSz cx="12191695" cy="6858000" type="screen4x3"/>
   <p:notesSz cx="6858000" cy="9144000"/>
@@ -677,7 +687,7 @@
           <a:lstStyle/>
           <a:p>
             <a:r>
-              <a:t>Full detail in docs/MODULE1.md command reference.</a:t>
+              <a:t>From MODULE1 Topics Covered.</a:t>
             </a:r>
           </a:p>
         </p:txBody>
@@ -747,7 +757,7 @@
           <a:lstStyle/>
           <a:p>
             <a:r>
-              <a:t>Full detail in docs/MODULE1.md command reference.</a:t>
+              <a:t>From MODULE1 Topics Covered.</a:t>
             </a:r>
           </a:p>
         </p:txBody>
@@ -887,7 +897,7 @@
           <a:lstStyle/>
           <a:p>
             <a:r>
-              <a:t>Run from course repository root.</a:t>
+              <a:t>Full detail in docs/MODULE1.md command reference.</a:t>
             </a:r>
           </a:p>
         </p:txBody>
@@ -957,7 +967,7 @@
           <a:lstStyle/>
           <a:p>
             <a:r>
-              <a:t>module1/examples/examples/spec_to_rtl/README.md</a:t>
+              <a:t>Full detail in docs/MODULE1.md command reference.</a:t>
             </a:r>
           </a:p>
         </p:txBody>
@@ -1027,7 +1037,7 @@
           <a:lstStyle/>
           <a:p>
             <a:r>
-              <a:t>Hands-on: module1/examples/examples/spec_to_rtl/</a:t>
+              <a:t>Run from course repository root.</a:t>
             </a:r>
           </a:p>
         </p:txBody>
@@ -1097,7 +1107,147 @@
           <a:lstStyle/>
           <a:p>
             <a:r>
-              <a:t>From MODULE1 Learning Outcomes.</a:t>
+              <a:t>module1/examples/spec_to_rtl/README.md</a:t>
+            </a:r>
+          </a:p>
+        </p:txBody>
+      </p:sp>
+      <p:sp>
+        <p:nvSpPr>
+          <p:cNvPr id="4" name="Slide Number Placeholder 3"/>
+          <p:cNvSpPr>
+            <a:spLocks noGrp="1"/>
+          </p:cNvSpPr>
+          <p:nvPr>
+            <p:ph type="sldNum" idx="5" sz="quarter"/>
+          </p:nvPr>
+        </p:nvSpPr>
+        <p:spPr/>
+      </p:sp>
+    </p:spTree>
+  </p:cSld>
+  <p:clrMapOvr>
+    <a:masterClrMapping/>
+  </p:clrMapOvr>
+</p:notes>
+</file>
+
+<file path=ppt/notesSlides/notesSlide18.xml><?xml version="1.0" encoding="utf-8"?>
+<p:notes xmlns:a="http://schemas.openxmlformats.org/drawingml/2006/main" xmlns:p="http://schemas.openxmlformats.org/presentationml/2006/main" xmlns:r="http://schemas.openxmlformats.org/officeDocument/2006/relationships">
+  <p:cSld>
+    <p:spTree>
+      <p:nvGrpSpPr>
+        <p:cNvPr id="1" name=""/>
+        <p:cNvGrpSpPr/>
+        <p:nvPr/>
+      </p:nvGrpSpPr>
+      <p:grpSpPr>
+        <a:xfrm>
+          <a:off x="0" y="0"/>
+          <a:ext cx="0" cy="0"/>
+          <a:chOff x="0" y="0"/>
+          <a:chExt cx="0" cy="0"/>
+        </a:xfrm>
+      </p:grpSpPr>
+      <p:sp>
+        <p:nvSpPr>
+          <p:cNvPr id="2" name="Slide Image Placeholder 1"/>
+          <p:cNvSpPr>
+            <a:spLocks noGrp="1"/>
+          </p:cNvSpPr>
+          <p:nvPr>
+            <p:ph type="sldImg" idx="2"/>
+          </p:nvPr>
+        </p:nvSpPr>
+        <p:spPr/>
+      </p:sp>
+      <p:sp>
+        <p:nvSpPr>
+          <p:cNvPr id="3" name="Notes Placeholder 2"/>
+          <p:cNvSpPr>
+            <a:spLocks noGrp="1"/>
+          </p:cNvSpPr>
+          <p:nvPr>
+            <p:ph type="body" idx="3" sz="quarter"/>
+          </p:nvPr>
+        </p:nvSpPr>
+        <p:spPr/>
+        <p:txBody>
+          <a:bodyPr/>
+          <a:lstStyle/>
+          <a:p>
+            <a:r>
+              <a:t>Hands-on: module1/examples/spec_to_rtl/</a:t>
+            </a:r>
+          </a:p>
+        </p:txBody>
+      </p:sp>
+      <p:sp>
+        <p:nvSpPr>
+          <p:cNvPr id="4" name="Slide Number Placeholder 3"/>
+          <p:cNvSpPr>
+            <a:spLocks noGrp="1"/>
+          </p:cNvSpPr>
+          <p:nvPr>
+            <p:ph type="sldNum" idx="5" sz="quarter"/>
+          </p:nvPr>
+        </p:nvSpPr>
+        <p:spPr/>
+      </p:sp>
+    </p:spTree>
+  </p:cSld>
+  <p:clrMapOvr>
+    <a:masterClrMapping/>
+  </p:clrMapOvr>
+</p:notes>
+</file>
+
+<file path=ppt/notesSlides/notesSlide19.xml><?xml version="1.0" encoding="utf-8"?>
+<p:notes xmlns:a="http://schemas.openxmlformats.org/drawingml/2006/main" xmlns:p="http://schemas.openxmlformats.org/presentationml/2006/main" xmlns:r="http://schemas.openxmlformats.org/officeDocument/2006/relationships">
+  <p:cSld>
+    <p:spTree>
+      <p:nvGrpSpPr>
+        <p:cNvPr id="1" name=""/>
+        <p:cNvGrpSpPr/>
+        <p:nvPr/>
+      </p:nvGrpSpPr>
+      <p:grpSpPr>
+        <a:xfrm>
+          <a:off x="0" y="0"/>
+          <a:ext cx="0" cy="0"/>
+          <a:chOff x="0" y="0"/>
+          <a:chExt cx="0" cy="0"/>
+        </a:xfrm>
+      </p:grpSpPr>
+      <p:sp>
+        <p:nvSpPr>
+          <p:cNvPr id="2" name="Slide Image Placeholder 1"/>
+          <p:cNvSpPr>
+            <a:spLocks noGrp="1"/>
+          </p:cNvSpPr>
+          <p:nvPr>
+            <p:ph type="sldImg" idx="2"/>
+          </p:nvPr>
+        </p:nvSpPr>
+        <p:spPr/>
+      </p:sp>
+      <p:sp>
+        <p:nvSpPr>
+          <p:cNvPr id="3" name="Notes Placeholder 2"/>
+          <p:cNvSpPr>
+            <a:spLocks noGrp="1"/>
+          </p:cNvSpPr>
+          <p:nvPr>
+            <p:ph type="body" idx="3" sz="quarter"/>
+          </p:nvPr>
+        </p:nvSpPr>
+        <p:spPr/>
+        <p:txBody>
+          <a:bodyPr/>
+          <a:lstStyle/>
+          <a:p>
+            <a:r>
+              <a:t>From MODULE1 Key Concepts.</a:t>
             </a:r>
           </a:p>
         </p:txBody>
@@ -1192,6 +1342,286 @@
 </p:notes>
 </file>
 
+<file path=ppt/notesSlides/notesSlide20.xml><?xml version="1.0" encoding="utf-8"?>
+<p:notes xmlns:a="http://schemas.openxmlformats.org/drawingml/2006/main" xmlns:p="http://schemas.openxmlformats.org/presentationml/2006/main" xmlns:r="http://schemas.openxmlformats.org/officeDocument/2006/relationships">
+  <p:cSld>
+    <p:spTree>
+      <p:nvGrpSpPr>
+        <p:cNvPr id="1" name=""/>
+        <p:cNvGrpSpPr/>
+        <p:nvPr/>
+      </p:nvGrpSpPr>
+      <p:grpSpPr>
+        <a:xfrm>
+          <a:off x="0" y="0"/>
+          <a:ext cx="0" cy="0"/>
+          <a:chOff x="0" y="0"/>
+          <a:chExt cx="0" cy="0"/>
+        </a:xfrm>
+      </p:grpSpPr>
+      <p:sp>
+        <p:nvSpPr>
+          <p:cNvPr id="2" name="Slide Image Placeholder 1"/>
+          <p:cNvSpPr>
+            <a:spLocks noGrp="1"/>
+          </p:cNvSpPr>
+          <p:nvPr>
+            <p:ph type="sldImg" idx="2"/>
+          </p:nvPr>
+        </p:nvSpPr>
+        <p:spPr/>
+      </p:sp>
+      <p:sp>
+        <p:nvSpPr>
+          <p:cNvPr id="3" name="Notes Placeholder 2"/>
+          <p:cNvSpPr>
+            <a:spLocks noGrp="1"/>
+          </p:cNvSpPr>
+          <p:nvPr>
+            <p:ph type="body" idx="3" sz="quarter"/>
+          </p:nvPr>
+        </p:nvSpPr>
+        <p:spPr/>
+        <p:txBody>
+          <a:bodyPr/>
+          <a:lstStyle/>
+          <a:p>
+            <a:r>
+              <a:t>From MODULE1 Key Concepts.</a:t>
+            </a:r>
+          </a:p>
+        </p:txBody>
+      </p:sp>
+      <p:sp>
+        <p:nvSpPr>
+          <p:cNvPr id="4" name="Slide Number Placeholder 3"/>
+          <p:cNvSpPr>
+            <a:spLocks noGrp="1"/>
+          </p:cNvSpPr>
+          <p:nvPr>
+            <p:ph type="sldNum" idx="5" sz="quarter"/>
+          </p:nvPr>
+        </p:nvSpPr>
+        <p:spPr/>
+      </p:sp>
+    </p:spTree>
+  </p:cSld>
+  <p:clrMapOvr>
+    <a:masterClrMapping/>
+  </p:clrMapOvr>
+</p:notes>
+</file>
+
+<file path=ppt/notesSlides/notesSlide21.xml><?xml version="1.0" encoding="utf-8"?>
+<p:notes xmlns:a="http://schemas.openxmlformats.org/drawingml/2006/main" xmlns:p="http://schemas.openxmlformats.org/presentationml/2006/main" xmlns:r="http://schemas.openxmlformats.org/officeDocument/2006/relationships">
+  <p:cSld>
+    <p:spTree>
+      <p:nvGrpSpPr>
+        <p:cNvPr id="1" name=""/>
+        <p:cNvGrpSpPr/>
+        <p:nvPr/>
+      </p:nvGrpSpPr>
+      <p:grpSpPr>
+        <a:xfrm>
+          <a:off x="0" y="0"/>
+          <a:ext cx="0" cy="0"/>
+          <a:chOff x="0" y="0"/>
+          <a:chExt cx="0" cy="0"/>
+        </a:xfrm>
+      </p:grpSpPr>
+      <p:sp>
+        <p:nvSpPr>
+          <p:cNvPr id="2" name="Slide Image Placeholder 1"/>
+          <p:cNvSpPr>
+            <a:spLocks noGrp="1"/>
+          </p:cNvSpPr>
+          <p:nvPr>
+            <p:ph type="sldImg" idx="2"/>
+          </p:nvPr>
+        </p:nvSpPr>
+        <p:spPr/>
+      </p:sp>
+      <p:sp>
+        <p:nvSpPr>
+          <p:cNvPr id="3" name="Notes Placeholder 2"/>
+          <p:cNvSpPr>
+            <a:spLocks noGrp="1"/>
+          </p:cNvSpPr>
+          <p:nvPr>
+            <p:ph type="body" idx="3" sz="quarter"/>
+          </p:nvPr>
+        </p:nvSpPr>
+        <p:spPr/>
+        <p:txBody>
+          <a:bodyPr/>
+          <a:lstStyle/>
+          <a:p>
+            <a:r>
+              <a:t>From MODULE1 Common Pitfalls.</a:t>
+            </a:r>
+          </a:p>
+        </p:txBody>
+      </p:sp>
+      <p:sp>
+        <p:nvSpPr>
+          <p:cNvPr id="4" name="Slide Number Placeholder 3"/>
+          <p:cNvSpPr>
+            <a:spLocks noGrp="1"/>
+          </p:cNvSpPr>
+          <p:nvPr>
+            <p:ph type="sldNum" idx="5" sz="quarter"/>
+          </p:nvPr>
+        </p:nvSpPr>
+        <p:spPr/>
+      </p:sp>
+    </p:spTree>
+  </p:cSld>
+  <p:clrMapOvr>
+    <a:masterClrMapping/>
+  </p:clrMapOvr>
+</p:notes>
+</file>
+
+<file path=ppt/notesSlides/notesSlide22.xml><?xml version="1.0" encoding="utf-8"?>
+<p:notes xmlns:a="http://schemas.openxmlformats.org/drawingml/2006/main" xmlns:p="http://schemas.openxmlformats.org/presentationml/2006/main" xmlns:r="http://schemas.openxmlformats.org/officeDocument/2006/relationships">
+  <p:cSld>
+    <p:spTree>
+      <p:nvGrpSpPr>
+        <p:cNvPr id="1" name=""/>
+        <p:cNvGrpSpPr/>
+        <p:nvPr/>
+      </p:nvGrpSpPr>
+      <p:grpSpPr>
+        <a:xfrm>
+          <a:off x="0" y="0"/>
+          <a:ext cx="0" cy="0"/>
+          <a:chOff x="0" y="0"/>
+          <a:chExt cx="0" cy="0"/>
+        </a:xfrm>
+      </p:grpSpPr>
+      <p:sp>
+        <p:nvSpPr>
+          <p:cNvPr id="2" name="Slide Image Placeholder 1"/>
+          <p:cNvSpPr>
+            <a:spLocks noGrp="1"/>
+          </p:cNvSpPr>
+          <p:nvPr>
+            <p:ph type="sldImg" idx="2"/>
+          </p:nvPr>
+        </p:nvSpPr>
+        <p:spPr/>
+      </p:sp>
+      <p:sp>
+        <p:nvSpPr>
+          <p:cNvPr id="3" name="Notes Placeholder 2"/>
+          <p:cNvSpPr>
+            <a:spLocks noGrp="1"/>
+          </p:cNvSpPr>
+          <p:nvPr>
+            <p:ph type="body" idx="3" sz="quarter"/>
+          </p:nvPr>
+        </p:nvSpPr>
+        <p:spPr/>
+        <p:txBody>
+          <a:bodyPr/>
+          <a:lstStyle/>
+          <a:p>
+            <a:r>
+              <a:t>From MODULE1 Common Pitfalls.</a:t>
+            </a:r>
+          </a:p>
+        </p:txBody>
+      </p:sp>
+      <p:sp>
+        <p:nvSpPr>
+          <p:cNvPr id="4" name="Slide Number Placeholder 3"/>
+          <p:cNvSpPr>
+            <a:spLocks noGrp="1"/>
+          </p:cNvSpPr>
+          <p:nvPr>
+            <p:ph type="sldNum" idx="5" sz="quarter"/>
+          </p:nvPr>
+        </p:nvSpPr>
+        <p:spPr/>
+      </p:sp>
+    </p:spTree>
+  </p:cSld>
+  <p:clrMapOvr>
+    <a:masterClrMapping/>
+  </p:clrMapOvr>
+</p:notes>
+</file>
+
+<file path=ppt/notesSlides/notesSlide23.xml><?xml version="1.0" encoding="utf-8"?>
+<p:notes xmlns:a="http://schemas.openxmlformats.org/drawingml/2006/main" xmlns:p="http://schemas.openxmlformats.org/presentationml/2006/main" xmlns:r="http://schemas.openxmlformats.org/officeDocument/2006/relationships">
+  <p:cSld>
+    <p:spTree>
+      <p:nvGrpSpPr>
+        <p:cNvPr id="1" name=""/>
+        <p:cNvGrpSpPr/>
+        <p:nvPr/>
+      </p:nvGrpSpPr>
+      <p:grpSpPr>
+        <a:xfrm>
+          <a:off x="0" y="0"/>
+          <a:ext cx="0" cy="0"/>
+          <a:chOff x="0" y="0"/>
+          <a:chExt cx="0" cy="0"/>
+        </a:xfrm>
+      </p:grpSpPr>
+      <p:sp>
+        <p:nvSpPr>
+          <p:cNvPr id="2" name="Slide Image Placeholder 1"/>
+          <p:cNvSpPr>
+            <a:spLocks noGrp="1"/>
+          </p:cNvSpPr>
+          <p:nvPr>
+            <p:ph type="sldImg" idx="2"/>
+          </p:nvPr>
+        </p:nvSpPr>
+        <p:spPr/>
+      </p:sp>
+      <p:sp>
+        <p:nvSpPr>
+          <p:cNvPr id="3" name="Notes Placeholder 2"/>
+          <p:cNvSpPr>
+            <a:spLocks noGrp="1"/>
+          </p:cNvSpPr>
+          <p:nvPr>
+            <p:ph type="body" idx="3" sz="quarter"/>
+          </p:nvPr>
+        </p:nvSpPr>
+        <p:spPr/>
+        <p:txBody>
+          <a:bodyPr/>
+          <a:lstStyle/>
+          <a:p>
+            <a:r>
+              <a:t>From MODULE1 Learning Outcomes.</a:t>
+            </a:r>
+          </a:p>
+        </p:txBody>
+      </p:sp>
+      <p:sp>
+        <p:nvSpPr>
+          <p:cNvPr id="4" name="Slide Number Placeholder 3"/>
+          <p:cNvSpPr>
+            <a:spLocks noGrp="1"/>
+          </p:cNvSpPr>
+          <p:nvPr>
+            <p:ph type="sldNum" idx="5" sz="quarter"/>
+          </p:nvPr>
+        </p:nvSpPr>
+        <p:spPr/>
+      </p:sp>
+    </p:spTree>
+  </p:cSld>
+  <p:clrMapOvr>
+    <a:masterClrMapping/>
+  </p:clrMapOvr>
+</p:notes>
+</file>
+
 <file path=ppt/notesSlides/notesSlide3.xml><?xml version="1.0" encoding="utf-8"?>
 <p:notes xmlns:a="http://schemas.openxmlformats.org/drawingml/2006/main" xmlns:p="http://schemas.openxmlformats.org/presentationml/2006/main" xmlns:r="http://schemas.openxmlformats.org/officeDocument/2006/relationships">
   <p:cSld>
@@ -1377,7 +1807,7 @@
           <a:lstStyle/>
           <a:p>
             <a:r>
-              <a:t>From MODULE1 Verification &amp; Testing Methods.</a:t>
+              <a:t>From MODULE1 — execution and artifact layout.</a:t>
             </a:r>
           </a:p>
         </p:txBody>
@@ -1447,7 +1877,7 @@
           <a:lstStyle/>
           <a:p>
             <a:r>
-              <a:t>From MODULE1 Verification &amp; Testing Methods.</a:t>
+              <a:t>Trace while running module1/EXAMPLES.md labs.</a:t>
             </a:r>
           </a:p>
         </p:txBody>
@@ -1587,7 +2017,7 @@
           <a:lstStyle/>
           <a:p>
             <a:r>
-              <a:t>From MODULE1 Topics Covered.</a:t>
+              <a:t>From MODULE1 Verification &amp; Testing Methods.</a:t>
             </a:r>
           </a:p>
         </p:txBody>
@@ -1657,7 +2087,7 @@
           <a:lstStyle/>
           <a:p>
             <a:r>
-              <a:t>From MODULE1 Topics Covered.</a:t>
+              <a:t>From MODULE1 Verification &amp; Testing Methods.</a:t>
             </a:r>
           </a:p>
         </p:txBody>
@@ -4815,14 +5245,189 @@
               </a:defRPr>
             </a:pPr>
             <a:r>
-              <a:t>Verification environment architecture</a:t>
+              <a:t>2. Counter DUT structure</a:t>
+            </a:r>
+          </a:p>
+        </p:txBody>
+      </p:sp>
+      <p:sp>
+        <p:nvSpPr>
+          <p:cNvPr id="3" name="TextBox 2"/>
+          <p:cNvSpPr txBox="1"/>
+          <p:nvPr/>
+        </p:nvSpPr>
+        <p:spPr>
+          <a:xfrm>
+            <a:off x="548640" y="1234440"/>
+            <a:ext cx="5303520" cy="4754880"/>
+          </a:xfrm>
+          <a:prstGeom prst="rect">
+            <a:avLst/>
+          </a:prstGeom>
+          <a:noFill/>
+        </p:spPr>
+        <p:txBody>
+          <a:bodyPr wrap="square">
+            <a:noAutofit/>
+          </a:bodyPr>
+          <a:lstStyle/>
+          <a:p>
+            <a:pPr>
+              <a:lnSpc>
+                <a:spcPts val="2200"/>
+              </a:lnSpc>
+              <a:spcAft>
+                <a:spcPts val="1000"/>
+              </a:spcAft>
+              <a:defRPr sz="2000" b="0">
+                <a:solidFill>
+                  <a:srgbClr val="333333"/>
+                </a:solidFill>
+                <a:latin typeface="Calibri"/>
+              </a:defRPr>
+            </a:pPr>
+            <a:r>
+              <a:t>• 8-bit up-counter: increments</a:t>
+            </a:r>
+          </a:p>
+          <a:p>
+            <a:pPr>
+              <a:lnSpc>
+                <a:spcPts val="2200"/>
+              </a:lnSpc>
+              <a:spcAft>
+                <a:spcPts val="1000"/>
+              </a:spcAft>
+              <a:defRPr sz="2000" b="0">
+                <a:solidFill>
+                  <a:srgbClr val="333333"/>
+                </a:solidFill>
+                <a:latin typeface="Calibri"/>
+              </a:defRPr>
+            </a:pPr>
+            <a:r>
+              <a:t>      when `enable` is high; holds</a:t>
+            </a:r>
+          </a:p>
+          <a:p>
+            <a:pPr>
+              <a:lnSpc>
+                <a:spcPts val="2200"/>
+              </a:lnSpc>
+              <a:spcAft>
+                <a:spcPts val="1000"/>
+              </a:spcAft>
+              <a:defRPr sz="2000" b="0">
+                <a:solidFill>
+                  <a:srgbClr val="333333"/>
+                </a:solidFill>
+                <a:latin typeface="Calibri"/>
+              </a:defRPr>
+            </a:pPr>
+            <a:r>
+              <a:t>      when disabled.</a:t>
+            </a:r>
+          </a:p>
+          <a:p>
+            <a:pPr>
+              <a:lnSpc>
+                <a:spcPts val="2200"/>
+              </a:lnSpc>
+              <a:spcAft>
+                <a:spcPts val="1000"/>
+              </a:spcAft>
+              <a:defRPr sz="2000" b="0">
+                <a:solidFill>
+                  <a:srgbClr val="333333"/>
+                </a:solidFill>
+                <a:latin typeface="Calibri"/>
+              </a:defRPr>
+            </a:pPr>
+            <a:r>
+              <a:t>• Reset: synchronous active-low</a:t>
+            </a:r>
+          </a:p>
+          <a:p>
+            <a:pPr>
+              <a:lnSpc>
+                <a:spcPts val="2200"/>
+              </a:lnSpc>
+              <a:spcAft>
+                <a:spcPts val="1000"/>
+              </a:spcAft>
+              <a:defRPr sz="2000" b="0">
+                <a:solidFill>
+                  <a:srgbClr val="333333"/>
+                </a:solidFill>
+                <a:latin typeface="Calibri"/>
+              </a:defRPr>
+            </a:pPr>
+            <a:r>
+              <a:t>      `rst_n` clears `count` to zero.</a:t>
+            </a:r>
+          </a:p>
+          <a:p>
+            <a:pPr>
+              <a:lnSpc>
+                <a:spcPts val="2200"/>
+              </a:lnSpc>
+              <a:spcAft>
+                <a:spcPts val="1000"/>
+              </a:spcAft>
+              <a:defRPr sz="2000" b="0">
+                <a:solidFill>
+                  <a:srgbClr val="333333"/>
+                </a:solidFill>
+                <a:latin typeface="Calibri"/>
+              </a:defRPr>
+            </a:pPr>
+            <a:r>
+              <a:t>• Ports: `clk`, `rst_n`, `enable`,</a:t>
+            </a:r>
+          </a:p>
+          <a:p>
+            <a:pPr>
+              <a:lnSpc>
+                <a:spcPts val="2200"/>
+              </a:lnSpc>
+              <a:spcAft>
+                <a:spcPts val="1000"/>
+              </a:spcAft>
+              <a:defRPr sz="2000" b="0">
+                <a:solidFill>
+                  <a:srgbClr val="333333"/>
+                </a:solidFill>
+                <a:latin typeface="Calibri"/>
+              </a:defRPr>
+            </a:pPr>
+            <a:r>
+              <a:t>      `count[7:0]` — map directly from</a:t>
+            </a:r>
+          </a:p>
+          <a:p>
+            <a:pPr>
+              <a:lnSpc>
+                <a:spcPts val="2200"/>
+              </a:lnSpc>
+              <a:spcAft>
+                <a:spcPts val="1000"/>
+              </a:spcAft>
+              <a:defRPr sz="2000" b="0">
+                <a:solidFill>
+                  <a:srgbClr val="333333"/>
+                </a:solidFill>
+                <a:latin typeface="Calibri"/>
+              </a:defRPr>
+            </a:pPr>
+            <a:r>
+              <a:t>      the spec interface table.</a:t>
             </a:r>
           </a:p>
         </p:txBody>
       </p:sp>
       <p:pic>
         <p:nvPicPr>
-          <p:cNvPr id="3" name="Picture 2" descr="verification_architecture.png"/>
+          <p:cNvPr id="4" name="Picture 3" descr="verification_architecture.png"/>
           <p:cNvPicPr>
             <a:picLocks noChangeAspect="1"/>
           </p:cNvPicPr>
@@ -4836,53 +5441,14 @@
         </p:blipFill>
         <p:spPr>
           <a:xfrm>
-            <a:off x="548640" y="1143000"/>
-            <a:ext cx="8128000" cy="4572000"/>
+            <a:off x="6172200" y="2094547"/>
+            <a:ext cx="5394960" cy="3034665"/>
           </a:xfrm>
           <a:prstGeom prst="rect">
             <a:avLst/>
           </a:prstGeom>
         </p:spPr>
       </p:pic>
-      <p:sp>
-        <p:nvSpPr>
-          <p:cNvPr id="4" name="TextBox 3"/>
-          <p:cNvSpPr txBox="1"/>
-          <p:nvPr/>
-        </p:nvSpPr>
-        <p:spPr>
-          <a:xfrm>
-            <a:off x="548640" y="5897880"/>
-            <a:ext cx="11064240" cy="411480"/>
-          </a:xfrm>
-          <a:prstGeom prst="rect">
-            <a:avLst/>
-          </a:prstGeom>
-          <a:noFill/>
-        </p:spPr>
-        <p:txBody>
-          <a:bodyPr wrap="square">
-            <a:noAutofit/>
-          </a:bodyPr>
-          <a:lstStyle/>
-          <a:p>
-            <a:pPr>
-              <a:lnSpc>
-                <a:spcPts val="2200"/>
-              </a:lnSpc>
-              <a:defRPr sz="1200" b="0">
-                <a:solidFill>
-                  <a:srgbClr val="333333"/>
-                </a:solidFill>
-                <a:latin typeface="Calibri"/>
-              </a:defRPr>
-            </a:pPr>
-            <a:r>
-              <a:t>Module 1: UVM layers, agents, and checkers for this phase.</a:t>
-            </a:r>
-          </a:p>
-        </p:txBody>
-      </p:sp>
       <p:sp>
         <p:nvSpPr>
           <p:cNvPr id="5" name="TextBox 4"/>
@@ -4974,7 +5540,7 @@
               </a:defRPr>
             </a:pPr>
             <a:r>
-              <a:t>1. Artifact flow (spec_to_rtl)</a:t>
+              <a:t>3. Simulation harness attachment</a:t>
             </a:r>
           </a:p>
         </p:txBody>
@@ -4988,7 +5554,7 @@
         <p:spPr>
           <a:xfrm>
             <a:off x="548640" y="1234440"/>
-            <a:ext cx="11064240" cy="4937760"/>
+            <a:ext cx="5303520" cy="4754880"/>
           </a:xfrm>
           <a:prstGeom prst="rect">
             <a:avLst/>
@@ -5016,7 +5582,7 @@
               </a:defRPr>
             </a:pPr>
             <a:r>
-              <a:t>• SPEC.md → requirements in plain language (interface,</a:t>
+              <a:t>• C++ generates `clk` and drives</a:t>
             </a:r>
           </a:p>
           <a:p>
@@ -5035,7 +5601,7 @@
               </a:defRPr>
             </a:pPr>
             <a:r>
-              <a:t>      behavior, timing).</a:t>
+              <a:t>      `rst_n` / `enable`; reads</a:t>
             </a:r>
           </a:p>
           <a:p>
@@ -5054,7 +5620,7 @@
               </a:defRPr>
             </a:pPr>
             <a:r>
-              <a:t>• dut/counter.v → synthesizable RTL implementing the</a:t>
+              <a:t>      `count` each cycle.</a:t>
             </a:r>
           </a:p>
           <a:p>
@@ -5073,7 +5639,7 @@
               </a:defRPr>
             </a:pPr>
             <a:r>
-              <a:t>      spec.</a:t>
+              <a:t>• No SystemVerilog testbench yet —</a:t>
             </a:r>
           </a:p>
           <a:p>
@@ -5092,7 +5658,7 @@
               </a:defRPr>
             </a:pPr>
             <a:r>
-              <a:t>• top.v → wrapper connecting DUT pins to the</a:t>
+              <a:t>      you will add structured TB/UVM</a:t>
             </a:r>
           </a:p>
           <a:p>
@@ -5111,52 +5677,38 @@
               </a:defRPr>
             </a:pPr>
             <a:r>
-              <a:t>      simulation harness.</a:t>
-            </a:r>
-          </a:p>
-          <a:p>
-            <a:pPr>
-              <a:lnSpc>
-                <a:spcPts val="2200"/>
-              </a:lnSpc>
-              <a:spcAft>
-                <a:spcPts val="1000"/>
-              </a:spcAft>
-              <a:defRPr sz="2000" b="0">
-                <a:solidFill>
-                  <a:srgbClr val="333333"/>
-                </a:solidFill>
-                <a:latin typeface="Calibri"/>
-              </a:defRPr>
-            </a:pPr>
-            <a:r>
-              <a:t>• sim_main.cpp → clock, reset, stimulus, and result</a:t>
-            </a:r>
-          </a:p>
-          <a:p>
-            <a:pPr>
-              <a:lnSpc>
-                <a:spcPts val="2200"/>
-              </a:lnSpc>
-              <a:spcAft>
-                <a:spcPts val="1000"/>
-              </a:spcAft>
-              <a:defRPr sz="2000" b="0">
-                <a:solidFill>
-                  <a:srgbClr val="333333"/>
-                </a:solidFill>
-                <a:latin typeface="Calibri"/>
-              </a:defRPr>
-            </a:pPr>
-            <a:r>
-              <a:t>      checking outside RTL.</a:t>
-            </a:r>
-          </a:p>
-        </p:txBody>
-      </p:sp>
-      <p:sp>
-        <p:nvSpPr>
-          <p:cNvPr id="4" name="TextBox 3"/>
+              <a:t>      in Module 2.</a:t>
+            </a:r>
+          </a:p>
+        </p:txBody>
+      </p:sp>
+      <p:pic>
+        <p:nvPicPr>
+          <p:cNvPr id="4" name="Picture 3" descr="testing_methods.png"/>
+          <p:cNvPicPr>
+            <a:picLocks noChangeAspect="1"/>
+          </p:cNvPicPr>
+          <p:nvPr/>
+        </p:nvPicPr>
+        <p:blipFill>
+          <a:blip r:embed="rId2"/>
+          <a:stretch>
+            <a:fillRect/>
+          </a:stretch>
+        </p:blipFill>
+        <p:spPr>
+          <a:xfrm>
+            <a:off x="6172200" y="2094547"/>
+            <a:ext cx="5394960" cy="3034665"/>
+          </a:xfrm>
+          <a:prstGeom prst="rect">
+            <a:avLst/>
+          </a:prstGeom>
+        </p:spPr>
+      </p:pic>
+      <p:sp>
+        <p:nvSpPr>
+          <p:cNvPr id="5" name="TextBox 4"/>
           <p:cNvSpPr txBox="1"/>
           <p:nvPr/>
         </p:nvSpPr>
@@ -5245,21 +5797,45 @@
               </a:defRPr>
             </a:pPr>
             <a:r>
-              <a:t>2. Counter DUT structure</a:t>
-            </a:r>
-          </a:p>
-        </p:txBody>
-      </p:sp>
-      <p:sp>
-        <p:nvSpPr>
-          <p:cNvPr id="3" name="TextBox 2"/>
+              <a:t>RTL block diagram (reference)</a:t>
+            </a:r>
+          </a:p>
+        </p:txBody>
+      </p:sp>
+      <p:pic>
+        <p:nvPicPr>
+          <p:cNvPr id="3" name="Picture 2" descr="rtl_architecture.png"/>
+          <p:cNvPicPr>
+            <a:picLocks noChangeAspect="1"/>
+          </p:cNvPicPr>
+          <p:nvPr/>
+        </p:nvPicPr>
+        <p:blipFill>
+          <a:blip r:embed="rId2"/>
+          <a:stretch>
+            <a:fillRect/>
+          </a:stretch>
+        </p:blipFill>
+        <p:spPr>
+          <a:xfrm>
+            <a:off x="548640" y="1143000"/>
+            <a:ext cx="8128000" cy="4572000"/>
+          </a:xfrm>
+          <a:prstGeom prst="rect">
+            <a:avLst/>
+          </a:prstGeom>
+        </p:spPr>
+      </p:pic>
+      <p:sp>
+        <p:nvSpPr>
+          <p:cNvPr id="4" name="TextBox 3"/>
           <p:cNvSpPr txBox="1"/>
           <p:nvPr/>
         </p:nvSpPr>
         <p:spPr>
           <a:xfrm>
-            <a:off x="548640" y="1234440"/>
-            <a:ext cx="11064240" cy="4937760"/>
+            <a:off x="548640" y="5897880"/>
+            <a:ext cx="11064240" cy="411480"/>
           </a:xfrm>
           <a:prstGeom prst="rect">
             <a:avLst/>
@@ -5276,120 +5852,22 @@
               <a:lnSpc>
                 <a:spcPts val="2200"/>
               </a:lnSpc>
-              <a:spcAft>
-                <a:spcPts val="1000"/>
-              </a:spcAft>
-              <a:defRPr sz="2000" b="0">
-                <a:solidFill>
-                  <a:srgbClr val="333333"/>
-                </a:solidFill>
-                <a:latin typeface="Calibri"/>
-              </a:defRPr>
-            </a:pPr>
-            <a:r>
-              <a:t>• 8-bit up-counter: increments when `enable` is high;</a:t>
-            </a:r>
-          </a:p>
-          <a:p>
-            <a:pPr>
-              <a:lnSpc>
-                <a:spcPts val="2200"/>
-              </a:lnSpc>
-              <a:spcAft>
-                <a:spcPts val="1000"/>
-              </a:spcAft>
-              <a:defRPr sz="2000" b="0">
-                <a:solidFill>
-                  <a:srgbClr val="333333"/>
-                </a:solidFill>
-                <a:latin typeface="Calibri"/>
-              </a:defRPr>
-            </a:pPr>
-            <a:r>
-              <a:t>      holds when disabled.</a:t>
-            </a:r>
-          </a:p>
-          <a:p>
-            <a:pPr>
-              <a:lnSpc>
-                <a:spcPts val="2200"/>
-              </a:lnSpc>
-              <a:spcAft>
-                <a:spcPts val="1000"/>
-              </a:spcAft>
-              <a:defRPr sz="2000" b="0">
-                <a:solidFill>
-                  <a:srgbClr val="333333"/>
-                </a:solidFill>
-                <a:latin typeface="Calibri"/>
-              </a:defRPr>
-            </a:pPr>
-            <a:r>
-              <a:t>• Reset: synchronous active-low `rst_n` clears `count`</a:t>
-            </a:r>
-          </a:p>
-          <a:p>
-            <a:pPr>
-              <a:lnSpc>
-                <a:spcPts val="2200"/>
-              </a:lnSpc>
-              <a:spcAft>
-                <a:spcPts val="1000"/>
-              </a:spcAft>
-              <a:defRPr sz="2000" b="0">
-                <a:solidFill>
-                  <a:srgbClr val="333333"/>
-                </a:solidFill>
-                <a:latin typeface="Calibri"/>
-              </a:defRPr>
-            </a:pPr>
-            <a:r>
-              <a:t>      to zero.</a:t>
-            </a:r>
-          </a:p>
-          <a:p>
-            <a:pPr>
-              <a:lnSpc>
-                <a:spcPts val="2200"/>
-              </a:lnSpc>
-              <a:spcAft>
-                <a:spcPts val="1000"/>
-              </a:spcAft>
-              <a:defRPr sz="2000" b="0">
-                <a:solidFill>
-                  <a:srgbClr val="333333"/>
-                </a:solidFill>
-                <a:latin typeface="Calibri"/>
-              </a:defRPr>
-            </a:pPr>
-            <a:r>
-              <a:t>• Ports: `clk`, `rst_n`, `enable`, `count[7:0]` — map</a:t>
-            </a:r>
-          </a:p>
-          <a:p>
-            <a:pPr>
-              <a:lnSpc>
-                <a:spcPts val="2200"/>
-              </a:lnSpc>
-              <a:spcAft>
-                <a:spcPts val="1000"/>
-              </a:spcAft>
-              <a:defRPr sz="2000" b="0">
-                <a:solidFill>
-                  <a:srgbClr val="333333"/>
-                </a:solidFill>
-                <a:latin typeface="Calibri"/>
-              </a:defRPr>
-            </a:pPr>
-            <a:r>
-              <a:t>      directly from the spec interface table.</a:t>
-            </a:r>
-          </a:p>
-        </p:txBody>
-      </p:sp>
-      <p:sp>
-        <p:nvSpPr>
-          <p:cNvPr id="4" name="TextBox 3"/>
+              <a:defRPr sz="1200" b="0">
+                <a:solidFill>
+                  <a:srgbClr val="333333"/>
+                </a:solidFill>
+                <a:latin typeface="Calibri"/>
+              </a:defRPr>
+            </a:pPr>
+            <a:r>
+              <a:t>Module 1: DUT hierarchy and signal flow.</a:t>
+            </a:r>
+          </a:p>
+        </p:txBody>
+      </p:sp>
+      <p:sp>
+        <p:nvSpPr>
+          <p:cNvPr id="5" name="TextBox 4"/>
           <p:cNvSpPr txBox="1"/>
           <p:nvPr/>
         </p:nvSpPr>
@@ -5478,7 +5956,7 @@
               </a:defRPr>
             </a:pPr>
             <a:r>
-              <a:t>3. Simulation harness attachment</a:t>
+              <a:t>counter.v — spec in RTL</a:t>
             </a:r>
           </a:p>
         </p:txBody>
@@ -5491,13 +5969,15 @@
         </p:nvSpPr>
         <p:spPr>
           <a:xfrm>
-            <a:off x="548640" y="1234440"/>
-            <a:ext cx="11064240" cy="4937760"/>
+            <a:off x="548640" y="1143000"/>
+            <a:ext cx="11064240" cy="5029200"/>
           </a:xfrm>
           <a:prstGeom prst="rect">
             <a:avLst/>
           </a:prstGeom>
-          <a:noFill/>
+          <a:solidFill>
+            <a:srgbClr val="F4F4F4"/>
+          </a:solidFill>
         </p:spPr>
         <p:txBody>
           <a:bodyPr wrap="square">
@@ -5510,74 +5990,315 @@
                 <a:spcPts val="2200"/>
               </a:lnSpc>
               <a:spcAft>
-                <a:spcPts val="1000"/>
-              </a:spcAft>
-              <a:defRPr sz="2000" b="0">
-                <a:solidFill>
-                  <a:srgbClr val="333333"/>
-                </a:solidFill>
-                <a:latin typeface="Calibri"/>
-              </a:defRPr>
-            </a:pPr>
-            <a:r>
-              <a:t>• C++ generates `clk` and drives `rst_n` / `enable`;</a:t>
-            </a:r>
-          </a:p>
-          <a:p>
-            <a:pPr>
-              <a:lnSpc>
-                <a:spcPts val="2200"/>
-              </a:lnSpc>
-              <a:spcAft>
-                <a:spcPts val="1000"/>
-              </a:spcAft>
-              <a:defRPr sz="2000" b="0">
-                <a:solidFill>
-                  <a:srgbClr val="333333"/>
-                </a:solidFill>
-                <a:latin typeface="Calibri"/>
-              </a:defRPr>
-            </a:pPr>
-            <a:r>
-              <a:t>      reads `count` each cycle.</a:t>
-            </a:r>
-          </a:p>
-          <a:p>
-            <a:pPr>
-              <a:lnSpc>
-                <a:spcPts val="2200"/>
-              </a:lnSpc>
-              <a:spcAft>
-                <a:spcPts val="1000"/>
-              </a:spcAft>
-              <a:defRPr sz="2000" b="0">
-                <a:solidFill>
-                  <a:srgbClr val="333333"/>
-                </a:solidFill>
-                <a:latin typeface="Calibri"/>
-              </a:defRPr>
-            </a:pPr>
-            <a:r>
-              <a:t>• No SystemVerilog testbench yet — you will add</a:t>
-            </a:r>
-          </a:p>
-          <a:p>
-            <a:pPr>
-              <a:lnSpc>
-                <a:spcPts val="2200"/>
-              </a:lnSpc>
-              <a:spcAft>
-                <a:spcPts val="1000"/>
-              </a:spcAft>
-              <a:defRPr sz="2000" b="0">
-                <a:solidFill>
-                  <a:srgbClr val="333333"/>
-                </a:solidFill>
-                <a:latin typeface="Calibri"/>
-              </a:defRPr>
-            </a:pPr>
-            <a:r>
-              <a:t>      structured TB/UVM in Module 2.</a:t>
+                <a:spcPts val="400"/>
+              </a:spcAft>
+              <a:defRPr sz="2000" b="0">
+                <a:solidFill>
+                  <a:srgbClr val="333333"/>
+                </a:solidFill>
+                <a:latin typeface="Consolas"/>
+              </a:defRPr>
+            </a:pPr>
+            <a:r>
+              <a:t>// 8-bit up-counter — RTL implementation per SPEC.md</a:t>
+            </a:r>
+          </a:p>
+          <a:p>
+            <a:pPr>
+              <a:lnSpc>
+                <a:spcPts val="2200"/>
+              </a:lnSpc>
+              <a:spcAft>
+                <a:spcPts val="400"/>
+              </a:spcAft>
+              <a:defRPr sz="2000" b="0">
+                <a:solidFill>
+                  <a:srgbClr val="333333"/>
+                </a:solidFill>
+                <a:latin typeface="Consolas"/>
+              </a:defRPr>
+            </a:pPr>
+            <a:r>
+              <a:t>// Module 1: Spec → RTL methodology example.</a:t>
+            </a:r>
+          </a:p>
+          <a:p>
+            <a:pPr>
+              <a:lnSpc>
+                <a:spcPts val="2200"/>
+              </a:lnSpc>
+              <a:spcAft>
+                <a:spcPts val="400"/>
+              </a:spcAft>
+              <a:defRPr sz="2000" b="0">
+                <a:solidFill>
+                  <a:srgbClr val="333333"/>
+                </a:solidFill>
+                <a:latin typeface="Consolas"/>
+              </a:defRPr>
+            </a:pPr>
+          </a:p>
+          <a:p>
+            <a:pPr>
+              <a:lnSpc>
+                <a:spcPts val="2200"/>
+              </a:lnSpc>
+              <a:spcAft>
+                <a:spcPts val="400"/>
+              </a:spcAft>
+              <a:defRPr sz="2000" b="0">
+                <a:solidFill>
+                  <a:srgbClr val="333333"/>
+                </a:solidFill>
+                <a:latin typeface="Consolas"/>
+              </a:defRPr>
+            </a:pPr>
+            <a:r>
+              <a:t>`timescale 1ns/1ps</a:t>
+            </a:r>
+          </a:p>
+          <a:p>
+            <a:pPr>
+              <a:lnSpc>
+                <a:spcPts val="2200"/>
+              </a:lnSpc>
+              <a:spcAft>
+                <a:spcPts val="400"/>
+              </a:spcAft>
+              <a:defRPr sz="2000" b="0">
+                <a:solidFill>
+                  <a:srgbClr val="333333"/>
+                </a:solidFill>
+                <a:latin typeface="Consolas"/>
+              </a:defRPr>
+            </a:pPr>
+          </a:p>
+          <a:p>
+            <a:pPr>
+              <a:lnSpc>
+                <a:spcPts val="2200"/>
+              </a:lnSpc>
+              <a:spcAft>
+                <a:spcPts val="400"/>
+              </a:spcAft>
+              <a:defRPr sz="2000" b="0">
+                <a:solidFill>
+                  <a:srgbClr val="333333"/>
+                </a:solidFill>
+                <a:latin typeface="Consolas"/>
+              </a:defRPr>
+            </a:pPr>
+            <a:r>
+              <a:t>module counter (</a:t>
+            </a:r>
+          </a:p>
+          <a:p>
+            <a:pPr>
+              <a:lnSpc>
+                <a:spcPts val="2200"/>
+              </a:lnSpc>
+              <a:spcAft>
+                <a:spcPts val="400"/>
+              </a:spcAft>
+              <a:defRPr sz="2000" b="0">
+                <a:solidFill>
+                  <a:srgbClr val="333333"/>
+                </a:solidFill>
+                <a:latin typeface="Consolas"/>
+              </a:defRPr>
+            </a:pPr>
+            <a:r>
+              <a:t>    input  wire       clk,</a:t>
+            </a:r>
+          </a:p>
+          <a:p>
+            <a:pPr>
+              <a:lnSpc>
+                <a:spcPts val="2200"/>
+              </a:lnSpc>
+              <a:spcAft>
+                <a:spcPts val="400"/>
+              </a:spcAft>
+              <a:defRPr sz="2000" b="0">
+                <a:solidFill>
+                  <a:srgbClr val="333333"/>
+                </a:solidFill>
+                <a:latin typeface="Consolas"/>
+              </a:defRPr>
+            </a:pPr>
+            <a:r>
+              <a:t>    input  wire       rst_n,</a:t>
+            </a:r>
+          </a:p>
+          <a:p>
+            <a:pPr>
+              <a:lnSpc>
+                <a:spcPts val="2200"/>
+              </a:lnSpc>
+              <a:spcAft>
+                <a:spcPts val="400"/>
+              </a:spcAft>
+              <a:defRPr sz="2000" b="0">
+                <a:solidFill>
+                  <a:srgbClr val="333333"/>
+                </a:solidFill>
+                <a:latin typeface="Consolas"/>
+              </a:defRPr>
+            </a:pPr>
+            <a:r>
+              <a:t>    input  wire       enable,</a:t>
+            </a:r>
+          </a:p>
+          <a:p>
+            <a:pPr>
+              <a:lnSpc>
+                <a:spcPts val="2200"/>
+              </a:lnSpc>
+              <a:spcAft>
+                <a:spcPts val="400"/>
+              </a:spcAft>
+              <a:defRPr sz="2000" b="0">
+                <a:solidFill>
+                  <a:srgbClr val="333333"/>
+                </a:solidFill>
+                <a:latin typeface="Consolas"/>
+              </a:defRPr>
+            </a:pPr>
+            <a:r>
+              <a:t>    output reg  [7:0] count</a:t>
+            </a:r>
+          </a:p>
+          <a:p>
+            <a:pPr>
+              <a:lnSpc>
+                <a:spcPts val="2200"/>
+              </a:lnSpc>
+              <a:spcAft>
+                <a:spcPts val="400"/>
+              </a:spcAft>
+              <a:defRPr sz="2000" b="0">
+                <a:solidFill>
+                  <a:srgbClr val="333333"/>
+                </a:solidFill>
+                <a:latin typeface="Consolas"/>
+              </a:defRPr>
+            </a:pPr>
+            <a:r>
+              <a:t>);</a:t>
+            </a:r>
+          </a:p>
+          <a:p>
+            <a:pPr>
+              <a:lnSpc>
+                <a:spcPts val="2200"/>
+              </a:lnSpc>
+              <a:spcAft>
+                <a:spcPts val="400"/>
+              </a:spcAft>
+              <a:defRPr sz="2000" b="0">
+                <a:solidFill>
+                  <a:srgbClr val="333333"/>
+                </a:solidFill>
+                <a:latin typeface="Consolas"/>
+              </a:defRPr>
+            </a:pPr>
+            <a:r>
+              <a:t>    always @(posedge clk) begin</a:t>
+            </a:r>
+          </a:p>
+          <a:p>
+            <a:pPr>
+              <a:lnSpc>
+                <a:spcPts val="2200"/>
+              </a:lnSpc>
+              <a:spcAft>
+                <a:spcPts val="400"/>
+              </a:spcAft>
+              <a:defRPr sz="2000" b="0">
+                <a:solidFill>
+                  <a:srgbClr val="333333"/>
+                </a:solidFill>
+                <a:latin typeface="Consolas"/>
+              </a:defRPr>
+            </a:pPr>
+            <a:r>
+              <a:t>        if (!rst_n)</a:t>
+            </a:r>
+          </a:p>
+          <a:p>
+            <a:pPr>
+              <a:lnSpc>
+                <a:spcPts val="2200"/>
+              </a:lnSpc>
+              <a:spcAft>
+                <a:spcPts val="400"/>
+              </a:spcAft>
+              <a:defRPr sz="2000" b="0">
+                <a:solidFill>
+                  <a:srgbClr val="333333"/>
+                </a:solidFill>
+                <a:latin typeface="Consolas"/>
+              </a:defRPr>
+            </a:pPr>
+            <a:r>
+              <a:t>            count &lt;= 8'h00;</a:t>
+            </a:r>
+          </a:p>
+          <a:p>
+            <a:pPr>
+              <a:lnSpc>
+                <a:spcPts val="2200"/>
+              </a:lnSpc>
+              <a:spcAft>
+                <a:spcPts val="400"/>
+              </a:spcAft>
+              <a:defRPr sz="2000" b="0">
+                <a:solidFill>
+                  <a:srgbClr val="333333"/>
+                </a:solidFill>
+                <a:latin typeface="Consolas"/>
+              </a:defRPr>
+            </a:pPr>
+            <a:r>
+              <a:t>        else if (enable)</a:t>
+            </a:r>
+          </a:p>
+          <a:p>
+            <a:pPr>
+              <a:lnSpc>
+                <a:spcPts val="2200"/>
+              </a:lnSpc>
+              <a:spcAft>
+                <a:spcPts val="400"/>
+              </a:spcAft>
+              <a:defRPr sz="2000" b="0">
+                <a:solidFill>
+                  <a:srgbClr val="333333"/>
+                </a:solidFill>
+                <a:latin typeface="Consolas"/>
+              </a:defRPr>
+            </a:pPr>
+            <a:r>
+              <a:t>            count &lt;= count + 8'd1;</a:t>
+            </a:r>
+          </a:p>
+          <a:p>
+            <a:pPr>
+              <a:lnSpc>
+                <a:spcPts val="2200"/>
+              </a:lnSpc>
+              <a:spcAft>
+                <a:spcPts val="400"/>
+              </a:spcAft>
+              <a:defRPr sz="2000" b="0">
+                <a:solidFill>
+                  <a:srgbClr val="333333"/>
+                </a:solidFill>
+                <a:latin typeface="Consolas"/>
+              </a:defRPr>
+            </a:pPr>
+            <a:r>
+              <a:t># ...</a:t>
             </a:r>
           </a:p>
         </p:txBody>
@@ -5673,7 +6394,7 @@
               </a:defRPr>
             </a:pPr>
             <a:r>
-              <a:t>Verification &amp; testing methods</a:t>
+              <a:t>Execution &amp; simulation flow</a:t>
             </a:r>
           </a:p>
         </p:txBody>
@@ -5769,45 +6490,21 @@
               </a:defRPr>
             </a:pPr>
             <a:r>
-              <a:t>Testing and closure flow</a:t>
-            </a:r>
-          </a:p>
-        </p:txBody>
-      </p:sp>
-      <p:pic>
-        <p:nvPicPr>
-          <p:cNvPr id="3" name="Picture 2" descr="testing_methods.png"/>
-          <p:cNvPicPr>
-            <a:picLocks noChangeAspect="1"/>
-          </p:cNvPicPr>
-          <p:nvPr/>
-        </p:nvPicPr>
-        <p:blipFill>
-          <a:blip r:embed="rId2"/>
-          <a:stretch>
-            <a:fillRect/>
-          </a:stretch>
-        </p:blipFill>
-        <p:spPr>
-          <a:xfrm>
-            <a:off x="548640" y="1143000"/>
-            <a:ext cx="8128000" cy="4572000"/>
-          </a:xfrm>
-          <a:prstGeom prst="rect">
-            <a:avLst/>
-          </a:prstGeom>
-        </p:spPr>
-      </p:pic>
-      <p:sp>
-        <p:nvSpPr>
-          <p:cNvPr id="4" name="TextBox 3"/>
+              <a:t>How the example runs (toolchain)</a:t>
+            </a:r>
+          </a:p>
+        </p:txBody>
+      </p:sp>
+      <p:sp>
+        <p:nvSpPr>
+          <p:cNvPr id="3" name="TextBox 2"/>
           <p:cNvSpPr txBox="1"/>
           <p:nvPr/>
         </p:nvSpPr>
         <p:spPr>
           <a:xfrm>
-            <a:off x="548640" y="5897880"/>
-            <a:ext cx="11064240" cy="411480"/>
+            <a:off x="548640" y="1234440"/>
+            <a:ext cx="11064240" cy="4937760"/>
           </a:xfrm>
           <a:prstGeom prst="rect">
             <a:avLst/>
@@ -5824,22 +6521,196 @@
               <a:lnSpc>
                 <a:spcPts val="2200"/>
               </a:lnSpc>
-              <a:defRPr sz="1200" b="0">
-                <a:solidFill>
-                  <a:srgbClr val="333333"/>
-                </a:solidFill>
-                <a:latin typeface="Calibri"/>
-              </a:defRPr>
-            </a:pPr>
-            <a:r>
-              <a:t>Module 1: how tests, checks, and metrics close verification goals.</a:t>
-            </a:r>
-          </a:p>
-        </p:txBody>
-      </p:sp>
-      <p:sp>
-        <p:nvSpPr>
-          <p:cNvPr id="5" name="TextBox 4"/>
+              <a:spcAft>
+                <a:spcPts val="1000"/>
+              </a:spcAft>
+              <a:defRPr sz="2000" b="0">
+                <a:solidFill>
+                  <a:srgbClr val="333333"/>
+                </a:solidFill>
+                <a:latin typeface="Calibri"/>
+              </a:defRPr>
+            </a:pPr>
+            <a:r>
+              <a:t>• Makefile: Verilator compiles RTL + SystemVerilog</a:t>
+            </a:r>
+          </a:p>
+          <a:p>
+            <a:pPr>
+              <a:lnSpc>
+                <a:spcPts val="2200"/>
+              </a:lnSpc>
+              <a:spcAft>
+                <a:spcPts val="1000"/>
+              </a:spcAft>
+              <a:defRPr sz="2000" b="0">
+                <a:solidFill>
+                  <a:srgbClr val="333333"/>
+                </a:solidFill>
+                <a:latin typeface="Calibri"/>
+              </a:defRPr>
+            </a:pPr>
+            <a:r>
+              <a:t>      testbench into a C++ model</a:t>
+            </a:r>
+          </a:p>
+          <a:p>
+            <a:pPr>
+              <a:lnSpc>
+                <a:spcPts val="2200"/>
+              </a:lnSpc>
+              <a:spcAft>
+                <a:spcPts val="1000"/>
+              </a:spcAft>
+              <a:defRPr sz="2000" b="0">
+                <a:solidFill>
+                  <a:srgbClr val="333333"/>
+                </a:solidFill>
+                <a:latin typeface="Calibri"/>
+              </a:defRPr>
+            </a:pPr>
+            <a:r>
+              <a:t>• sim_main.cpp: generates clk/rst_n, calls eval()</a:t>
+            </a:r>
+          </a:p>
+          <a:p>
+            <a:pPr>
+              <a:lnSpc>
+                <a:spcPts val="2200"/>
+              </a:lnSpc>
+              <a:spcAft>
+                <a:spcPts val="1000"/>
+              </a:spcAft>
+              <a:defRPr sz="2000" b="0">
+                <a:solidFill>
+                  <a:srgbClr val="333333"/>
+                </a:solidFill>
+                <a:latin typeface="Calibri"/>
+              </a:defRPr>
+            </a:pPr>
+            <a:r>
+              <a:t>      until $finish</a:t>
+            </a:r>
+          </a:p>
+          <a:p>
+            <a:pPr>
+              <a:lnSpc>
+                <a:spcPts val="2200"/>
+              </a:lnSpc>
+              <a:spcAft>
+                <a:spcPts val="1000"/>
+              </a:spcAft>
+              <a:defRPr sz="2000" b="0">
+                <a:solidFill>
+                  <a:srgbClr val="333333"/>
+                </a:solidFill>
+                <a:latin typeface="Calibri"/>
+              </a:defRPr>
+            </a:pPr>
+            <a:r>
+              <a:t>• Directed test (initial block or C++): drive</a:t>
+            </a:r>
+          </a:p>
+          <a:p>
+            <a:pPr>
+              <a:lnSpc>
+                <a:spcPts val="2200"/>
+              </a:lnSpc>
+              <a:spcAft>
+                <a:spcPts val="1000"/>
+              </a:spcAft>
+              <a:defRPr sz="2000" b="0">
+                <a:solidFill>
+                  <a:srgbClr val="333333"/>
+                </a:solidFill>
+                <a:latin typeface="Calibri"/>
+              </a:defRPr>
+            </a:pPr>
+            <a:r>
+              <a:t>      stimulus, wait for DUT flags</a:t>
+            </a:r>
+          </a:p>
+          <a:p>
+            <a:pPr>
+              <a:lnSpc>
+                <a:spcPts val="2200"/>
+              </a:lnSpc>
+              <a:spcAft>
+                <a:spcPts val="1000"/>
+              </a:spcAft>
+              <a:defRPr sz="2000" b="0">
+                <a:solidFill>
+                  <a:srgbClr val="333333"/>
+                </a:solidFill>
+                <a:latin typeface="Calibri"/>
+              </a:defRPr>
+            </a:pPr>
+            <a:r>
+              <a:t>• Self-check: compare outputs; print PASS/FAIL (see</a:t>
+            </a:r>
+          </a:p>
+          <a:p>
+            <a:pPr>
+              <a:lnSpc>
+                <a:spcPts val="2200"/>
+              </a:lnSpc>
+              <a:spcAft>
+                <a:spcPts val="1000"/>
+              </a:spcAft>
+              <a:defRPr sz="2000" b="0">
+                <a:solidFill>
+                  <a:srgbClr val="333333"/>
+                </a:solidFill>
+                <a:latin typeface="Calibri"/>
+              </a:defRPr>
+            </a:pPr>
+            <a:r>
+              <a:t>      terminal demo slide)</a:t>
+            </a:r>
+          </a:p>
+          <a:p>
+            <a:pPr>
+              <a:lnSpc>
+                <a:spcPts val="2200"/>
+              </a:lnSpc>
+              <a:spcAft>
+                <a:spcPts val="1000"/>
+              </a:spcAft>
+              <a:defRPr sz="2000" b="0">
+                <a:solidFill>
+                  <a:srgbClr val="333333"/>
+                </a:solidFill>
+                <a:latin typeface="Calibri"/>
+              </a:defRPr>
+            </a:pPr>
+            <a:r>
+              <a:t>• Repo path: module1/examples/&lt;example&gt;/ — run make</a:t>
+            </a:r>
+          </a:p>
+          <a:p>
+            <a:pPr>
+              <a:lnSpc>
+                <a:spcPts val="2200"/>
+              </a:lnSpc>
+              <a:spcAft>
+                <a:spcPts val="1000"/>
+              </a:spcAft>
+              <a:defRPr sz="2000" b="0">
+                <a:solidFill>
+                  <a:srgbClr val="333333"/>
+                </a:solidFill>
+                <a:latin typeface="Calibri"/>
+              </a:defRPr>
+            </a:pPr>
+            <a:r>
+              <a:t>      run from that directory</a:t>
+            </a:r>
+          </a:p>
+        </p:txBody>
+      </p:sp>
+      <p:sp>
+        <p:nvSpPr>
+          <p:cNvPr id="4" name="TextBox 3"/>
           <p:cNvSpPr txBox="1"/>
           <p:nvPr/>
         </p:nvSpPr>
@@ -5928,7 +6799,7 @@
               </a:defRPr>
             </a:pPr>
             <a:r>
-              <a:t>1. What we verify in Module 1</a:t>
+              <a:t>Makefile — Verilator build &amp; run</a:t>
             </a:r>
           </a:p>
         </p:txBody>
@@ -5941,13 +6812,15 @@
         </p:nvSpPr>
         <p:spPr>
           <a:xfrm>
-            <a:off x="548640" y="1234440"/>
-            <a:ext cx="11064240" cy="4937760"/>
+            <a:off x="548640" y="1143000"/>
+            <a:ext cx="11064240" cy="5029200"/>
           </a:xfrm>
           <a:prstGeom prst="rect">
             <a:avLst/>
           </a:prstGeom>
-          <a:noFill/>
+          <a:solidFill>
+            <a:srgbClr val="F4F4F4"/>
+          </a:solidFill>
         </p:spPr>
         <p:txBody>
           <a:bodyPr wrap="square">
@@ -5960,74 +6833,315 @@
                 <a:spcPts val="2200"/>
               </a:lnSpc>
               <a:spcAft>
-                <a:spcPts val="1000"/>
-              </a:spcAft>
-              <a:defRPr sz="2000" b="0">
-                <a:solidFill>
-                  <a:srgbClr val="333333"/>
-                </a:solidFill>
-                <a:latin typeface="Calibri"/>
-              </a:defRPr>
-            </a:pPr>
-            <a:r>
-              <a:t>• RTL behavior matches SPEC.md (reset, enable gating,</a:t>
-            </a:r>
-          </a:p>
-          <a:p>
-            <a:pPr>
-              <a:lnSpc>
-                <a:spcPts val="2200"/>
-              </a:lnSpc>
-              <a:spcAft>
-                <a:spcPts val="1000"/>
-              </a:spcAft>
-              <a:defRPr sz="2000" b="0">
-                <a:solidFill>
-                  <a:srgbClr val="333333"/>
-                </a:solidFill>
-                <a:latin typeface="Calibri"/>
-              </a:defRPr>
-            </a:pPr>
-            <a:r>
-              <a:t>      count progression).</a:t>
-            </a:r>
-          </a:p>
-          <a:p>
-            <a:pPr>
-              <a:lnSpc>
-                <a:spcPts val="2200"/>
-              </a:lnSpc>
-              <a:spcAft>
-                <a:spcPts val="1000"/>
-              </a:spcAft>
-              <a:defRPr sz="2000" b="0">
-                <a:solidFill>
-                  <a:srgbClr val="333333"/>
-                </a:solidFill>
-                <a:latin typeface="Calibri"/>
-              </a:defRPr>
-            </a:pPr>
-            <a:r>
-              <a:t>• Directed scenario: release reset, enable for N</a:t>
-            </a:r>
-          </a:p>
-          <a:p>
-            <a:pPr>
-              <a:lnSpc>
-                <a:spcPts val="2200"/>
-              </a:lnSpc>
-              <a:spcAft>
-                <a:spcPts val="1000"/>
-              </a:spcAft>
-              <a:defRPr sz="2000" b="0">
-                <a:solidFill>
-                  <a:srgbClr val="333333"/>
-                </a:solidFill>
-                <a:latin typeface="Calibri"/>
-              </a:defRPr>
-            </a:pPr>
-            <a:r>
-              <a:t>      cycles, expect `count == N`.</a:t>
+                <a:spcPts val="400"/>
+              </a:spcAft>
+              <a:defRPr sz="2000" b="0">
+                <a:solidFill>
+                  <a:srgbClr val="333333"/>
+                </a:solidFill>
+                <a:latin typeface="Consolas"/>
+              </a:defRPr>
+            </a:pPr>
+            <a:r>
+              <a:t># Makefile for Module 1 spec_to_rtl example</a:t>
+            </a:r>
+          </a:p>
+          <a:p>
+            <a:pPr>
+              <a:lnSpc>
+                <a:spcPts val="2200"/>
+              </a:lnSpc>
+              <a:spcAft>
+                <a:spcPts val="400"/>
+              </a:spcAft>
+              <a:defRPr sz="2000" b="0">
+                <a:solidFill>
+                  <a:srgbClr val="333333"/>
+                </a:solidFill>
+                <a:latin typeface="Consolas"/>
+              </a:defRPr>
+            </a:pPr>
+            <a:r>
+              <a:t># Spec → RTL → basic simulation (no UVM).</a:t>
+            </a:r>
+          </a:p>
+          <a:p>
+            <a:pPr>
+              <a:lnSpc>
+                <a:spcPts val="2200"/>
+              </a:lnSpc>
+              <a:spcAft>
+                <a:spcPts val="400"/>
+              </a:spcAft>
+              <a:defRPr sz="2000" b="0">
+                <a:solidFill>
+                  <a:srgbClr val="333333"/>
+                </a:solidFill>
+                <a:latin typeface="Consolas"/>
+              </a:defRPr>
+            </a:pPr>
+            <a:r>
+              <a:t>#</a:t>
+            </a:r>
+          </a:p>
+          <a:p>
+            <a:pPr>
+              <a:lnSpc>
+                <a:spcPts val="2200"/>
+              </a:lnSpc>
+              <a:spcAft>
+                <a:spcPts val="400"/>
+              </a:spcAft>
+              <a:defRPr sz="2000" b="0">
+                <a:solidFill>
+                  <a:srgbClr val="333333"/>
+                </a:solidFill>
+                <a:latin typeface="Consolas"/>
+              </a:defRPr>
+            </a:pPr>
+            <a:r>
+              <a:t># Usage:</a:t>
+            </a:r>
+          </a:p>
+          <a:p>
+            <a:pPr>
+              <a:lnSpc>
+                <a:spcPts val="2200"/>
+              </a:lnSpc>
+              <a:spcAft>
+                <a:spcPts val="400"/>
+              </a:spcAft>
+              <a:defRPr sz="2000" b="0">
+                <a:solidFill>
+                  <a:srgbClr val="333333"/>
+                </a:solidFill>
+                <a:latin typeface="Consolas"/>
+              </a:defRPr>
+            </a:pPr>
+            <a:r>
+              <a:t>#   make run          Build and run (default)</a:t>
+            </a:r>
+          </a:p>
+          <a:p>
+            <a:pPr>
+              <a:lnSpc>
+                <a:spcPts val="2200"/>
+              </a:lnSpc>
+              <a:spcAft>
+                <a:spcPts val="400"/>
+              </a:spcAft>
+              <a:defRPr sz="2000" b="0">
+                <a:solidFill>
+                  <a:srgbClr val="333333"/>
+                </a:solidFill>
+                <a:latin typeface="Consolas"/>
+              </a:defRPr>
+            </a:pPr>
+            <a:r>
+              <a:t>#   make run TRACE=1  Build with VCD tracing, then run</a:t>
+            </a:r>
+          </a:p>
+          <a:p>
+            <a:pPr>
+              <a:lnSpc>
+                <a:spcPts val="2200"/>
+              </a:lnSpc>
+              <a:spcAft>
+                <a:spcPts val="400"/>
+              </a:spcAft>
+              <a:defRPr sz="2000" b="0">
+                <a:solidFill>
+                  <a:srgbClr val="333333"/>
+                </a:solidFill>
+                <a:latin typeface="Consolas"/>
+              </a:defRPr>
+            </a:pPr>
+            <a:r>
+              <a:t>#   make clean        Remove obj_dir and VCD</a:t>
+            </a:r>
+          </a:p>
+          <a:p>
+            <a:pPr>
+              <a:lnSpc>
+                <a:spcPts val="2200"/>
+              </a:lnSpc>
+              <a:spcAft>
+                <a:spcPts val="400"/>
+              </a:spcAft>
+              <a:defRPr sz="2000" b="0">
+                <a:solidFill>
+                  <a:srgbClr val="333333"/>
+                </a:solidFill>
+                <a:latin typeface="Consolas"/>
+              </a:defRPr>
+            </a:pPr>
+          </a:p>
+          <a:p>
+            <a:pPr>
+              <a:lnSpc>
+                <a:spcPts val="2200"/>
+              </a:lnSpc>
+              <a:spcAft>
+                <a:spcPts val="400"/>
+              </a:spcAft>
+              <a:defRPr sz="2000" b="0">
+                <a:solidFill>
+                  <a:srgbClr val="333333"/>
+                </a:solidFill>
+                <a:latin typeface="Consolas"/>
+              </a:defRPr>
+            </a:pPr>
+            <a:r>
+              <a:t>TRACE ?= 0</a:t>
+            </a:r>
+          </a:p>
+          <a:p>
+            <a:pPr>
+              <a:lnSpc>
+                <a:spcPts val="2200"/>
+              </a:lnSpc>
+              <a:spcAft>
+                <a:spcPts val="400"/>
+              </a:spcAft>
+              <a:defRPr sz="2000" b="0">
+                <a:solidFill>
+                  <a:srgbClr val="333333"/>
+                </a:solidFill>
+                <a:latin typeface="Consolas"/>
+              </a:defRPr>
+            </a:pPr>
+            <a:r>
+              <a:t>VERILATOR ?= verilator</a:t>
+            </a:r>
+          </a:p>
+          <a:p>
+            <a:pPr>
+              <a:lnSpc>
+                <a:spcPts val="2200"/>
+              </a:lnSpc>
+              <a:spcAft>
+                <a:spcPts val="400"/>
+              </a:spcAft>
+              <a:defRPr sz="2000" b="0">
+                <a:solidFill>
+                  <a:srgbClr val="333333"/>
+                </a:solidFill>
+                <a:latin typeface="Consolas"/>
+              </a:defRPr>
+            </a:pPr>
+            <a:r>
+              <a:t>TOPLEVEL ?= top</a:t>
+            </a:r>
+          </a:p>
+          <a:p>
+            <a:pPr>
+              <a:lnSpc>
+                <a:spcPts val="2200"/>
+              </a:lnSpc>
+              <a:spcAft>
+                <a:spcPts val="400"/>
+              </a:spcAft>
+              <a:defRPr sz="2000" b="0">
+                <a:solidFill>
+                  <a:srgbClr val="333333"/>
+                </a:solidFill>
+                <a:latin typeface="Consolas"/>
+              </a:defRPr>
+            </a:pPr>
+            <a:r>
+              <a:t>DUT_SRC = dut/*.v</a:t>
+            </a:r>
+          </a:p>
+          <a:p>
+            <a:pPr>
+              <a:lnSpc>
+                <a:spcPts val="2200"/>
+              </a:lnSpc>
+              <a:spcAft>
+                <a:spcPts val="400"/>
+              </a:spcAft>
+              <a:defRPr sz="2000" b="0">
+                <a:solidFill>
+                  <a:srgbClr val="333333"/>
+                </a:solidFill>
+                <a:latin typeface="Consolas"/>
+              </a:defRPr>
+            </a:pPr>
+            <a:r>
+              <a:t>RTL_SRC = top.v $(DUT_SRC)</a:t>
+            </a:r>
+          </a:p>
+          <a:p>
+            <a:pPr>
+              <a:lnSpc>
+                <a:spcPts val="2200"/>
+              </a:lnSpc>
+              <a:spcAft>
+                <a:spcPts val="400"/>
+              </a:spcAft>
+              <a:defRPr sz="2000" b="0">
+                <a:solidFill>
+                  <a:srgbClr val="333333"/>
+                </a:solidFill>
+                <a:latin typeface="Consolas"/>
+              </a:defRPr>
+            </a:pPr>
+            <a:r>
+              <a:t>HARNESS = sim_main.cpp</a:t>
+            </a:r>
+          </a:p>
+          <a:p>
+            <a:pPr>
+              <a:lnSpc>
+                <a:spcPts val="2200"/>
+              </a:lnSpc>
+              <a:spcAft>
+                <a:spcPts val="400"/>
+              </a:spcAft>
+              <a:defRPr sz="2000" b="0">
+                <a:solidFill>
+                  <a:srgbClr val="333333"/>
+                </a:solidFill>
+                <a:latin typeface="Consolas"/>
+              </a:defRPr>
+            </a:pPr>
+          </a:p>
+          <a:p>
+            <a:pPr>
+              <a:lnSpc>
+                <a:spcPts val="2200"/>
+              </a:lnSpc>
+              <a:spcAft>
+                <a:spcPts val="400"/>
+              </a:spcAft>
+              <a:defRPr sz="2000" b="0">
+                <a:solidFill>
+                  <a:srgbClr val="333333"/>
+                </a:solidFill>
+                <a:latin typeface="Consolas"/>
+              </a:defRPr>
+            </a:pPr>
+            <a:r>
+              <a:t>VERILATOR_FLAGS = -cc --exe -Wall</a:t>
+            </a:r>
+          </a:p>
+          <a:p>
+            <a:pPr>
+              <a:lnSpc>
+                <a:spcPts val="2200"/>
+              </a:lnSpc>
+              <a:spcAft>
+                <a:spcPts val="400"/>
+              </a:spcAft>
+              <a:defRPr sz="2000" b="0">
+                <a:solidFill>
+                  <a:srgbClr val="333333"/>
+                </a:solidFill>
+                <a:latin typeface="Consolas"/>
+              </a:defRPr>
+            </a:pPr>
+            <a:r>
+              <a:t># ...</a:t>
             </a:r>
           </a:p>
         </p:txBody>
@@ -6097,8 +7211,8 @@
         </p:nvSpPr>
         <p:spPr>
           <a:xfrm>
-            <a:off x="548640" y="411480"/>
-            <a:ext cx="11064240" cy="777240"/>
+            <a:off x="548640" y="2743200"/>
+            <a:ext cx="11064240" cy="1371600"/>
           </a:xfrm>
           <a:prstGeom prst="rect">
             <a:avLst/>
@@ -6111,11 +7225,11 @@
           </a:bodyPr>
           <a:lstStyle/>
           <a:p>
-            <a:pPr>
-              <a:lnSpc>
-                <a:spcPts val="2200"/>
-              </a:lnSpc>
-              <a:defRPr sz="2800" b="1">
+            <a:pPr algn="ctr">
+              <a:lnSpc>
+                <a:spcPts val="2200"/>
+              </a:lnSpc>
+              <a:defRPr sz="3600" b="1">
                 <a:solidFill>
                   <a:srgbClr val="1A1A2E"/>
                 </a:solidFill>
@@ -6123,7 +7237,7 @@
               </a:defRPr>
             </a:pPr>
             <a:r>
-              <a:t>2. Stimulus and checking</a:t>
+              <a:t>Key files to study</a:t>
             </a:r>
           </a:p>
         </p:txBody>
@@ -6131,143 +7245,6 @@
       <p:sp>
         <p:nvSpPr>
           <p:cNvPr id="3" name="TextBox 2"/>
-          <p:cNvSpPr txBox="1"/>
-          <p:nvPr/>
-        </p:nvSpPr>
-        <p:spPr>
-          <a:xfrm>
-            <a:off x="548640" y="1234440"/>
-            <a:ext cx="11064240" cy="4937760"/>
-          </a:xfrm>
-          <a:prstGeom prst="rect">
-            <a:avLst/>
-          </a:prstGeom>
-          <a:noFill/>
-        </p:spPr>
-        <p:txBody>
-          <a:bodyPr wrap="square">
-            <a:noAutofit/>
-          </a:bodyPr>
-          <a:lstStyle/>
-          <a:p>
-            <a:pPr>
-              <a:lnSpc>
-                <a:spcPts val="2200"/>
-              </a:lnSpc>
-              <a:spcAft>
-                <a:spcPts val="1000"/>
-              </a:spcAft>
-              <a:defRPr sz="2000" b="0">
-                <a:solidFill>
-                  <a:srgbClr val="333333"/>
-                </a:solidFill>
-                <a:latin typeface="Calibri"/>
-              </a:defRPr>
-            </a:pPr>
-            <a:r>
-              <a:t>• Stimulus: C++ toggles `enable` for a known number of</a:t>
-            </a:r>
-          </a:p>
-          <a:p>
-            <a:pPr>
-              <a:lnSpc>
-                <a:spcPts val="2200"/>
-              </a:lnSpc>
-              <a:spcAft>
-                <a:spcPts val="1000"/>
-              </a:spcAft>
-              <a:defRPr sz="2000" b="0">
-                <a:solidFill>
-                  <a:srgbClr val="333333"/>
-                </a:solidFill>
-                <a:latin typeface="Calibri"/>
-              </a:defRPr>
-            </a:pPr>
-            <a:r>
-              <a:t>      clock cycles.</a:t>
-            </a:r>
-          </a:p>
-          <a:p>
-            <a:pPr>
-              <a:lnSpc>
-                <a:spcPts val="2200"/>
-              </a:lnSpc>
-              <a:spcAft>
-                <a:spcPts val="1000"/>
-              </a:spcAft>
-              <a:defRPr sz="2000" b="0">
-                <a:solidFill>
-                  <a:srgbClr val="333333"/>
-                </a:solidFill>
-                <a:latin typeface="Calibri"/>
-              </a:defRPr>
-            </a:pPr>
-            <a:r>
-              <a:t>• Check: compare `count` to expected value; print</a:t>
-            </a:r>
-          </a:p>
-          <a:p>
-            <a:pPr>
-              <a:lnSpc>
-                <a:spcPts val="2200"/>
-              </a:lnSpc>
-              <a:spcAft>
-                <a:spcPts val="1000"/>
-              </a:spcAft>
-              <a:defRPr sz="2000" b="0">
-                <a:solidFill>
-                  <a:srgbClr val="333333"/>
-                </a:solidFill>
-                <a:latin typeface="Calibri"/>
-              </a:defRPr>
-            </a:pPr>
-            <a:r>
-              <a:t>      PASS/FAIL.</a:t>
-            </a:r>
-          </a:p>
-          <a:p>
-            <a:pPr>
-              <a:lnSpc>
-                <a:spcPts val="2200"/>
-              </a:lnSpc>
-              <a:spcAft>
-                <a:spcPts val="1000"/>
-              </a:spcAft>
-              <a:defRPr sz="2000" b="0">
-                <a:solidFill>
-                  <a:srgbClr val="333333"/>
-                </a:solidFill>
-                <a:latin typeface="Calibri"/>
-              </a:defRPr>
-            </a:pPr>
-            <a:r>
-              <a:t>• Traceability: each check should cite the spec</a:t>
-            </a:r>
-          </a:p>
-          <a:p>
-            <a:pPr>
-              <a:lnSpc>
-                <a:spcPts val="2200"/>
-              </a:lnSpc>
-              <a:spcAft>
-                <a:spcPts val="1000"/>
-              </a:spcAft>
-              <a:defRPr sz="2000" b="0">
-                <a:solidFill>
-                  <a:srgbClr val="333333"/>
-                </a:solidFill>
-                <a:latin typeface="Calibri"/>
-              </a:defRPr>
-            </a:pPr>
-            <a:r>
-              <a:t>      sentence it proves.</a:t>
-            </a:r>
-          </a:p>
-        </p:txBody>
-      </p:sp>
-      <p:sp>
-        <p:nvSpPr>
-          <p:cNvPr id="4" name="TextBox 3"/>
           <p:cNvSpPr txBox="1"/>
           <p:nvPr/>
         </p:nvSpPr>
@@ -6356,7 +7333,7 @@
               </a:defRPr>
             </a:pPr>
             <a:r>
-              <a:t>3. What is not covered yet</a:t>
+              <a:t>Open these in the repo</a:t>
             </a:r>
           </a:p>
         </p:txBody>
@@ -6398,7 +7375,7 @@
               </a:defRPr>
             </a:pPr>
             <a:r>
-              <a:t>• Random stimulus, functional coverage, scoreboards —</a:t>
+              <a:t>• `module1/examples/spec_to_rtl/SPEC.md` —</a:t>
             </a:r>
           </a:p>
           <a:p>
@@ -6417,7 +7394,7 @@
               </a:defRPr>
             </a:pPr>
             <a:r>
-              <a:t>      Module 2 (UVM) and protocol modules.</a:t>
+              <a:t>      requirements document</a:t>
             </a:r>
           </a:p>
           <a:p>
@@ -6436,7 +7413,7 @@
               </a:defRPr>
             </a:pPr>
             <a:r>
-              <a:t>• Use [UNDERSTANDING_THE_SPEC.md](../module1/UNDERSTAN</a:t>
+              <a:t>• `module1/examples/spec_to_rtl/dut/counter.v` — RTL</a:t>
             </a:r>
           </a:p>
           <a:p>
@@ -6455,7 +7432,64 @@
               </a:defRPr>
             </a:pPr>
             <a:r>
-              <a:t>      DING_THE_SPEC.md) and [SPEC_TO_RTL_GUIDE.md](..…</a:t>
+              <a:t>      implementation</a:t>
+            </a:r>
+          </a:p>
+          <a:p>
+            <a:pPr>
+              <a:lnSpc>
+                <a:spcPts val="2200"/>
+              </a:lnSpc>
+              <a:spcAft>
+                <a:spcPts val="1000"/>
+              </a:spcAft>
+              <a:defRPr sz="2000" b="0">
+                <a:solidFill>
+                  <a:srgbClr val="333333"/>
+                </a:solidFill>
+                <a:latin typeface="Calibri"/>
+              </a:defRPr>
+            </a:pPr>
+            <a:r>
+              <a:t>• `module1/examples/spec_to_rtl/top.v` — DUT wrapper</a:t>
+            </a:r>
+          </a:p>
+          <a:p>
+            <a:pPr>
+              <a:lnSpc>
+                <a:spcPts val="2200"/>
+              </a:lnSpc>
+              <a:spcAft>
+                <a:spcPts val="1000"/>
+              </a:spcAft>
+              <a:defRPr sz="2000" b="0">
+                <a:solidFill>
+                  <a:srgbClr val="333333"/>
+                </a:solidFill>
+                <a:latin typeface="Calibri"/>
+              </a:defRPr>
+            </a:pPr>
+            <a:r>
+              <a:t>• `module1/examples/spec_to_rtl/sim_main.cpp` —</a:t>
+            </a:r>
+          </a:p>
+          <a:p>
+            <a:pPr>
+              <a:lnSpc>
+                <a:spcPts val="2200"/>
+              </a:lnSpc>
+              <a:spcAft>
+                <a:spcPts val="1000"/>
+              </a:spcAft>
+              <a:defRPr sz="2000" b="0">
+                <a:solidFill>
+                  <a:srgbClr val="333333"/>
+                </a:solidFill>
+                <a:latin typeface="Calibri"/>
+              </a:defRPr>
+            </a:pPr>
+            <a:r>
+              <a:t>      stimulus and checking</a:t>
             </a:r>
           </a:p>
         </p:txBody>
@@ -6551,7 +7585,7 @@
               </a:defRPr>
             </a:pPr>
             <a:r>
-              <a:t>Syllabus topics</a:t>
+              <a:t>Verification &amp; testing methods</a:t>
             </a:r>
           </a:p>
         </p:txBody>
@@ -6880,7 +7914,7 @@
               </a:defRPr>
             </a:pPr>
             <a:r>
-              <a:t>1. Specification → RTL Design Flow</a:t>
+              <a:t>1. What we verify in Module 1</a:t>
             </a:r>
           </a:p>
         </p:txBody>
@@ -6894,7 +7928,7 @@
         <p:spPr>
           <a:xfrm>
             <a:off x="548640" y="1234440"/>
-            <a:ext cx="11064240" cy="4937760"/>
+            <a:ext cx="5303520" cy="4754880"/>
           </a:xfrm>
           <a:prstGeom prst="rect">
             <a:avLst/>
@@ -6922,7 +7956,7 @@
               </a:defRPr>
             </a:pPr>
             <a:r>
-              <a:t>• Specification: Document interface (ports, widths,</a:t>
+              <a:t>• RTL behavior matches SPEC.md</a:t>
             </a:r>
           </a:p>
           <a:p>
@@ -6941,7 +7975,7 @@
               </a:defRPr>
             </a:pPr>
             <a:r>
-              <a:t>      direction), behavior (reset, enable, state transi…</a:t>
+              <a:t>      (reset, enable gating, count</a:t>
             </a:r>
           </a:p>
           <a:p>
@@ -6960,7 +7994,7 @@
               </a:defRPr>
             </a:pPr>
             <a:r>
-              <a:t>• RTL: Implement the spec in Verilog/SystemVerilog;</a:t>
+              <a:t>      progression).</a:t>
             </a:r>
           </a:p>
           <a:p>
@@ -6979,7 +8013,7 @@
               </a:defRPr>
             </a:pPr>
             <a:r>
-              <a:t>      each requirement in the spec should map to clear…</a:t>
+              <a:t>• Directed scenario: release</a:t>
             </a:r>
           </a:p>
           <a:p>
@@ -6998,7 +8032,7 @@
               </a:defRPr>
             </a:pPr>
             <a:r>
-              <a:t>• Traceability: Being able to point from a line in the</a:t>
+              <a:t>      reset, enable for N cycles,</a:t>
             </a:r>
           </a:p>
           <a:p>
@@ -7017,14 +8051,38 @@
               </a:defRPr>
             </a:pPr>
             <a:r>
-              <a:t>      spec to the RTL that implements it (and vice v…</a:t>
-            </a:r>
-          </a:p>
-        </p:txBody>
-      </p:sp>
-      <p:sp>
-        <p:nvSpPr>
-          <p:cNvPr id="4" name="TextBox 3"/>
+              <a:t>      expect `count == N`.</a:t>
+            </a:r>
+          </a:p>
+        </p:txBody>
+      </p:sp>
+      <p:pic>
+        <p:nvPicPr>
+          <p:cNvPr id="4" name="Picture 3" descr="testing_methods.png"/>
+          <p:cNvPicPr>
+            <a:picLocks noChangeAspect="1"/>
+          </p:cNvPicPr>
+          <p:nvPr/>
+        </p:nvPicPr>
+        <p:blipFill>
+          <a:blip r:embed="rId2"/>
+          <a:stretch>
+            <a:fillRect/>
+          </a:stretch>
+        </p:blipFill>
+        <p:spPr>
+          <a:xfrm>
+            <a:off x="6172200" y="2094547"/>
+            <a:ext cx="5394960" cy="3034665"/>
+          </a:xfrm>
+          <a:prstGeom prst="rect">
+            <a:avLst/>
+          </a:prstGeom>
+        </p:spPr>
+      </p:pic>
+      <p:sp>
+        <p:nvSpPr>
+          <p:cNvPr id="5" name="TextBox 4"/>
           <p:cNvSpPr txBox="1"/>
           <p:nvPr/>
         </p:nvSpPr>
@@ -7113,7 +8171,7 @@
               </a:defRPr>
             </a:pPr>
             <a:r>
-              <a:t>2. Design Methodology</a:t>
+              <a:t>2. Stimulus and checking</a:t>
             </a:r>
           </a:p>
         </p:txBody>
@@ -7127,7 +8185,7 @@
         <p:spPr>
           <a:xfrm>
             <a:off x="548640" y="1234440"/>
-            <a:ext cx="11064240" cy="4937760"/>
+            <a:ext cx="5303520" cy="4754880"/>
           </a:xfrm>
           <a:prstGeom prst="rect">
             <a:avLst/>
@@ -7155,7 +8213,7 @@
               </a:defRPr>
             </a:pPr>
             <a:r>
-              <a:t>• Single block: One spec, one (or a few) RTL files,</a:t>
+              <a:t>• Stimulus: C++ toggles `enable`</a:t>
             </a:r>
           </a:p>
           <a:p>
@@ -7174,7 +8232,7 @@
               </a:defRPr>
             </a:pPr>
             <a:r>
-              <a:t>      one testbench.</a:t>
+              <a:t>      for a known number of clock</a:t>
             </a:r>
           </a:p>
           <a:p>
@@ -7193,7 +8251,7 @@
               </a:defRPr>
             </a:pPr>
             <a:r>
-              <a:t>• Reuse: The same flow (spec → RTL → testbench) scales</a:t>
+              <a:t>      cycles.</a:t>
             </a:r>
           </a:p>
           <a:p>
@@ -7212,7 +8270,7 @@
               </a:defRPr>
             </a:pPr>
             <a:r>
-              <a:t>      to protocol blocks (UART, SPI, I²C) in Modules…</a:t>
+              <a:t>• Check: compare `count` to</a:t>
             </a:r>
           </a:p>
           <a:p>
@@ -7231,7 +8289,7 @@
               </a:defRPr>
             </a:pPr>
             <a:r>
-              <a:t>• Documentation: Keep SPEC.md (or similar) next to the</a:t>
+              <a:t>      expected value; print PASS/FAIL.</a:t>
             </a:r>
           </a:p>
           <a:p>
@@ -7250,14 +8308,76 @@
               </a:defRPr>
             </a:pPr>
             <a:r>
-              <a:t>      RTL so that reviewers and verification can che…</a:t>
-            </a:r>
-          </a:p>
-        </p:txBody>
-      </p:sp>
-      <p:sp>
-        <p:nvSpPr>
-          <p:cNvPr id="4" name="TextBox 3"/>
+              <a:t>• Traceability: each check should</a:t>
+            </a:r>
+          </a:p>
+          <a:p>
+            <a:pPr>
+              <a:lnSpc>
+                <a:spcPts val="2200"/>
+              </a:lnSpc>
+              <a:spcAft>
+                <a:spcPts val="1000"/>
+              </a:spcAft>
+              <a:defRPr sz="2000" b="0">
+                <a:solidFill>
+                  <a:srgbClr val="333333"/>
+                </a:solidFill>
+                <a:latin typeface="Calibri"/>
+              </a:defRPr>
+            </a:pPr>
+            <a:r>
+              <a:t>      cite the spec sentence it</a:t>
+            </a:r>
+          </a:p>
+          <a:p>
+            <a:pPr>
+              <a:lnSpc>
+                <a:spcPts val="2200"/>
+              </a:lnSpc>
+              <a:spcAft>
+                <a:spcPts val="1000"/>
+              </a:spcAft>
+              <a:defRPr sz="2000" b="0">
+                <a:solidFill>
+                  <a:srgbClr val="333333"/>
+                </a:solidFill>
+                <a:latin typeface="Calibri"/>
+              </a:defRPr>
+            </a:pPr>
+            <a:r>
+              <a:t>      proves.</a:t>
+            </a:r>
+          </a:p>
+        </p:txBody>
+      </p:sp>
+      <p:pic>
+        <p:nvPicPr>
+          <p:cNvPr id="4" name="Picture 3" descr="testing_methods.png"/>
+          <p:cNvPicPr>
+            <a:picLocks noChangeAspect="1"/>
+          </p:cNvPicPr>
+          <p:nvPr/>
+        </p:nvPicPr>
+        <p:blipFill>
+          <a:blip r:embed="rId2"/>
+          <a:stretch>
+            <a:fillRect/>
+          </a:stretch>
+        </p:blipFill>
+        <p:spPr>
+          <a:xfrm>
+            <a:off x="6172200" y="2094547"/>
+            <a:ext cx="5394960" cy="3034665"/>
+          </a:xfrm>
+          <a:prstGeom prst="rect">
+            <a:avLst/>
+          </a:prstGeom>
+        </p:spPr>
+      </p:pic>
+      <p:sp>
+        <p:nvSpPr>
+          <p:cNvPr id="5" name="TextBox 4"/>
           <p:cNvSpPr txBox="1"/>
           <p:nvPr/>
         </p:nvSpPr>
@@ -7346,7 +8466,7 @@
               </a:defRPr>
             </a:pPr>
             <a:r>
-              <a:t>3. Intro to Verification: What We Verify, and Why</a:t>
+              <a:t>3. What is not covered yet</a:t>
             </a:r>
           </a:p>
         </p:txBody>
@@ -7360,7 +8480,7 @@
         <p:spPr>
           <a:xfrm>
             <a:off x="548640" y="1234440"/>
-            <a:ext cx="11064240" cy="4937760"/>
+            <a:ext cx="5303520" cy="4754880"/>
           </a:xfrm>
           <a:prstGeom prst="rect">
             <a:avLst/>
@@ -7388,7 +8508,7 @@
               </a:defRPr>
             </a:pPr>
             <a:r>
-              <a:t>• What we verify: That the RTL matches the</a:t>
+              <a:t>• Random stimulus, functional</a:t>
             </a:r>
           </a:p>
           <a:p>
@@ -7407,7 +8527,7 @@
               </a:defRPr>
             </a:pPr>
             <a:r>
-              <a:t>      specification (correct function, reset, enable,</a:t>
+              <a:t>      coverage, scoreboards — Module 2</a:t>
             </a:r>
           </a:p>
           <a:p>
@@ -7426,7 +8546,7 @@
               </a:defRPr>
             </a:pPr>
             <a:r>
-              <a:t>      boundaries…</a:t>
+              <a:t>      (UVM) and protocol modules.</a:t>
             </a:r>
           </a:p>
           <a:p>
@@ -7445,7 +8565,7 @@
               </a:defRPr>
             </a:pPr>
             <a:r>
-              <a:t>• Why we verify: Finding bugs in RTL is far cheaper</a:t>
+              <a:t>• Use [UNDERSTANDING_THE_SPEC.md](</a:t>
             </a:r>
           </a:p>
           <a:p>
@@ -7464,7 +8584,7 @@
               </a:defRPr>
             </a:pPr>
             <a:r>
-              <a:t>      than finding them in silicon or in system integra…</a:t>
+              <a:t>      ../module1/UNDERSTANDING_THE_SPE</a:t>
             </a:r>
           </a:p>
           <a:p>
@@ -7483,7 +8603,7 @@
               </a:defRPr>
             </a:pPr>
             <a:r>
-              <a:t>• Directed test: A simple test that drives specific</a:t>
+              <a:t>      C.md) and</a:t>
             </a:r>
           </a:p>
           <a:p>
@@ -7502,14 +8622,38 @@
               </a:defRPr>
             </a:pPr>
             <a:r>
-              <a:t>      inputs (e.g., reset, then 10 enabled cycles) and…</a:t>
-            </a:r>
-          </a:p>
-        </p:txBody>
-      </p:sp>
-      <p:sp>
-        <p:nvSpPr>
-          <p:cNvPr id="4" name="TextBox 3"/>
+              <a:t>      [SPEC_TO_RTL_GUIDE.md](..…</a:t>
+            </a:r>
+          </a:p>
+        </p:txBody>
+      </p:sp>
+      <p:pic>
+        <p:nvPicPr>
+          <p:cNvPr id="4" name="Picture 3" descr="testing_methods.png"/>
+          <p:cNvPicPr>
+            <a:picLocks noChangeAspect="1"/>
+          </p:cNvPicPr>
+          <p:nvPr/>
+        </p:nvPicPr>
+        <p:blipFill>
+          <a:blip r:embed="rId2"/>
+          <a:stretch>
+            <a:fillRect/>
+          </a:stretch>
+        </p:blipFill>
+        <p:spPr>
+          <a:xfrm>
+            <a:off x="6172200" y="2094547"/>
+            <a:ext cx="5394960" cy="3034665"/>
+          </a:xfrm>
+          <a:prstGeom prst="rect">
+            <a:avLst/>
+          </a:prstGeom>
+        </p:spPr>
+      </p:pic>
+      <p:sp>
+        <p:nvSpPr>
+          <p:cNvPr id="5" name="TextBox 4"/>
           <p:cNvSpPr txBox="1"/>
           <p:nvPr/>
         </p:nvSpPr>
@@ -7572,8 +8716,8 @@
         </p:nvSpPr>
         <p:spPr>
           <a:xfrm>
-            <a:off x="548640" y="2743200"/>
-            <a:ext cx="11064240" cy="1371600"/>
+            <a:off x="548640" y="411480"/>
+            <a:ext cx="11064240" cy="777240"/>
           </a:xfrm>
           <a:prstGeom prst="rect">
             <a:avLst/>
@@ -7586,11 +8730,11 @@
           </a:bodyPr>
           <a:lstStyle/>
           <a:p>
-            <a:pPr algn="ctr">
-              <a:lnSpc>
-                <a:spcPts val="2200"/>
-              </a:lnSpc>
-              <a:defRPr sz="3600" b="1">
+            <a:pPr>
+              <a:lnSpc>
+                <a:spcPts val="2200"/>
+              </a:lnSpc>
+              <a:defRPr sz="2800" b="1">
                 <a:solidFill>
                   <a:srgbClr val="1A1A2E"/>
                 </a:solidFill>
@@ -7598,7 +8742,7 @@
               </a:defRPr>
             </a:pPr>
             <a:r>
-              <a:t>Command reference highlights</a:t>
+              <a:t>sim_main.cpp — directed check</a:t>
             </a:r>
           </a:p>
         </p:txBody>
@@ -7606,6 +8750,342 @@
       <p:sp>
         <p:nvSpPr>
           <p:cNvPr id="3" name="TextBox 2"/>
+          <p:cNvSpPr txBox="1"/>
+          <p:nvPr/>
+        </p:nvSpPr>
+        <p:spPr>
+          <a:xfrm>
+            <a:off x="548640" y="1143000"/>
+            <a:ext cx="11064240" cy="5029200"/>
+          </a:xfrm>
+          <a:prstGeom prst="rect">
+            <a:avLst/>
+          </a:prstGeom>
+          <a:solidFill>
+            <a:srgbClr val="F4F4F4"/>
+          </a:solidFill>
+        </p:spPr>
+        <p:txBody>
+          <a:bodyPr wrap="square">
+            <a:noAutofit/>
+          </a:bodyPr>
+          <a:lstStyle/>
+          <a:p>
+            <a:pPr>
+              <a:lnSpc>
+                <a:spcPts val="2200"/>
+              </a:lnSpc>
+              <a:spcAft>
+                <a:spcPts val="400"/>
+              </a:spcAft>
+              <a:defRPr sz="2000" b="0">
+                <a:solidFill>
+                  <a:srgbClr val="333333"/>
+                </a:solidFill>
+                <a:latin typeface="Consolas"/>
+              </a:defRPr>
+            </a:pPr>
+            <a:r>
+              <a:t>// C++ test harness for spec_to_rtl (8-bit counter).</a:t>
+            </a:r>
+          </a:p>
+          <a:p>
+            <a:pPr>
+              <a:lnSpc>
+                <a:spcPts val="2200"/>
+              </a:lnSpc>
+              <a:spcAft>
+                <a:spcPts val="400"/>
+              </a:spcAft>
+              <a:defRPr sz="2000" b="0">
+                <a:solidFill>
+                  <a:srgbClr val="333333"/>
+                </a:solidFill>
+                <a:latin typeface="Consolas"/>
+              </a:defRPr>
+            </a:pPr>
+            <a:r>
+              <a:t>// Drives clk, rst_n, enable and checks count behavior.</a:t>
+            </a:r>
+          </a:p>
+          <a:p>
+            <a:pPr>
+              <a:lnSpc>
+                <a:spcPts val="2200"/>
+              </a:lnSpc>
+              <a:spcAft>
+                <a:spcPts val="400"/>
+              </a:spcAft>
+              <a:defRPr sz="2000" b="0">
+                <a:solidFill>
+                  <a:srgbClr val="333333"/>
+                </a:solidFill>
+                <a:latin typeface="Consolas"/>
+              </a:defRPr>
+            </a:pPr>
+            <a:r>
+              <a:t>// Module 1: basic directed test — no UVM.</a:t>
+            </a:r>
+          </a:p>
+          <a:p>
+            <a:pPr>
+              <a:lnSpc>
+                <a:spcPts val="2200"/>
+              </a:lnSpc>
+              <a:spcAft>
+                <a:spcPts val="400"/>
+              </a:spcAft>
+              <a:defRPr sz="2000" b="0">
+                <a:solidFill>
+                  <a:srgbClr val="333333"/>
+                </a:solidFill>
+                <a:latin typeface="Consolas"/>
+              </a:defRPr>
+            </a:pPr>
+          </a:p>
+          <a:p>
+            <a:pPr>
+              <a:lnSpc>
+                <a:spcPts val="2200"/>
+              </a:lnSpc>
+              <a:spcAft>
+                <a:spcPts val="400"/>
+              </a:spcAft>
+              <a:defRPr sz="2000" b="0">
+                <a:solidFill>
+                  <a:srgbClr val="333333"/>
+                </a:solidFill>
+                <a:latin typeface="Consolas"/>
+              </a:defRPr>
+            </a:pPr>
+            <a:r>
+              <a:t>#include &lt;cstdint&gt;</a:t>
+            </a:r>
+          </a:p>
+          <a:p>
+            <a:pPr>
+              <a:lnSpc>
+                <a:spcPts val="2200"/>
+              </a:lnSpc>
+              <a:spcAft>
+                <a:spcPts val="400"/>
+              </a:spcAft>
+              <a:defRPr sz="2000" b="0">
+                <a:solidFill>
+                  <a:srgbClr val="333333"/>
+                </a:solidFill>
+                <a:latin typeface="Consolas"/>
+              </a:defRPr>
+            </a:pPr>
+            <a:r>
+              <a:t>#include &lt;cstdlib&gt;</a:t>
+            </a:r>
+          </a:p>
+          <a:p>
+            <a:pPr>
+              <a:lnSpc>
+                <a:spcPts val="2200"/>
+              </a:lnSpc>
+              <a:spcAft>
+                <a:spcPts val="400"/>
+              </a:spcAft>
+              <a:defRPr sz="2000" b="0">
+                <a:solidFill>
+                  <a:srgbClr val="333333"/>
+                </a:solidFill>
+                <a:latin typeface="Consolas"/>
+              </a:defRPr>
+            </a:pPr>
+            <a:r>
+              <a:t>#include &lt;iostream&gt;</a:t>
+            </a:r>
+          </a:p>
+          <a:p>
+            <a:pPr>
+              <a:lnSpc>
+                <a:spcPts val="2200"/>
+              </a:lnSpc>
+              <a:spcAft>
+                <a:spcPts val="400"/>
+              </a:spcAft>
+              <a:defRPr sz="2000" b="0">
+                <a:solidFill>
+                  <a:srgbClr val="333333"/>
+                </a:solidFill>
+                <a:latin typeface="Consolas"/>
+              </a:defRPr>
+            </a:pPr>
+          </a:p>
+          <a:p>
+            <a:pPr>
+              <a:lnSpc>
+                <a:spcPts val="2200"/>
+              </a:lnSpc>
+              <a:spcAft>
+                <a:spcPts val="400"/>
+              </a:spcAft>
+              <a:defRPr sz="2000" b="0">
+                <a:solidFill>
+                  <a:srgbClr val="333333"/>
+                </a:solidFill>
+                <a:latin typeface="Consolas"/>
+              </a:defRPr>
+            </a:pPr>
+            <a:r>
+              <a:t>#include &lt;verilated.h&gt;</a:t>
+            </a:r>
+          </a:p>
+          <a:p>
+            <a:pPr>
+              <a:lnSpc>
+                <a:spcPts val="2200"/>
+              </a:lnSpc>
+              <a:spcAft>
+                <a:spcPts val="400"/>
+              </a:spcAft>
+              <a:defRPr sz="2000" b="0">
+                <a:solidFill>
+                  <a:srgbClr val="333333"/>
+                </a:solidFill>
+                <a:latin typeface="Consolas"/>
+              </a:defRPr>
+            </a:pPr>
+            <a:r>
+              <a:t>#include "Vtop.h"</a:t>
+            </a:r>
+          </a:p>
+          <a:p>
+            <a:pPr>
+              <a:lnSpc>
+                <a:spcPts val="2200"/>
+              </a:lnSpc>
+              <a:spcAft>
+                <a:spcPts val="400"/>
+              </a:spcAft>
+              <a:defRPr sz="2000" b="0">
+                <a:solidFill>
+                  <a:srgbClr val="333333"/>
+                </a:solidFill>
+                <a:latin typeface="Consolas"/>
+              </a:defRPr>
+            </a:pPr>
+          </a:p>
+          <a:p>
+            <a:pPr>
+              <a:lnSpc>
+                <a:spcPts val="2200"/>
+              </a:lnSpc>
+              <a:spcAft>
+                <a:spcPts val="400"/>
+              </a:spcAft>
+              <a:defRPr sz="2000" b="0">
+                <a:solidFill>
+                  <a:srgbClr val="333333"/>
+                </a:solidFill>
+                <a:latin typeface="Consolas"/>
+              </a:defRPr>
+            </a:pPr>
+            <a:r>
+              <a:t>#if VM_TRACE</a:t>
+            </a:r>
+          </a:p>
+          <a:p>
+            <a:pPr>
+              <a:lnSpc>
+                <a:spcPts val="2200"/>
+              </a:lnSpc>
+              <a:spcAft>
+                <a:spcPts val="400"/>
+              </a:spcAft>
+              <a:defRPr sz="2000" b="0">
+                <a:solidFill>
+                  <a:srgbClr val="333333"/>
+                </a:solidFill>
+                <a:latin typeface="Consolas"/>
+              </a:defRPr>
+            </a:pPr>
+            <a:r>
+              <a:t>#  include &lt;verilated_vcd_c.h&gt;</a:t>
+            </a:r>
+          </a:p>
+          <a:p>
+            <a:pPr>
+              <a:lnSpc>
+                <a:spcPts val="2200"/>
+              </a:lnSpc>
+              <a:spcAft>
+                <a:spcPts val="400"/>
+              </a:spcAft>
+              <a:defRPr sz="2000" b="0">
+                <a:solidFill>
+                  <a:srgbClr val="333333"/>
+                </a:solidFill>
+                <a:latin typeface="Consolas"/>
+              </a:defRPr>
+            </a:pPr>
+            <a:r>
+              <a:t>#endif</a:t>
+            </a:r>
+          </a:p>
+          <a:p>
+            <a:pPr>
+              <a:lnSpc>
+                <a:spcPts val="2200"/>
+              </a:lnSpc>
+              <a:spcAft>
+                <a:spcPts val="400"/>
+              </a:spcAft>
+              <a:defRPr sz="2000" b="0">
+                <a:solidFill>
+                  <a:srgbClr val="333333"/>
+                </a:solidFill>
+                <a:latin typeface="Consolas"/>
+              </a:defRPr>
+            </a:pPr>
+          </a:p>
+          <a:p>
+            <a:pPr>
+              <a:lnSpc>
+                <a:spcPts val="2200"/>
+              </a:lnSpc>
+              <a:spcAft>
+                <a:spcPts val="400"/>
+              </a:spcAft>
+              <a:defRPr sz="2000" b="0">
+                <a:solidFill>
+                  <a:srgbClr val="333333"/>
+                </a:solidFill>
+                <a:latin typeface="Consolas"/>
+              </a:defRPr>
+            </a:pPr>
+            <a:r>
+              <a:t>static constexpr int kClockHalfPeriod = 5;</a:t>
+            </a:r>
+          </a:p>
+          <a:p>
+            <a:pPr>
+              <a:lnSpc>
+                <a:spcPts val="2200"/>
+              </a:lnSpc>
+              <a:spcAft>
+                <a:spcPts val="400"/>
+              </a:spcAft>
+              <a:defRPr sz="2000" b="0">
+                <a:solidFill>
+                  <a:srgbClr val="333333"/>
+                </a:solidFill>
+                <a:latin typeface="Consolas"/>
+              </a:defRPr>
+            </a:pPr>
+            <a:r>
+              <a:t># ...</a:t>
+            </a:r>
+          </a:p>
+        </p:txBody>
+      </p:sp>
+      <p:sp>
+        <p:nvSpPr>
+          <p:cNvPr id="4" name="TextBox 3"/>
           <p:cNvSpPr txBox="1"/>
           <p:nvPr/>
         </p:nvSpPr>
@@ -7668,8 +9148,8 @@
         </p:nvSpPr>
         <p:spPr>
           <a:xfrm>
-            <a:off x="548640" y="411480"/>
-            <a:ext cx="11064240" cy="777240"/>
+            <a:off x="548640" y="2743200"/>
+            <a:ext cx="11064240" cy="1371600"/>
           </a:xfrm>
           <a:prstGeom prst="rect">
             <a:avLst/>
@@ -7682,11 +9162,11 @@
           </a:bodyPr>
           <a:lstStyle/>
           <a:p>
-            <a:pPr>
-              <a:lnSpc>
-                <a:spcPts val="2200"/>
-              </a:lnSpc>
-              <a:defRPr sz="2800" b="1">
+            <a:pPr algn="ctr">
+              <a:lnSpc>
+                <a:spcPts val="2200"/>
+              </a:lnSpc>
+              <a:defRPr sz="3600" b="1">
                 <a:solidFill>
                   <a:srgbClr val="1A1A2E"/>
                 </a:solidFill>
@@ -7694,7 +9174,7 @@
               </a:defRPr>
             </a:pPr>
             <a:r>
-              <a:t>Environment checks</a:t>
+              <a:t>Syllabus topics</a:t>
             </a:r>
           </a:p>
         </p:txBody>
@@ -7702,48 +9182,6 @@
       <p:sp>
         <p:nvSpPr>
           <p:cNvPr id="3" name="TextBox 2"/>
-          <p:cNvSpPr txBox="1"/>
-          <p:nvPr/>
-        </p:nvSpPr>
-        <p:spPr>
-          <a:xfrm>
-            <a:off x="548640" y="1234440"/>
-            <a:ext cx="11064240" cy="4937760"/>
-          </a:xfrm>
-          <a:prstGeom prst="rect">
-            <a:avLst/>
-          </a:prstGeom>
-          <a:noFill/>
-        </p:spPr>
-        <p:txBody>
-          <a:bodyPr wrap="square">
-            <a:noAutofit/>
-          </a:bodyPr>
-          <a:lstStyle/>
-          <a:p>
-            <a:pPr>
-              <a:lnSpc>
-                <a:spcPts val="2200"/>
-              </a:lnSpc>
-              <a:spcAft>
-                <a:spcPts val="1000"/>
-              </a:spcAft>
-              <a:defRPr sz="2000" b="0">
-                <a:solidFill>
-                  <a:srgbClr val="333333"/>
-                </a:solidFill>
-                <a:latin typeface="Calibri"/>
-              </a:defRPr>
-            </a:pPr>
-            <a:r>
-              <a:t>• verilator --version</a:t>
-            </a:r>
-          </a:p>
-        </p:txBody>
-      </p:sp>
-      <p:sp>
-        <p:nvSpPr>
-          <p:cNvPr id="4" name="TextBox 3"/>
           <p:cNvSpPr txBox="1"/>
           <p:nvPr/>
         </p:nvSpPr>
@@ -7832,7 +9270,7 @@
               </a:defRPr>
             </a:pPr>
             <a:r>
-              <a:t>Build and run spec_to_rtl</a:t>
+              <a:t>1. Specification → RTL Design Flow</a:t>
             </a:r>
           </a:p>
         </p:txBody>
@@ -7874,7 +9312,102 @@
               </a:defRPr>
             </a:pPr>
             <a:r>
-              <a:t>• cd module1/examples/spec_to_rtl</a:t>
+              <a:t>• Specification: Document interface (ports, widths,</a:t>
+            </a:r>
+          </a:p>
+          <a:p>
+            <a:pPr>
+              <a:lnSpc>
+                <a:spcPts val="2200"/>
+              </a:lnSpc>
+              <a:spcAft>
+                <a:spcPts val="1000"/>
+              </a:spcAft>
+              <a:defRPr sz="2000" b="0">
+                <a:solidFill>
+                  <a:srgbClr val="333333"/>
+                </a:solidFill>
+                <a:latin typeface="Calibri"/>
+              </a:defRPr>
+            </a:pPr>
+            <a:r>
+              <a:t>      direction), behavior (reset, enable, state transi…</a:t>
+            </a:r>
+          </a:p>
+          <a:p>
+            <a:pPr>
+              <a:lnSpc>
+                <a:spcPts val="2200"/>
+              </a:lnSpc>
+              <a:spcAft>
+                <a:spcPts val="1000"/>
+              </a:spcAft>
+              <a:defRPr sz="2000" b="0">
+                <a:solidFill>
+                  <a:srgbClr val="333333"/>
+                </a:solidFill>
+                <a:latin typeface="Calibri"/>
+              </a:defRPr>
+            </a:pPr>
+            <a:r>
+              <a:t>• RTL: Implement the spec in Verilog/SystemVerilog;</a:t>
+            </a:r>
+          </a:p>
+          <a:p>
+            <a:pPr>
+              <a:lnSpc>
+                <a:spcPts val="2200"/>
+              </a:lnSpc>
+              <a:spcAft>
+                <a:spcPts val="1000"/>
+              </a:spcAft>
+              <a:defRPr sz="2000" b="0">
+                <a:solidFill>
+                  <a:srgbClr val="333333"/>
+                </a:solidFill>
+                <a:latin typeface="Calibri"/>
+              </a:defRPr>
+            </a:pPr>
+            <a:r>
+              <a:t>      each requirement in the spec should map to clear…</a:t>
+            </a:r>
+          </a:p>
+          <a:p>
+            <a:pPr>
+              <a:lnSpc>
+                <a:spcPts val="2200"/>
+              </a:lnSpc>
+              <a:spcAft>
+                <a:spcPts val="1000"/>
+              </a:spcAft>
+              <a:defRPr sz="2000" b="0">
+                <a:solidFill>
+                  <a:srgbClr val="333333"/>
+                </a:solidFill>
+                <a:latin typeface="Calibri"/>
+              </a:defRPr>
+            </a:pPr>
+            <a:r>
+              <a:t>• Traceability: Being able to point from a line in the</a:t>
+            </a:r>
+          </a:p>
+          <a:p>
+            <a:pPr>
+              <a:lnSpc>
+                <a:spcPts val="2200"/>
+              </a:lnSpc>
+              <a:spcAft>
+                <a:spcPts val="1000"/>
+              </a:spcAft>
+              <a:defRPr sz="2000" b="0">
+                <a:solidFill>
+                  <a:srgbClr val="333333"/>
+                </a:solidFill>
+                <a:latin typeface="Calibri"/>
+              </a:defRPr>
+            </a:pPr>
+            <a:r>
+              <a:t>      spec to the RTL that implements it (and vice v…</a:t>
             </a:r>
           </a:p>
         </p:txBody>
@@ -7970,7 +9503,7 @@
               </a:defRPr>
             </a:pPr>
             <a:r>
-              <a:t>Module script (from repo root)</a:t>
+              <a:t>2. Design Methodology</a:t>
             </a:r>
           </a:p>
         </p:txBody>
@@ -8012,7 +9545,102 @@
               </a:defRPr>
             </a:pPr>
             <a:r>
-              <a:t>• ./scripts/module1.sh --check # Environment only</a:t>
+              <a:t>• Single block: One spec, one (or a few) RTL files,</a:t>
+            </a:r>
+          </a:p>
+          <a:p>
+            <a:pPr>
+              <a:lnSpc>
+                <a:spcPts val="2200"/>
+              </a:lnSpc>
+              <a:spcAft>
+                <a:spcPts val="1000"/>
+              </a:spcAft>
+              <a:defRPr sz="2000" b="0">
+                <a:solidFill>
+                  <a:srgbClr val="333333"/>
+                </a:solidFill>
+                <a:latin typeface="Calibri"/>
+              </a:defRPr>
+            </a:pPr>
+            <a:r>
+              <a:t>      one testbench.</a:t>
+            </a:r>
+          </a:p>
+          <a:p>
+            <a:pPr>
+              <a:lnSpc>
+                <a:spcPts val="2200"/>
+              </a:lnSpc>
+              <a:spcAft>
+                <a:spcPts val="1000"/>
+              </a:spcAft>
+              <a:defRPr sz="2000" b="0">
+                <a:solidFill>
+                  <a:srgbClr val="333333"/>
+                </a:solidFill>
+                <a:latin typeface="Calibri"/>
+              </a:defRPr>
+            </a:pPr>
+            <a:r>
+              <a:t>• Reuse: The same flow (spec → RTL → testbench) scales</a:t>
+            </a:r>
+          </a:p>
+          <a:p>
+            <a:pPr>
+              <a:lnSpc>
+                <a:spcPts val="2200"/>
+              </a:lnSpc>
+              <a:spcAft>
+                <a:spcPts val="1000"/>
+              </a:spcAft>
+              <a:defRPr sz="2000" b="0">
+                <a:solidFill>
+                  <a:srgbClr val="333333"/>
+                </a:solidFill>
+                <a:latin typeface="Calibri"/>
+              </a:defRPr>
+            </a:pPr>
+            <a:r>
+              <a:t>      to protocol blocks (UART, SPI, I²C) in Modules…</a:t>
+            </a:r>
+          </a:p>
+          <a:p>
+            <a:pPr>
+              <a:lnSpc>
+                <a:spcPts val="2200"/>
+              </a:lnSpc>
+              <a:spcAft>
+                <a:spcPts val="1000"/>
+              </a:spcAft>
+              <a:defRPr sz="2000" b="0">
+                <a:solidFill>
+                  <a:srgbClr val="333333"/>
+                </a:solidFill>
+                <a:latin typeface="Calibri"/>
+              </a:defRPr>
+            </a:pPr>
+            <a:r>
+              <a:t>• Documentation: Keep SPEC.md (or similar) next to the</a:t>
+            </a:r>
+          </a:p>
+          <a:p>
+            <a:pPr>
+              <a:lnSpc>
+                <a:spcPts val="2200"/>
+              </a:lnSpc>
+              <a:spcAft>
+                <a:spcPts val="1000"/>
+              </a:spcAft>
+              <a:defRPr sz="2000" b="0">
+                <a:solidFill>
+                  <a:srgbClr val="333333"/>
+                </a:solidFill>
+                <a:latin typeface="Calibri"/>
+              </a:defRPr>
+            </a:pPr>
+            <a:r>
+              <a:t>      RTL so that reviewers and verification can che…</a:t>
             </a:r>
           </a:p>
         </p:txBody>
@@ -8082,8 +9710,8 @@
         </p:nvSpPr>
         <p:spPr>
           <a:xfrm>
-            <a:off x="548640" y="2743200"/>
-            <a:ext cx="11064240" cy="1371600"/>
+            <a:off x="548640" y="411480"/>
+            <a:ext cx="11064240" cy="777240"/>
           </a:xfrm>
           <a:prstGeom prst="rect">
             <a:avLst/>
@@ -8096,11 +9724,11 @@
           </a:bodyPr>
           <a:lstStyle/>
           <a:p>
-            <a:pPr algn="ctr">
-              <a:lnSpc>
-                <a:spcPts val="2200"/>
-              </a:lnSpc>
-              <a:defRPr sz="3600" b="1">
+            <a:pPr>
+              <a:lnSpc>
+                <a:spcPts val="2200"/>
+              </a:lnSpc>
+              <a:defRPr sz="2800" b="1">
                 <a:solidFill>
                   <a:srgbClr val="1A1A2E"/>
                 </a:solidFill>
@@ -8108,7 +9736,7 @@
               </a:defRPr>
             </a:pPr>
             <a:r>
-              <a:t>Hands-on examples</a:t>
+              <a:t>3. Intro to Verification: What We Verify, and Why</a:t>
             </a:r>
           </a:p>
         </p:txBody>
@@ -8116,6 +9744,162 @@
       <p:sp>
         <p:nvSpPr>
           <p:cNvPr id="3" name="TextBox 2"/>
+          <p:cNvSpPr txBox="1"/>
+          <p:nvPr/>
+        </p:nvSpPr>
+        <p:spPr>
+          <a:xfrm>
+            <a:off x="548640" y="1234440"/>
+            <a:ext cx="11064240" cy="4937760"/>
+          </a:xfrm>
+          <a:prstGeom prst="rect">
+            <a:avLst/>
+          </a:prstGeom>
+          <a:noFill/>
+        </p:spPr>
+        <p:txBody>
+          <a:bodyPr wrap="square">
+            <a:noAutofit/>
+          </a:bodyPr>
+          <a:lstStyle/>
+          <a:p>
+            <a:pPr>
+              <a:lnSpc>
+                <a:spcPts val="2200"/>
+              </a:lnSpc>
+              <a:spcAft>
+                <a:spcPts val="1000"/>
+              </a:spcAft>
+              <a:defRPr sz="2000" b="0">
+                <a:solidFill>
+                  <a:srgbClr val="333333"/>
+                </a:solidFill>
+                <a:latin typeface="Calibri"/>
+              </a:defRPr>
+            </a:pPr>
+            <a:r>
+              <a:t>• What we verify: That the RTL matches the</a:t>
+            </a:r>
+          </a:p>
+          <a:p>
+            <a:pPr>
+              <a:lnSpc>
+                <a:spcPts val="2200"/>
+              </a:lnSpc>
+              <a:spcAft>
+                <a:spcPts val="1000"/>
+              </a:spcAft>
+              <a:defRPr sz="2000" b="0">
+                <a:solidFill>
+                  <a:srgbClr val="333333"/>
+                </a:solidFill>
+                <a:latin typeface="Calibri"/>
+              </a:defRPr>
+            </a:pPr>
+            <a:r>
+              <a:t>      specification (correct function, reset, enable,</a:t>
+            </a:r>
+          </a:p>
+          <a:p>
+            <a:pPr>
+              <a:lnSpc>
+                <a:spcPts val="2200"/>
+              </a:lnSpc>
+              <a:spcAft>
+                <a:spcPts val="1000"/>
+              </a:spcAft>
+              <a:defRPr sz="2000" b="0">
+                <a:solidFill>
+                  <a:srgbClr val="333333"/>
+                </a:solidFill>
+                <a:latin typeface="Calibri"/>
+              </a:defRPr>
+            </a:pPr>
+            <a:r>
+              <a:t>      boundaries…</a:t>
+            </a:r>
+          </a:p>
+          <a:p>
+            <a:pPr>
+              <a:lnSpc>
+                <a:spcPts val="2200"/>
+              </a:lnSpc>
+              <a:spcAft>
+                <a:spcPts val="1000"/>
+              </a:spcAft>
+              <a:defRPr sz="2000" b="0">
+                <a:solidFill>
+                  <a:srgbClr val="333333"/>
+                </a:solidFill>
+                <a:latin typeface="Calibri"/>
+              </a:defRPr>
+            </a:pPr>
+            <a:r>
+              <a:t>• Why we verify: Finding bugs in RTL is far cheaper</a:t>
+            </a:r>
+          </a:p>
+          <a:p>
+            <a:pPr>
+              <a:lnSpc>
+                <a:spcPts val="2200"/>
+              </a:lnSpc>
+              <a:spcAft>
+                <a:spcPts val="1000"/>
+              </a:spcAft>
+              <a:defRPr sz="2000" b="0">
+                <a:solidFill>
+                  <a:srgbClr val="333333"/>
+                </a:solidFill>
+                <a:latin typeface="Calibri"/>
+              </a:defRPr>
+            </a:pPr>
+            <a:r>
+              <a:t>      than finding them in silicon or in system integra…</a:t>
+            </a:r>
+          </a:p>
+          <a:p>
+            <a:pPr>
+              <a:lnSpc>
+                <a:spcPts val="2200"/>
+              </a:lnSpc>
+              <a:spcAft>
+                <a:spcPts val="1000"/>
+              </a:spcAft>
+              <a:defRPr sz="2000" b="0">
+                <a:solidFill>
+                  <a:srgbClr val="333333"/>
+                </a:solidFill>
+                <a:latin typeface="Calibri"/>
+              </a:defRPr>
+            </a:pPr>
+            <a:r>
+              <a:t>• Directed test: A simple test that drives specific</a:t>
+            </a:r>
+          </a:p>
+          <a:p>
+            <a:pPr>
+              <a:lnSpc>
+                <a:spcPts val="2200"/>
+              </a:lnSpc>
+              <a:spcAft>
+                <a:spcPts val="1000"/>
+              </a:spcAft>
+              <a:defRPr sz="2000" b="0">
+                <a:solidFill>
+                  <a:srgbClr val="333333"/>
+                </a:solidFill>
+                <a:latin typeface="Calibri"/>
+              </a:defRPr>
+            </a:pPr>
+            <a:r>
+              <a:t>      inputs (e.g., reset, then 10 enabled cycles) and…</a:t>
+            </a:r>
+          </a:p>
+        </p:txBody>
+      </p:sp>
+      <p:sp>
+        <p:nvSpPr>
+          <p:cNvPr id="4" name="TextBox 3"/>
           <p:cNvSpPr txBox="1"/>
           <p:nvPr/>
         </p:nvSpPr>
@@ -8178,8 +9962,8 @@
         </p:nvSpPr>
         <p:spPr>
           <a:xfrm>
-            <a:off x="548640" y="411480"/>
-            <a:ext cx="11064240" cy="777240"/>
+            <a:off x="548640" y="2743200"/>
+            <a:ext cx="11064240" cy="1371600"/>
           </a:xfrm>
           <a:prstGeom prst="rect">
             <a:avLst/>
@@ -8192,11 +9976,11 @@
           </a:bodyPr>
           <a:lstStyle/>
           <a:p>
-            <a:pPr>
-              <a:lnSpc>
-                <a:spcPts val="2200"/>
-              </a:lnSpc>
-              <a:defRPr sz="2800" b="1">
+            <a:pPr algn="ctr">
+              <a:lnSpc>
+                <a:spcPts val="2200"/>
+              </a:lnSpc>
+              <a:defRPr sz="3600" b="1">
                 <a:solidFill>
                   <a:srgbClr val="1A1A2E"/>
                 </a:solidFill>
@@ -8204,7 +9988,7 @@
               </a:defRPr>
             </a:pPr>
             <a:r>
-              <a:t>Module 1 self-check</a:t>
+              <a:t>Command reference highlights</a:t>
             </a:r>
           </a:p>
         </p:txBody>
@@ -8212,74 +9996,6 @@
       <p:sp>
         <p:nvSpPr>
           <p:cNvPr id="3" name="TextBox 2"/>
-          <p:cNvSpPr txBox="1"/>
-          <p:nvPr/>
-        </p:nvSpPr>
-        <p:spPr>
-          <a:xfrm>
-            <a:off x="548640" y="1051560"/>
-            <a:ext cx="11064240" cy="914400"/>
-          </a:xfrm>
-          <a:prstGeom prst="rect">
-            <a:avLst/>
-          </a:prstGeom>
-          <a:solidFill>
-            <a:srgbClr val="F4F4F4"/>
-          </a:solidFill>
-        </p:spPr>
-        <p:txBody>
-          <a:bodyPr wrap="square">
-            <a:noAutofit/>
-          </a:bodyPr>
-          <a:lstStyle/>
-          <a:p>
-            <a:pPr>
-              <a:lnSpc>
-                <a:spcPts val="2200"/>
-              </a:lnSpc>
-              <a:spcAft>
-                <a:spcPts val="200"/>
-              </a:spcAft>
-              <a:defRPr sz="2000" b="0">
-                <a:solidFill>
-                  <a:srgbClr val="333333"/>
-                </a:solidFill>
-                <a:latin typeface="Consolas"/>
-              </a:defRPr>
-            </a:pPr>
-            <a:r>
-              <a:t>$ ./scripts/module1.sh --help</a:t>
-            </a:r>
-          </a:p>
-        </p:txBody>
-      </p:sp>
-      <p:pic>
-        <p:nvPicPr>
-          <p:cNvPr id="4" name="Picture 3" descr="module1_check.png"/>
-          <p:cNvPicPr>
-            <a:picLocks noChangeAspect="1"/>
-          </p:cNvPicPr>
-          <p:nvPr/>
-        </p:nvPicPr>
-        <p:blipFill>
-          <a:blip r:embed="rId2"/>
-          <a:stretch>
-            <a:fillRect/>
-          </a:stretch>
-        </p:blipFill>
-        <p:spPr>
-          <a:xfrm>
-            <a:off x="548640" y="1965960"/>
-            <a:ext cx="7071358" cy="3977639"/>
-          </a:xfrm>
-          <a:prstGeom prst="rect">
-            <a:avLst/>
-          </a:prstGeom>
-        </p:spPr>
-      </p:pic>
-      <p:sp>
-        <p:nvSpPr>
-          <p:cNvPr id="5" name="TextBox 4"/>
           <p:cNvSpPr txBox="1"/>
           <p:nvPr/>
         </p:nvSpPr>
@@ -8368,7 +10084,7 @@
               </a:defRPr>
             </a:pPr>
             <a:r>
-              <a:t>Exercise scaffold</a:t>
+              <a:t>Environment checks</a:t>
             </a:r>
           </a:p>
         </p:txBody>
@@ -8381,15 +10097,13 @@
         </p:nvSpPr>
         <p:spPr>
           <a:xfrm>
-            <a:off x="548640" y="1143000"/>
-            <a:ext cx="11064240" cy="5029200"/>
+            <a:off x="548640" y="1234440"/>
+            <a:ext cx="11064240" cy="4937760"/>
           </a:xfrm>
           <a:prstGeom prst="rect">
             <a:avLst/>
           </a:prstGeom>
-          <a:solidFill>
-            <a:srgbClr val="F4F4F4"/>
-          </a:solidFill>
+          <a:noFill/>
         </p:spPr>
         <p:txBody>
           <a:bodyPr wrap="square">
@@ -8402,17 +10116,17 @@
                 <a:spcPts val="2200"/>
               </a:lnSpc>
               <a:spcAft>
-                <a:spcPts val="400"/>
-              </a:spcAft>
-              <a:defRPr sz="2000" b="0">
-                <a:solidFill>
-                  <a:srgbClr val="333333"/>
-                </a:solidFill>
-                <a:latin typeface="Consolas"/>
-              </a:defRPr>
-            </a:pPr>
-            <a:r>
-              <a:t>./scripts/module1.sh --scaffold</a:t>
+                <a:spcPts val="1000"/>
+              </a:spcAft>
+              <a:defRPr sz="2000" b="0">
+                <a:solidFill>
+                  <a:srgbClr val="333333"/>
+                </a:solidFill>
+                <a:latin typeface="Calibri"/>
+              </a:defRPr>
+            </a:pPr>
+            <a:r>
+              <a:t>• verilator --version</a:t>
             </a:r>
           </a:p>
         </p:txBody>
@@ -8703,7 +10417,7 @@
               </a:defRPr>
             </a:pPr>
             <a:r>
-              <a:t>Example 1: Spec-to-RTL example</a:t>
+              <a:t>Build and run spec_to_rtl</a:t>
             </a:r>
           </a:p>
         </p:txBody>
@@ -8745,26 +10459,7 @@
               </a:defRPr>
             </a:pPr>
             <a:r>
-              <a:t>• [examples/spec_to_rtl/WALKTHROUGH.md](examples/spec_</a:t>
-            </a:r>
-          </a:p>
-          <a:p>
-            <a:pPr>
-              <a:lnSpc>
-                <a:spcPts val="2200"/>
-              </a:lnSpc>
-              <a:spcAft>
-                <a:spcPts val="1000"/>
-              </a:spcAft>
-              <a:defRPr sz="2000" b="0">
-                <a:solidFill>
-                  <a:srgbClr val="333333"/>
-                </a:solidFill>
-                <a:latin typeface="Calibri"/>
-              </a:defRPr>
-            </a:pPr>
-            <a:r>
-              <a:t>      to_rtl/WALKTHROUGH.md) — Section-by-section rea…</a:t>
+              <a:t>• cd module1/examples/spec_to_rtl</a:t>
             </a:r>
           </a:p>
         </p:txBody>
@@ -8860,7 +10555,7 @@
               </a:defRPr>
             </a:pPr>
             <a:r>
-              <a:t>Demo: Spec-to-RTL example</a:t>
+              <a:t>Module script (from repo root)</a:t>
             </a:r>
           </a:p>
         </p:txBody>
@@ -8873,15 +10568,13 @@
         </p:nvSpPr>
         <p:spPr>
           <a:xfrm>
-            <a:off x="548640" y="1051560"/>
-            <a:ext cx="11064240" cy="914400"/>
+            <a:off x="548640" y="1234440"/>
+            <a:ext cx="11064240" cy="4937760"/>
           </a:xfrm>
           <a:prstGeom prst="rect">
             <a:avLst/>
           </a:prstGeom>
-          <a:solidFill>
-            <a:srgbClr val="F4F4F4"/>
-          </a:solidFill>
+          <a:noFill/>
         </p:spPr>
         <p:txBody>
           <a:bodyPr wrap="square">
@@ -8894,48 +10587,24 @@
                 <a:spcPts val="2200"/>
               </a:lnSpc>
               <a:spcAft>
-                <a:spcPts val="200"/>
-              </a:spcAft>
-              <a:defRPr sz="2000" b="0">
-                <a:solidFill>
-                  <a:srgbClr val="333333"/>
-                </a:solidFill>
-                <a:latin typeface="Consolas"/>
-              </a:defRPr>
-            </a:pPr>
-            <a:r>
-              <a:t>$ cd module1/examples/spec_to_rtl &amp;&amp; make run</a:t>
-            </a:r>
-          </a:p>
-        </p:txBody>
-      </p:sp>
-      <p:pic>
-        <p:nvPicPr>
-          <p:cNvPr id="4" name="Picture 3" descr="spec_to_rtl.png"/>
-          <p:cNvPicPr>
-            <a:picLocks noChangeAspect="1"/>
-          </p:cNvPicPr>
-          <p:nvPr/>
-        </p:nvPicPr>
-        <p:blipFill>
-          <a:blip r:embed="rId2"/>
-          <a:stretch>
-            <a:fillRect/>
-          </a:stretch>
-        </p:blipFill>
-        <p:spPr>
-          <a:xfrm>
-            <a:off x="548640" y="1965960"/>
-            <a:ext cx="7071358" cy="3977639"/>
-          </a:xfrm>
-          <a:prstGeom prst="rect">
-            <a:avLst/>
-          </a:prstGeom>
-        </p:spPr>
-      </p:pic>
-      <p:sp>
-        <p:nvSpPr>
-          <p:cNvPr id="5" name="TextBox 4"/>
+                <a:spcPts val="1000"/>
+              </a:spcAft>
+              <a:defRPr sz="2000" b="0">
+                <a:solidFill>
+                  <a:srgbClr val="333333"/>
+                </a:solidFill>
+                <a:latin typeface="Calibri"/>
+              </a:defRPr>
+            </a:pPr>
+            <a:r>
+              <a:t>• ./scripts/module1.sh --check # Environment only</a:t>
+            </a:r>
+          </a:p>
+        </p:txBody>
+      </p:sp>
+      <p:sp>
+        <p:nvSpPr>
+          <p:cNvPr id="4" name="TextBox 3"/>
           <p:cNvSpPr txBox="1"/>
           <p:nvPr/>
         </p:nvSpPr>
@@ -9024,7 +10693,7 @@
               </a:defRPr>
             </a:pPr>
             <a:r>
-              <a:t>Practice &amp; assessment</a:t>
+              <a:t>Hands-on examples</a:t>
             </a:r>
           </a:p>
         </p:txBody>
@@ -9120,7 +10789,7 @@
               </a:defRPr>
             </a:pPr>
             <a:r>
-              <a:t>What you should know</a:t>
+              <a:t>Module 1 self-check</a:t>
             </a:r>
           </a:p>
         </p:txBody>
@@ -9133,13 +10802,15 @@
         </p:nvSpPr>
         <p:spPr>
           <a:xfrm>
-            <a:off x="548640" y="1234440"/>
-            <a:ext cx="11064240" cy="4937760"/>
+            <a:off x="548640" y="1051560"/>
+            <a:ext cx="11064240" cy="914400"/>
           </a:xfrm>
           <a:prstGeom prst="rect">
             <a:avLst/>
           </a:prstGeom>
-          <a:noFill/>
+          <a:solidFill>
+            <a:srgbClr val="F4F4F4"/>
+          </a:solidFill>
         </p:spPr>
         <p:txBody>
           <a:bodyPr wrap="square">
@@ -9152,157 +10823,48 @@
                 <a:spcPts val="2200"/>
               </a:lnSpc>
               <a:spcAft>
-                <a:spcPts val="1000"/>
-              </a:spcAft>
-              <a:defRPr sz="2000" b="0">
-                <a:solidFill>
-                  <a:srgbClr val="333333"/>
-                </a:solidFill>
-                <a:latin typeface="Calibri"/>
-              </a:defRPr>
-            </a:pPr>
-            <a:r>
-              <a:t>• Describe the specification → RTL flow and why a</a:t>
-            </a:r>
-          </a:p>
-          <a:p>
-            <a:pPr>
-              <a:lnSpc>
-                <a:spcPts val="2200"/>
-              </a:lnSpc>
-              <a:spcAft>
-                <a:spcPts val="1000"/>
-              </a:spcAft>
-              <a:defRPr sz="2000" b="0">
-                <a:solidFill>
-                  <a:srgbClr val="333333"/>
-                </a:solidFill>
-                <a:latin typeface="Calibri"/>
-              </a:defRPr>
-            </a:pPr>
-            <a:r>
-              <a:t>      written spec matters.</a:t>
-            </a:r>
-          </a:p>
-          <a:p>
-            <a:pPr>
-              <a:lnSpc>
-                <a:spcPts val="2200"/>
-              </a:lnSpc>
-              <a:spcAft>
-                <a:spcPts val="1000"/>
-              </a:spcAft>
-              <a:defRPr sz="2000" b="0">
-                <a:solidFill>
-                  <a:srgbClr val="333333"/>
-                </a:solidFill>
-                <a:latin typeface="Calibri"/>
-              </a:defRPr>
-            </a:pPr>
-            <a:r>
-              <a:t>• Explain what we verify (RTL vs spec) and why (cost</a:t>
-            </a:r>
-          </a:p>
-          <a:p>
-            <a:pPr>
-              <a:lnSpc>
-                <a:spcPts val="2200"/>
-              </a:lnSpc>
-              <a:spcAft>
-                <a:spcPts val="1000"/>
-              </a:spcAft>
-              <a:defRPr sz="2000" b="0">
-                <a:solidFill>
-                  <a:srgbClr val="333333"/>
-                </a:solidFill>
-                <a:latin typeface="Calibri"/>
-              </a:defRPr>
-            </a:pPr>
-            <a:r>
-              <a:t>      of bugs, repeatability).</a:t>
-            </a:r>
-          </a:p>
-          <a:p>
-            <a:pPr>
-              <a:lnSpc>
-                <a:spcPts val="2200"/>
-              </a:lnSpc>
-              <a:spcAft>
-                <a:spcPts val="1000"/>
-              </a:spcAft>
-              <a:defRPr sz="2000" b="0">
-                <a:solidFill>
-                  <a:srgbClr val="333333"/>
-                </a:solidFill>
-                <a:latin typeface="Calibri"/>
-              </a:defRPr>
-            </a:pPr>
-            <a:r>
-              <a:t>• Run the spec_to_rtl example (make run) and relate</a:t>
-            </a:r>
-          </a:p>
-          <a:p>
-            <a:pPr>
-              <a:lnSpc>
-                <a:spcPts val="2200"/>
-              </a:lnSpc>
-              <a:spcAft>
-                <a:spcPts val="1000"/>
-              </a:spcAft>
-              <a:defRPr sz="2000" b="0">
-                <a:solidFill>
-                  <a:srgbClr val="333333"/>
-                </a:solidFill>
-                <a:latin typeface="Calibri"/>
-              </a:defRPr>
-            </a:pPr>
-            <a:r>
-              <a:t>      SPEC.md, counter.v, and sim_main.cpp.</a:t>
-            </a:r>
-          </a:p>
-          <a:p>
-            <a:pPr>
-              <a:lnSpc>
-                <a:spcPts val="2200"/>
-              </a:lnSpc>
-              <a:spcAft>
-                <a:spcPts val="1000"/>
-              </a:spcAft>
-              <a:defRPr sz="2000" b="0">
-                <a:solidFill>
-                  <a:srgbClr val="333333"/>
-                </a:solidFill>
-                <a:latin typeface="Calibri"/>
-              </a:defRPr>
-            </a:pPr>
-            <a:r>
-              <a:t>• Be ready for Module 2: basic testbench patterns and</a:t>
-            </a:r>
-          </a:p>
-          <a:p>
-            <a:pPr>
-              <a:lnSpc>
-                <a:spcPts val="2200"/>
-              </a:lnSpc>
-              <a:spcAft>
-                <a:spcPts val="1000"/>
-              </a:spcAft>
-              <a:defRPr sz="2000" b="0">
-                <a:solidFill>
-                  <a:srgbClr val="333333"/>
-                </a:solidFill>
-                <a:latin typeface="Calibri"/>
-              </a:defRPr>
-            </a:pPr>
-            <a:r>
-              <a:t>      UVM+SV (agents, sequences, drivers, monitors, s…</a:t>
-            </a:r>
-          </a:p>
-        </p:txBody>
-      </p:sp>
-      <p:sp>
-        <p:nvSpPr>
-          <p:cNvPr id="4" name="TextBox 3"/>
+                <a:spcPts val="200"/>
+              </a:spcAft>
+              <a:defRPr sz="2000" b="0">
+                <a:solidFill>
+                  <a:srgbClr val="333333"/>
+                </a:solidFill>
+                <a:latin typeface="Consolas"/>
+              </a:defRPr>
+            </a:pPr>
+            <a:r>
+              <a:t>$ ./scripts/module1.sh --help</a:t>
+            </a:r>
+          </a:p>
+        </p:txBody>
+      </p:sp>
+      <p:pic>
+        <p:nvPicPr>
+          <p:cNvPr id="4" name="Picture 3" descr="module1_check.png"/>
+          <p:cNvPicPr>
+            <a:picLocks noChangeAspect="1"/>
+          </p:cNvPicPr>
+          <p:nvPr/>
+        </p:nvPicPr>
+        <p:blipFill>
+          <a:blip r:embed="rId2"/>
+          <a:stretch>
+            <a:fillRect/>
+          </a:stretch>
+        </p:blipFill>
+        <p:spPr>
+          <a:xfrm>
+            <a:off x="548640" y="1965960"/>
+            <a:ext cx="7071358" cy="3977639"/>
+          </a:xfrm>
+          <a:prstGeom prst="rect">
+            <a:avLst/>
+          </a:prstGeom>
+        </p:spPr>
+      </p:pic>
+      <p:sp>
+        <p:nvSpPr>
+          <p:cNvPr id="5" name="TextBox 4"/>
           <p:cNvSpPr txBox="1"/>
           <p:nvPr/>
         </p:nvSpPr>
@@ -9391,7 +10953,7 @@
               </a:defRPr>
             </a:pPr>
             <a:r>
-              <a:t>Exercises</a:t>
+              <a:t>Example 1: Spec to RTL counter</a:t>
             </a:r>
           </a:p>
         </p:txBody>
@@ -9433,7 +10995,7 @@
               </a:defRPr>
             </a:pPr>
             <a:r>
-              <a:t>• Read the spec and RTL</a:t>
+              <a:t>• Reading SPEC.md and mapping each requirement to RTL</a:t>
             </a:r>
           </a:p>
           <a:p>
@@ -9452,7 +11014,7 @@
               </a:defRPr>
             </a:pPr>
             <a:r>
-              <a:t>• Run and extend the test</a:t>
+              <a:t>      in `dut/counter.v`</a:t>
             </a:r>
           </a:p>
           <a:p>
@@ -9471,7 +11033,64 @@
               </a:defRPr>
             </a:pPr>
             <a:r>
-              <a:t>• Optional: Trace</a:t>
+              <a:t>• Building a minimal top and C++ harness (clock,</a:t>
+            </a:r>
+          </a:p>
+          <a:p>
+            <a:pPr>
+              <a:lnSpc>
+                <a:spcPts val="2200"/>
+              </a:lnSpc>
+              <a:spcAft>
+                <a:spcPts val="1000"/>
+              </a:spcAft>
+              <a:defRPr sz="2000" b="0">
+                <a:solidFill>
+                  <a:srgbClr val="333333"/>
+                </a:solidFill>
+                <a:latin typeface="Calibri"/>
+              </a:defRPr>
+            </a:pPr>
+            <a:r>
+              <a:t>      reset, enable)</a:t>
+            </a:r>
+          </a:p>
+          <a:p>
+            <a:pPr>
+              <a:lnSpc>
+                <a:spcPts val="2200"/>
+              </a:lnSpc>
+              <a:spcAft>
+                <a:spcPts val="1000"/>
+              </a:spcAft>
+              <a:defRPr sz="2000" b="0">
+                <a:solidFill>
+                  <a:srgbClr val="333333"/>
+                </a:solidFill>
+                <a:latin typeface="Calibri"/>
+              </a:defRPr>
+            </a:pPr>
+            <a:r>
+              <a:t>• Directed verification: enable for N cycles and check</a:t>
+            </a:r>
+          </a:p>
+          <a:p>
+            <a:pPr>
+              <a:lnSpc>
+                <a:spcPts val="2200"/>
+              </a:lnSpc>
+              <a:spcAft>
+                <a:spcPts val="1000"/>
+              </a:spcAft>
+              <a:defRPr sz="2000" b="0">
+                <a:solidFill>
+                  <a:srgbClr val="333333"/>
+                </a:solidFill>
+                <a:latin typeface="Calibri"/>
+              </a:defRPr>
+            </a:pPr>
+            <a:r>
+              <a:t>      `count == N`</a:t>
             </a:r>
           </a:p>
         </p:txBody>
@@ -9567,7 +11186,7 @@
               </a:defRPr>
             </a:pPr>
             <a:r>
-              <a:t>Assessment checklist</a:t>
+              <a:t>Demo: Spec to RTL counter</a:t>
             </a:r>
           </a:p>
         </p:txBody>
@@ -9580,13 +11199,15 @@
         </p:nvSpPr>
         <p:spPr>
           <a:xfrm>
-            <a:off x="548640" y="1234440"/>
-            <a:ext cx="11064240" cy="4937760"/>
+            <a:off x="548640" y="1051560"/>
+            <a:ext cx="11064240" cy="914400"/>
           </a:xfrm>
           <a:prstGeom prst="rect">
             <a:avLst/>
           </a:prstGeom>
-          <a:noFill/>
+          <a:solidFill>
+            <a:srgbClr val="F4F4F4"/>
+          </a:solidFill>
         </p:spPr>
         <p:txBody>
           <a:bodyPr wrap="square">
@@ -9599,157 +11220,48 @@
                 <a:spcPts val="2200"/>
               </a:lnSpc>
               <a:spcAft>
-                <a:spcPts val="1000"/>
-              </a:spcAft>
-              <a:defRPr sz="2000" b="0">
-                <a:solidFill>
-                  <a:srgbClr val="333333"/>
-                </a:solidFill>
-                <a:latin typeface="Calibri"/>
-              </a:defRPr>
-            </a:pPr>
-            <a:r>
-              <a:t>• Can explain the spec → RTL flow and the role of a</a:t>
-            </a:r>
-          </a:p>
-          <a:p>
-            <a:pPr>
-              <a:lnSpc>
-                <a:spcPts val="2200"/>
-              </a:lnSpc>
-              <a:spcAft>
-                <a:spcPts val="1000"/>
-              </a:spcAft>
-              <a:defRPr sz="2000" b="0">
-                <a:solidFill>
-                  <a:srgbClr val="333333"/>
-                </a:solidFill>
-                <a:latin typeface="Calibri"/>
-              </a:defRPr>
-            </a:pPr>
-            <a:r>
-              <a:t>      written specification.</a:t>
-            </a:r>
-          </a:p>
-          <a:p>
-            <a:pPr>
-              <a:lnSpc>
-                <a:spcPts val="2200"/>
-              </a:lnSpc>
-              <a:spcAft>
-                <a:spcPts val="1000"/>
-              </a:spcAft>
-              <a:defRPr sz="2000" b="0">
-                <a:solidFill>
-                  <a:srgbClr val="333333"/>
-                </a:solidFill>
-                <a:latin typeface="Calibri"/>
-              </a:defRPr>
-            </a:pPr>
-            <a:r>
-              <a:t>• Can explain what we verify (RTL vs spec) and why</a:t>
-            </a:r>
-          </a:p>
-          <a:p>
-            <a:pPr>
-              <a:lnSpc>
-                <a:spcPts val="2200"/>
-              </a:lnSpc>
-              <a:spcAft>
-                <a:spcPts val="1000"/>
-              </a:spcAft>
-              <a:defRPr sz="2000" b="0">
-                <a:solidFill>
-                  <a:srgbClr val="333333"/>
-                </a:solidFill>
-                <a:latin typeface="Calibri"/>
-              </a:defRPr>
-            </a:pPr>
-            <a:r>
-              <a:t>      verification is done.</a:t>
-            </a:r>
-          </a:p>
-          <a:p>
-            <a:pPr>
-              <a:lnSpc>
-                <a:spcPts val="2200"/>
-              </a:lnSpc>
-              <a:spcAft>
-                <a:spcPts val="1000"/>
-              </a:spcAft>
-              <a:defRPr sz="2000" b="0">
-                <a:solidFill>
-                  <a:srgbClr val="333333"/>
-                </a:solidFill>
-                <a:latin typeface="Calibri"/>
-              </a:defRPr>
-            </a:pPr>
-            <a:r>
-              <a:t>• Can run the spec_to_rtl example and describe what</a:t>
-            </a:r>
-          </a:p>
-          <a:p>
-            <a:pPr>
-              <a:lnSpc>
-                <a:spcPts val="2200"/>
-              </a:lnSpc>
-              <a:spcAft>
-                <a:spcPts val="1000"/>
-              </a:spcAft>
-              <a:defRPr sz="2000" b="0">
-                <a:solidFill>
-                  <a:srgbClr val="333333"/>
-                </a:solidFill>
-                <a:latin typeface="Calibri"/>
-              </a:defRPr>
-            </a:pPr>
-            <a:r>
-              <a:t>      SPEC.md, counter.v, and sim_main.cpp do.</a:t>
-            </a:r>
-          </a:p>
-          <a:p>
-            <a:pPr>
-              <a:lnSpc>
-                <a:spcPts val="2200"/>
-              </a:lnSpc>
-              <a:spcAft>
-                <a:spcPts val="1000"/>
-              </a:spcAft>
-              <a:defRPr sz="2000" b="0">
-                <a:solidFill>
-                  <a:srgbClr val="333333"/>
-                </a:solidFill>
-                <a:latin typeface="Calibri"/>
-              </a:defRPr>
-            </a:pPr>
-            <a:r>
-              <a:t>• Ready to move to Module 2 (basic TB, UVM+SV,</a:t>
-            </a:r>
-          </a:p>
-          <a:p>
-            <a:pPr>
-              <a:lnSpc>
-                <a:spcPts val="2200"/>
-              </a:lnSpc>
-              <a:spcAft>
-                <a:spcPts val="1000"/>
-              </a:spcAft>
-              <a:defRPr sz="2000" b="0">
-                <a:solidFill>
-                  <a:srgbClr val="333333"/>
-                </a:solidFill>
-                <a:latin typeface="Calibri"/>
-              </a:defRPr>
-            </a:pPr>
-            <a:r>
-              <a:t>      toolchain).</a:t>
-            </a:r>
-          </a:p>
-        </p:txBody>
-      </p:sp>
-      <p:sp>
-        <p:nvSpPr>
-          <p:cNvPr id="4" name="TextBox 3"/>
+                <a:spcPts val="200"/>
+              </a:spcAft>
+              <a:defRPr sz="2000" b="0">
+                <a:solidFill>
+                  <a:srgbClr val="333333"/>
+                </a:solidFill>
+                <a:latin typeface="Consolas"/>
+              </a:defRPr>
+            </a:pPr>
+            <a:r>
+              <a:t>$ cd module1/examples/spec_to_rtl &amp;&amp; make run</a:t>
+            </a:r>
+          </a:p>
+        </p:txBody>
+      </p:sp>
+      <p:pic>
+        <p:nvPicPr>
+          <p:cNvPr id="4" name="Picture 3" descr="ex01_spec_to_rtl.png"/>
+          <p:cNvPicPr>
+            <a:picLocks noChangeAspect="1"/>
+          </p:cNvPicPr>
+          <p:nvPr/>
+        </p:nvPicPr>
+        <p:blipFill>
+          <a:blip r:embed="rId2"/>
+          <a:stretch>
+            <a:fillRect/>
+          </a:stretch>
+        </p:blipFill>
+        <p:spPr>
+          <a:xfrm>
+            <a:off x="548640" y="1965960"/>
+            <a:ext cx="7071358" cy="3977639"/>
+          </a:xfrm>
+          <a:prstGeom prst="rect">
+            <a:avLst/>
+          </a:prstGeom>
+        </p:spPr>
+      </p:pic>
+      <p:sp>
+        <p:nvSpPr>
+          <p:cNvPr id="5" name="TextBox 4"/>
           <p:cNvSpPr txBox="1"/>
           <p:nvPr/>
         </p:nvSpPr>
@@ -9812,8 +11324,8 @@
         </p:nvSpPr>
         <p:spPr>
           <a:xfrm>
-            <a:off x="548640" y="411480"/>
-            <a:ext cx="11064240" cy="777240"/>
+            <a:off x="548640" y="2743200"/>
+            <a:ext cx="11064240" cy="1371600"/>
           </a:xfrm>
           <a:prstGeom prst="rect">
             <a:avLst/>
@@ -9826,11 +11338,11 @@
           </a:bodyPr>
           <a:lstStyle/>
           <a:p>
-            <a:pPr>
-              <a:lnSpc>
-                <a:spcPts val="2200"/>
-              </a:lnSpc>
-              <a:defRPr sz="2800" b="1">
+            <a:pPr algn="ctr">
+              <a:lnSpc>
+                <a:spcPts val="2200"/>
+              </a:lnSpc>
+              <a:defRPr sz="3600" b="1">
                 <a:solidFill>
                   <a:srgbClr val="1A1A2E"/>
                 </a:solidFill>
@@ -9838,7 +11350,7 @@
               </a:defRPr>
             </a:pPr>
             <a:r>
-              <a:t>Summary &amp; next steps</a:t>
+              <a:t>Key concepts</a:t>
             </a:r>
           </a:p>
         </p:txBody>
@@ -9851,8 +11363,8 @@
         </p:nvSpPr>
         <p:spPr>
           <a:xfrm>
-            <a:off x="548640" y="1234440"/>
-            <a:ext cx="11064240" cy="4937760"/>
+            <a:off x="548640" y="6355080"/>
+            <a:ext cx="11064240" cy="320040"/>
           </a:xfrm>
           <a:prstGeom prst="rect">
             <a:avLst/>
@@ -9865,6 +11377,102 @@
           </a:bodyPr>
           <a:lstStyle/>
           <a:p>
+            <a:pPr algn="r">
+              <a:lnSpc>
+                <a:spcPts val="2200"/>
+              </a:lnSpc>
+              <a:defRPr sz="1000" b="0">
+                <a:solidFill>
+                  <a:srgbClr val="666666"/>
+                </a:solidFill>
+                <a:latin typeface="Calibri"/>
+              </a:defRPr>
+            </a:pPr>
+            <a:r>
+              <a:t>learn_uart_spi_i2c / Module 1</a:t>
+            </a:r>
+          </a:p>
+        </p:txBody>
+      </p:sp>
+    </p:spTree>
+  </p:cSld>
+  <p:clrMapOvr>
+    <a:masterClrMapping/>
+  </p:clrMapOvr>
+</p:sld>
+</file>
+
+<file path=ppt/slides/slide37.xml><?xml version="1.0" encoding="utf-8"?>
+<p:sld xmlns:a="http://schemas.openxmlformats.org/drawingml/2006/main" xmlns:p="http://schemas.openxmlformats.org/presentationml/2006/main" xmlns:r="http://schemas.openxmlformats.org/officeDocument/2006/relationships">
+  <p:cSld>
+    <p:spTree>
+      <p:nvGrpSpPr>
+        <p:cNvPr id="1" name=""/>
+        <p:cNvGrpSpPr/>
+        <p:nvPr/>
+      </p:nvGrpSpPr>
+      <p:grpSpPr/>
+      <p:sp>
+        <p:nvSpPr>
+          <p:cNvPr id="2" name="TextBox 1"/>
+          <p:cNvSpPr txBox="1"/>
+          <p:nvPr/>
+        </p:nvSpPr>
+        <p:spPr>
+          <a:xfrm>
+            <a:off x="548640" y="411480"/>
+            <a:ext cx="11064240" cy="777240"/>
+          </a:xfrm>
+          <a:prstGeom prst="rect">
+            <a:avLst/>
+          </a:prstGeom>
+          <a:noFill/>
+        </p:spPr>
+        <p:txBody>
+          <a:bodyPr wrap="square">
+            <a:noAutofit/>
+          </a:bodyPr>
+          <a:lstStyle/>
+          <a:p>
+            <a:pPr>
+              <a:lnSpc>
+                <a:spcPts val="2200"/>
+              </a:lnSpc>
+              <a:defRPr sz="2800" b="1">
+                <a:solidFill>
+                  <a:srgbClr val="1A1A2E"/>
+                </a:solidFill>
+                <a:latin typeface="Calibri"/>
+              </a:defRPr>
+            </a:pPr>
+            <a:r>
+              <a:t>1. Specification first</a:t>
+            </a:r>
+          </a:p>
+        </p:txBody>
+      </p:sp>
+      <p:sp>
+        <p:nvSpPr>
+          <p:cNvPr id="3" name="TextBox 2"/>
+          <p:cNvSpPr txBox="1"/>
+          <p:nvPr/>
+        </p:nvSpPr>
+        <p:spPr>
+          <a:xfrm>
+            <a:off x="548640" y="1234440"/>
+            <a:ext cx="11064240" cy="4937760"/>
+          </a:xfrm>
+          <a:prstGeom prst="rect">
+            <a:avLst/>
+          </a:prstGeom>
+          <a:noFill/>
+        </p:spPr>
+        <p:txBody>
+          <a:bodyPr wrap="square">
+            <a:noAutofit/>
+          </a:bodyPr>
+          <a:lstStyle/>
+          <a:p>
             <a:pPr>
               <a:lnSpc>
                 <a:spcPts val="2200"/>
@@ -9880,7 +11488,7 @@
               </a:defRPr>
             </a:pPr>
             <a:r>
-              <a:t>• Understand the specification → RTL design flow,</a:t>
+              <a:t>• Interface, behavior, and timing live in SPEC.md</a:t>
             </a:r>
           </a:p>
           <a:p>
@@ -9899,7 +11507,7 @@
               </a:defRPr>
             </a:pPr>
             <a:r>
-              <a:t>      design methodology, and why we verify.</a:t>
+              <a:t>      before RTL.</a:t>
             </a:r>
           </a:p>
           <a:p>
@@ -9918,7 +11526,7 @@
               </a:defRPr>
             </a:pPr>
             <a:r>
-              <a:t>• Complete module1/CHECKLIST.md</a:t>
+              <a:t>• Every check in the testbench should trace to a spec</a:t>
             </a:r>
           </a:p>
           <a:p>
@@ -9937,9 +11545,128 @@
               </a:defRPr>
             </a:pPr>
             <a:r>
-              <a:t>• Review module1/EXAMPLES.md and run each lab</a:t>
-            </a:r>
-          </a:p>
+              <a:t>      sentence.</a:t>
+            </a:r>
+          </a:p>
+        </p:txBody>
+      </p:sp>
+      <p:sp>
+        <p:nvSpPr>
+          <p:cNvPr id="4" name="TextBox 3"/>
+          <p:cNvSpPr txBox="1"/>
+          <p:nvPr/>
+        </p:nvSpPr>
+        <p:spPr>
+          <a:xfrm>
+            <a:off x="548640" y="6355080"/>
+            <a:ext cx="11064240" cy="320040"/>
+          </a:xfrm>
+          <a:prstGeom prst="rect">
+            <a:avLst/>
+          </a:prstGeom>
+          <a:noFill/>
+        </p:spPr>
+        <p:txBody>
+          <a:bodyPr wrap="square">
+            <a:noAutofit/>
+          </a:bodyPr>
+          <a:lstStyle/>
+          <a:p>
+            <a:pPr algn="r">
+              <a:lnSpc>
+                <a:spcPts val="2200"/>
+              </a:lnSpc>
+              <a:defRPr sz="1000" b="0">
+                <a:solidFill>
+                  <a:srgbClr val="666666"/>
+                </a:solidFill>
+                <a:latin typeface="Calibri"/>
+              </a:defRPr>
+            </a:pPr>
+            <a:r>
+              <a:t>learn_uart_spi_i2c / Module 1</a:t>
+            </a:r>
+          </a:p>
+        </p:txBody>
+      </p:sp>
+    </p:spTree>
+  </p:cSld>
+  <p:clrMapOvr>
+    <a:masterClrMapping/>
+  </p:clrMapOvr>
+</p:sld>
+</file>
+
+<file path=ppt/slides/slide38.xml><?xml version="1.0" encoding="utf-8"?>
+<p:sld xmlns:a="http://schemas.openxmlformats.org/drawingml/2006/main" xmlns:p="http://schemas.openxmlformats.org/presentationml/2006/main" xmlns:r="http://schemas.openxmlformats.org/officeDocument/2006/relationships">
+  <p:cSld>
+    <p:spTree>
+      <p:nvGrpSpPr>
+        <p:cNvPr id="1" name=""/>
+        <p:cNvGrpSpPr/>
+        <p:nvPr/>
+      </p:nvGrpSpPr>
+      <p:grpSpPr/>
+      <p:sp>
+        <p:nvSpPr>
+          <p:cNvPr id="2" name="TextBox 1"/>
+          <p:cNvSpPr txBox="1"/>
+          <p:nvPr/>
+        </p:nvSpPr>
+        <p:spPr>
+          <a:xfrm>
+            <a:off x="548640" y="411480"/>
+            <a:ext cx="11064240" cy="777240"/>
+          </a:xfrm>
+          <a:prstGeom prst="rect">
+            <a:avLst/>
+          </a:prstGeom>
+          <a:noFill/>
+        </p:spPr>
+        <p:txBody>
+          <a:bodyPr wrap="square">
+            <a:noAutofit/>
+          </a:bodyPr>
+          <a:lstStyle/>
+          <a:p>
+            <a:pPr>
+              <a:lnSpc>
+                <a:spcPts val="2200"/>
+              </a:lnSpc>
+              <a:defRPr sz="2800" b="1">
+                <a:solidFill>
+                  <a:srgbClr val="1A1A2E"/>
+                </a:solidFill>
+                <a:latin typeface="Calibri"/>
+              </a:defRPr>
+            </a:pPr>
+            <a:r>
+              <a:t>2. Traceability</a:t>
+            </a:r>
+          </a:p>
+        </p:txBody>
+      </p:sp>
+      <p:sp>
+        <p:nvSpPr>
+          <p:cNvPr id="3" name="TextBox 2"/>
+          <p:cNvSpPr txBox="1"/>
+          <p:nvPr/>
+        </p:nvSpPr>
+        <p:spPr>
+          <a:xfrm>
+            <a:off x="548640" y="1234440"/>
+            <a:ext cx="11064240" cy="4937760"/>
+          </a:xfrm>
+          <a:prstGeom prst="rect">
+            <a:avLst/>
+          </a:prstGeom>
+          <a:noFill/>
+        </p:spPr>
+        <p:txBody>
+          <a:bodyPr wrap="square">
+            <a:noAutofit/>
+          </a:bodyPr>
+          <a:lstStyle/>
           <a:p>
             <a:pPr>
               <a:lnSpc>
@@ -9956,7 +11683,26 @@
               </a:defRPr>
             </a:pPr>
             <a:r>
-              <a:t>• Next: Design &amp; Verification Methodology (Part 2)</a:t>
+              <a:t>• Spec line ↔ RTL line ↔ test expectation — practice</a:t>
+            </a:r>
+          </a:p>
+          <a:p>
+            <a:pPr>
+              <a:lnSpc>
+                <a:spcPts val="2200"/>
+              </a:lnSpc>
+              <a:spcAft>
+                <a:spcPts val="1000"/>
+              </a:spcAft>
+              <a:defRPr sz="2000" b="0">
+                <a:solidFill>
+                  <a:srgbClr val="333333"/>
+                </a:solidFill>
+                <a:latin typeface="Calibri"/>
+              </a:defRPr>
+            </a:pPr>
+            <a:r>
+              <a:t>      for UART/SPI/I²C later.</a:t>
             </a:r>
           </a:p>
         </p:txBody>
@@ -9964,6 +11710,102 @@
       <p:sp>
         <p:nvSpPr>
           <p:cNvPr id="4" name="TextBox 3"/>
+          <p:cNvSpPr txBox="1"/>
+          <p:nvPr/>
+        </p:nvSpPr>
+        <p:spPr>
+          <a:xfrm>
+            <a:off x="548640" y="6355080"/>
+            <a:ext cx="11064240" cy="320040"/>
+          </a:xfrm>
+          <a:prstGeom prst="rect">
+            <a:avLst/>
+          </a:prstGeom>
+          <a:noFill/>
+        </p:spPr>
+        <p:txBody>
+          <a:bodyPr wrap="square">
+            <a:noAutofit/>
+          </a:bodyPr>
+          <a:lstStyle/>
+          <a:p>
+            <a:pPr algn="r">
+              <a:lnSpc>
+                <a:spcPts val="2200"/>
+              </a:lnSpc>
+              <a:defRPr sz="1000" b="0">
+                <a:solidFill>
+                  <a:srgbClr val="666666"/>
+                </a:solidFill>
+                <a:latin typeface="Calibri"/>
+              </a:defRPr>
+            </a:pPr>
+            <a:r>
+              <a:t>learn_uart_spi_i2c / Module 1</a:t>
+            </a:r>
+          </a:p>
+        </p:txBody>
+      </p:sp>
+    </p:spTree>
+  </p:cSld>
+  <p:clrMapOvr>
+    <a:masterClrMapping/>
+  </p:clrMapOvr>
+</p:sld>
+</file>
+
+<file path=ppt/slides/slide39.xml><?xml version="1.0" encoding="utf-8"?>
+<p:sld xmlns:a="http://schemas.openxmlformats.org/drawingml/2006/main" xmlns:p="http://schemas.openxmlformats.org/presentationml/2006/main" xmlns:r="http://schemas.openxmlformats.org/officeDocument/2006/relationships">
+  <p:cSld>
+    <p:spTree>
+      <p:nvGrpSpPr>
+        <p:cNvPr id="1" name=""/>
+        <p:cNvGrpSpPr/>
+        <p:nvPr/>
+      </p:nvGrpSpPr>
+      <p:grpSpPr/>
+      <p:sp>
+        <p:nvSpPr>
+          <p:cNvPr id="2" name="TextBox 1"/>
+          <p:cNvSpPr txBox="1"/>
+          <p:nvPr/>
+        </p:nvSpPr>
+        <p:spPr>
+          <a:xfrm>
+            <a:off x="548640" y="2743200"/>
+            <a:ext cx="11064240" cy="1371600"/>
+          </a:xfrm>
+          <a:prstGeom prst="rect">
+            <a:avLst/>
+          </a:prstGeom>
+          <a:noFill/>
+        </p:spPr>
+        <p:txBody>
+          <a:bodyPr wrap="square">
+            <a:noAutofit/>
+          </a:bodyPr>
+          <a:lstStyle/>
+          <a:p>
+            <a:pPr algn="ctr">
+              <a:lnSpc>
+                <a:spcPts val="2200"/>
+              </a:lnSpc>
+              <a:defRPr sz="3600" b="1">
+                <a:solidFill>
+                  <a:srgbClr val="1A1A2E"/>
+                </a:solidFill>
+                <a:latin typeface="Calibri"/>
+              </a:defRPr>
+            </a:pPr>
+            <a:r>
+              <a:t>Common pitfalls</a:t>
+            </a:r>
+          </a:p>
+        </p:txBody>
+      </p:sp>
+      <p:sp>
+        <p:nvSpPr>
+          <p:cNvPr id="3" name="TextBox 2"/>
           <p:cNvSpPr txBox="1"/>
           <p:nvPr/>
         </p:nvSpPr>
@@ -10167,6 +12009,1462 @@
 </p:sld>
 </file>
 
+<file path=ppt/slides/slide40.xml><?xml version="1.0" encoding="utf-8"?>
+<p:sld xmlns:a="http://schemas.openxmlformats.org/drawingml/2006/main" xmlns:p="http://schemas.openxmlformats.org/presentationml/2006/main" xmlns:r="http://schemas.openxmlformats.org/officeDocument/2006/relationships">
+  <p:cSld>
+    <p:spTree>
+      <p:nvGrpSpPr>
+        <p:cNvPr id="1" name=""/>
+        <p:cNvGrpSpPr/>
+        <p:nvPr/>
+      </p:nvGrpSpPr>
+      <p:grpSpPr/>
+      <p:sp>
+        <p:nvSpPr>
+          <p:cNvPr id="2" name="TextBox 1"/>
+          <p:cNvSpPr txBox="1"/>
+          <p:nvPr/>
+        </p:nvSpPr>
+        <p:spPr>
+          <a:xfrm>
+            <a:off x="548640" y="411480"/>
+            <a:ext cx="11064240" cy="777240"/>
+          </a:xfrm>
+          <a:prstGeom prst="rect">
+            <a:avLst/>
+          </a:prstGeom>
+          <a:noFill/>
+        </p:spPr>
+        <p:txBody>
+          <a:bodyPr wrap="square">
+            <a:noAutofit/>
+          </a:bodyPr>
+          <a:lstStyle/>
+          <a:p>
+            <a:pPr>
+              <a:lnSpc>
+                <a:spcPts val="2200"/>
+              </a:lnSpc>
+              <a:defRPr sz="2800" b="1">
+                <a:solidFill>
+                  <a:srgbClr val="1A1A2E"/>
+                </a:solidFill>
+                <a:latin typeface="Calibri"/>
+              </a:defRPr>
+            </a:pPr>
+            <a:r>
+              <a:t>RTL before spec</a:t>
+            </a:r>
+          </a:p>
+        </p:txBody>
+      </p:sp>
+      <p:sp>
+        <p:nvSpPr>
+          <p:cNvPr id="3" name="TextBox 2"/>
+          <p:cNvSpPr txBox="1"/>
+          <p:nvPr/>
+        </p:nvSpPr>
+        <p:spPr>
+          <a:xfrm>
+            <a:off x="548640" y="1234440"/>
+            <a:ext cx="11064240" cy="4937760"/>
+          </a:xfrm>
+          <a:prstGeom prst="rect">
+            <a:avLst/>
+          </a:prstGeom>
+          <a:noFill/>
+        </p:spPr>
+        <p:txBody>
+          <a:bodyPr wrap="square">
+            <a:noAutofit/>
+          </a:bodyPr>
+          <a:lstStyle/>
+          <a:p>
+            <a:pPr>
+              <a:lnSpc>
+                <a:spcPts val="2200"/>
+              </a:lnSpc>
+              <a:spcAft>
+                <a:spcPts val="1000"/>
+              </a:spcAft>
+              <a:defRPr sz="2000" b="0">
+                <a:solidFill>
+                  <a:srgbClr val="333333"/>
+                </a:solidFill>
+                <a:latin typeface="Calibri"/>
+              </a:defRPr>
+            </a:pPr>
+            <a:r>
+              <a:t>• Mistake: Coding counters or FSMs without a written</a:t>
+            </a:r>
+          </a:p>
+          <a:p>
+            <a:pPr>
+              <a:lnSpc>
+                <a:spcPts val="2200"/>
+              </a:lnSpc>
+              <a:spcAft>
+                <a:spcPts val="1000"/>
+              </a:spcAft>
+              <a:defRPr sz="2000" b="0">
+                <a:solidFill>
+                  <a:srgbClr val="333333"/>
+                </a:solidFill>
+                <a:latin typeface="Calibri"/>
+              </a:defRPr>
+            </a:pPr>
+            <a:r>
+              <a:t>      spec.</a:t>
+            </a:r>
+          </a:p>
+          <a:p>
+            <a:pPr>
+              <a:lnSpc>
+                <a:spcPts val="2200"/>
+              </a:lnSpc>
+              <a:spcAft>
+                <a:spcPts val="1000"/>
+              </a:spcAft>
+              <a:defRPr sz="2000" b="0">
+                <a:solidFill>
+                  <a:srgbClr val="333333"/>
+                </a:solidFill>
+                <a:latin typeface="Calibri"/>
+              </a:defRPr>
+            </a:pPr>
+            <a:r>
+              <a:t>• Correct: Complete SPEC.md (or equivalent) first.</a:t>
+            </a:r>
+          </a:p>
+          <a:p>
+            <a:pPr>
+              <a:lnSpc>
+                <a:spcPts val="2200"/>
+              </a:lnSpc>
+              <a:spcAft>
+                <a:spcPts val="1000"/>
+              </a:spcAft>
+              <a:defRPr sz="2000" b="0">
+                <a:solidFill>
+                  <a:srgbClr val="333333"/>
+                </a:solidFill>
+                <a:latin typeface="Calibri"/>
+              </a:defRPr>
+            </a:pPr>
+            <a:r>
+              <a:t>• Why: Reviewers and tests have no golden reference.</a:t>
+            </a:r>
+          </a:p>
+        </p:txBody>
+      </p:sp>
+      <p:sp>
+        <p:nvSpPr>
+          <p:cNvPr id="4" name="TextBox 3"/>
+          <p:cNvSpPr txBox="1"/>
+          <p:nvPr/>
+        </p:nvSpPr>
+        <p:spPr>
+          <a:xfrm>
+            <a:off x="548640" y="6355080"/>
+            <a:ext cx="11064240" cy="320040"/>
+          </a:xfrm>
+          <a:prstGeom prst="rect">
+            <a:avLst/>
+          </a:prstGeom>
+          <a:noFill/>
+        </p:spPr>
+        <p:txBody>
+          <a:bodyPr wrap="square">
+            <a:noAutofit/>
+          </a:bodyPr>
+          <a:lstStyle/>
+          <a:p>
+            <a:pPr algn="r">
+              <a:lnSpc>
+                <a:spcPts val="2200"/>
+              </a:lnSpc>
+              <a:defRPr sz="1000" b="0">
+                <a:solidFill>
+                  <a:srgbClr val="666666"/>
+                </a:solidFill>
+                <a:latin typeface="Calibri"/>
+              </a:defRPr>
+            </a:pPr>
+            <a:r>
+              <a:t>learn_uart_spi_i2c / Module 1</a:t>
+            </a:r>
+          </a:p>
+        </p:txBody>
+      </p:sp>
+    </p:spTree>
+  </p:cSld>
+  <p:clrMapOvr>
+    <a:masterClrMapping/>
+  </p:clrMapOvr>
+</p:sld>
+</file>
+
+<file path=ppt/slides/slide41.xml><?xml version="1.0" encoding="utf-8"?>
+<p:sld xmlns:a="http://schemas.openxmlformats.org/drawingml/2006/main" xmlns:p="http://schemas.openxmlformats.org/presentationml/2006/main" xmlns:r="http://schemas.openxmlformats.org/officeDocument/2006/relationships">
+  <p:cSld>
+    <p:spTree>
+      <p:nvGrpSpPr>
+        <p:cNvPr id="1" name=""/>
+        <p:cNvGrpSpPr/>
+        <p:nvPr/>
+      </p:nvGrpSpPr>
+      <p:grpSpPr/>
+      <p:sp>
+        <p:nvSpPr>
+          <p:cNvPr id="2" name="TextBox 1"/>
+          <p:cNvSpPr txBox="1"/>
+          <p:nvPr/>
+        </p:nvSpPr>
+        <p:spPr>
+          <a:xfrm>
+            <a:off x="548640" y="411480"/>
+            <a:ext cx="11064240" cy="777240"/>
+          </a:xfrm>
+          <a:prstGeom prst="rect">
+            <a:avLst/>
+          </a:prstGeom>
+          <a:noFill/>
+        </p:spPr>
+        <p:txBody>
+          <a:bodyPr wrap="square">
+            <a:noAutofit/>
+          </a:bodyPr>
+          <a:lstStyle/>
+          <a:p>
+            <a:pPr>
+              <a:lnSpc>
+                <a:spcPts val="2200"/>
+              </a:lnSpc>
+              <a:defRPr sz="2800" b="1">
+                <a:solidFill>
+                  <a:srgbClr val="1A1A2E"/>
+                </a:solidFill>
+                <a:latin typeface="Calibri"/>
+              </a:defRPr>
+            </a:pPr>
+            <a:r>
+              <a:t>Weak checks</a:t>
+            </a:r>
+          </a:p>
+        </p:txBody>
+      </p:sp>
+      <p:sp>
+        <p:nvSpPr>
+          <p:cNvPr id="3" name="TextBox 2"/>
+          <p:cNvSpPr txBox="1"/>
+          <p:nvPr/>
+        </p:nvSpPr>
+        <p:spPr>
+          <a:xfrm>
+            <a:off x="548640" y="1234440"/>
+            <a:ext cx="11064240" cy="4937760"/>
+          </a:xfrm>
+          <a:prstGeom prst="rect">
+            <a:avLst/>
+          </a:prstGeom>
+          <a:noFill/>
+        </p:spPr>
+        <p:txBody>
+          <a:bodyPr wrap="square">
+            <a:noAutofit/>
+          </a:bodyPr>
+          <a:lstStyle/>
+          <a:p>
+            <a:pPr>
+              <a:lnSpc>
+                <a:spcPts val="2200"/>
+              </a:lnSpc>
+              <a:spcAft>
+                <a:spcPts val="1000"/>
+              </a:spcAft>
+              <a:defRPr sz="2000" b="0">
+                <a:solidFill>
+                  <a:srgbClr val="333333"/>
+                </a:solidFill>
+                <a:latin typeface="Calibri"/>
+              </a:defRPr>
+            </a:pPr>
+            <a:r>
+              <a:t>• Mistake: Only printing values without comparing to</a:t>
+            </a:r>
+          </a:p>
+          <a:p>
+            <a:pPr>
+              <a:lnSpc>
+                <a:spcPts val="2200"/>
+              </a:lnSpc>
+              <a:spcAft>
+                <a:spcPts val="1000"/>
+              </a:spcAft>
+              <a:defRPr sz="2000" b="0">
+                <a:solidFill>
+                  <a:srgbClr val="333333"/>
+                </a:solidFill>
+                <a:latin typeface="Calibri"/>
+              </a:defRPr>
+            </a:pPr>
+            <a:r>
+              <a:t>      expected results.</a:t>
+            </a:r>
+          </a:p>
+          <a:p>
+            <a:pPr>
+              <a:lnSpc>
+                <a:spcPts val="2200"/>
+              </a:lnSpc>
+              <a:spcAft>
+                <a:spcPts val="1000"/>
+              </a:spcAft>
+              <a:defRPr sz="2000" b="0">
+                <a:solidFill>
+                  <a:srgbClr val="333333"/>
+                </a:solidFill>
+                <a:latin typeface="Calibri"/>
+              </a:defRPr>
+            </a:pPr>
+            <a:r>
+              <a:t>• Correct: Explicit PASS/FAIL when `count !=</a:t>
+            </a:r>
+          </a:p>
+          <a:p>
+            <a:pPr>
+              <a:lnSpc>
+                <a:spcPts val="2200"/>
+              </a:lnSpc>
+              <a:spcAft>
+                <a:spcPts val="1000"/>
+              </a:spcAft>
+              <a:defRPr sz="2000" b="0">
+                <a:solidFill>
+                  <a:srgbClr val="333333"/>
+                </a:solidFill>
+                <a:latin typeface="Calibri"/>
+              </a:defRPr>
+            </a:pPr>
+            <a:r>
+              <a:t>      expected`.</a:t>
+            </a:r>
+          </a:p>
+          <a:p>
+            <a:pPr>
+              <a:lnSpc>
+                <a:spcPts val="2200"/>
+              </a:lnSpc>
+              <a:spcAft>
+                <a:spcPts val="1000"/>
+              </a:spcAft>
+              <a:defRPr sz="2000" b="0">
+                <a:solidFill>
+                  <a:srgbClr val="333333"/>
+                </a:solidFill>
+                <a:latin typeface="Calibri"/>
+              </a:defRPr>
+            </a:pPr>
+            <a:r>
+              <a:t>• Why: Simulation can run without verifying</a:t>
+            </a:r>
+          </a:p>
+          <a:p>
+            <a:pPr>
+              <a:lnSpc>
+                <a:spcPts val="2200"/>
+              </a:lnSpc>
+              <a:spcAft>
+                <a:spcPts val="1000"/>
+              </a:spcAft>
+              <a:defRPr sz="2000" b="0">
+                <a:solidFill>
+                  <a:srgbClr val="333333"/>
+                </a:solidFill>
+                <a:latin typeface="Calibri"/>
+              </a:defRPr>
+            </a:pPr>
+            <a:r>
+              <a:t>      correctness.</a:t>
+            </a:r>
+          </a:p>
+        </p:txBody>
+      </p:sp>
+      <p:sp>
+        <p:nvSpPr>
+          <p:cNvPr id="4" name="TextBox 3"/>
+          <p:cNvSpPr txBox="1"/>
+          <p:nvPr/>
+        </p:nvSpPr>
+        <p:spPr>
+          <a:xfrm>
+            <a:off x="548640" y="6355080"/>
+            <a:ext cx="11064240" cy="320040"/>
+          </a:xfrm>
+          <a:prstGeom prst="rect">
+            <a:avLst/>
+          </a:prstGeom>
+          <a:noFill/>
+        </p:spPr>
+        <p:txBody>
+          <a:bodyPr wrap="square">
+            <a:noAutofit/>
+          </a:bodyPr>
+          <a:lstStyle/>
+          <a:p>
+            <a:pPr algn="r">
+              <a:lnSpc>
+                <a:spcPts val="2200"/>
+              </a:lnSpc>
+              <a:defRPr sz="1000" b="0">
+                <a:solidFill>
+                  <a:srgbClr val="666666"/>
+                </a:solidFill>
+                <a:latin typeface="Calibri"/>
+              </a:defRPr>
+            </a:pPr>
+            <a:r>
+              <a:t>learn_uart_spi_i2c / Module 1</a:t>
+            </a:r>
+          </a:p>
+        </p:txBody>
+      </p:sp>
+    </p:spTree>
+  </p:cSld>
+  <p:clrMapOvr>
+    <a:masterClrMapping/>
+  </p:clrMapOvr>
+</p:sld>
+</file>
+
+<file path=ppt/slides/slide42.xml><?xml version="1.0" encoding="utf-8"?>
+<p:sld xmlns:a="http://schemas.openxmlformats.org/drawingml/2006/main" xmlns:p="http://schemas.openxmlformats.org/presentationml/2006/main" xmlns:r="http://schemas.openxmlformats.org/officeDocument/2006/relationships">
+  <p:cSld>
+    <p:spTree>
+      <p:nvGrpSpPr>
+        <p:cNvPr id="1" name=""/>
+        <p:cNvGrpSpPr/>
+        <p:nvPr/>
+      </p:nvGrpSpPr>
+      <p:grpSpPr/>
+      <p:sp>
+        <p:nvSpPr>
+          <p:cNvPr id="2" name="TextBox 1"/>
+          <p:cNvSpPr txBox="1"/>
+          <p:nvPr/>
+        </p:nvSpPr>
+        <p:spPr>
+          <a:xfrm>
+            <a:off x="548640" y="2743200"/>
+            <a:ext cx="11064240" cy="1371600"/>
+          </a:xfrm>
+          <a:prstGeom prst="rect">
+            <a:avLst/>
+          </a:prstGeom>
+          <a:noFill/>
+        </p:spPr>
+        <p:txBody>
+          <a:bodyPr wrap="square">
+            <a:noAutofit/>
+          </a:bodyPr>
+          <a:lstStyle/>
+          <a:p>
+            <a:pPr algn="ctr">
+              <a:lnSpc>
+                <a:spcPts val="2200"/>
+              </a:lnSpc>
+              <a:defRPr sz="3600" b="1">
+                <a:solidFill>
+                  <a:srgbClr val="1A1A2E"/>
+                </a:solidFill>
+                <a:latin typeface="Calibri"/>
+              </a:defRPr>
+            </a:pPr>
+            <a:r>
+              <a:t>Practice &amp; assessment</a:t>
+            </a:r>
+          </a:p>
+        </p:txBody>
+      </p:sp>
+      <p:sp>
+        <p:nvSpPr>
+          <p:cNvPr id="3" name="TextBox 2"/>
+          <p:cNvSpPr txBox="1"/>
+          <p:nvPr/>
+        </p:nvSpPr>
+        <p:spPr>
+          <a:xfrm>
+            <a:off x="548640" y="6355080"/>
+            <a:ext cx="11064240" cy="320040"/>
+          </a:xfrm>
+          <a:prstGeom prst="rect">
+            <a:avLst/>
+          </a:prstGeom>
+          <a:noFill/>
+        </p:spPr>
+        <p:txBody>
+          <a:bodyPr wrap="square">
+            <a:noAutofit/>
+          </a:bodyPr>
+          <a:lstStyle/>
+          <a:p>
+            <a:pPr algn="r">
+              <a:lnSpc>
+                <a:spcPts val="2200"/>
+              </a:lnSpc>
+              <a:defRPr sz="1000" b="0">
+                <a:solidFill>
+                  <a:srgbClr val="666666"/>
+                </a:solidFill>
+                <a:latin typeface="Calibri"/>
+              </a:defRPr>
+            </a:pPr>
+            <a:r>
+              <a:t>learn_uart_spi_i2c / Module 1</a:t>
+            </a:r>
+          </a:p>
+        </p:txBody>
+      </p:sp>
+    </p:spTree>
+  </p:cSld>
+  <p:clrMapOvr>
+    <a:masterClrMapping/>
+  </p:clrMapOvr>
+</p:sld>
+</file>
+
+<file path=ppt/slides/slide43.xml><?xml version="1.0" encoding="utf-8"?>
+<p:sld xmlns:a="http://schemas.openxmlformats.org/drawingml/2006/main" xmlns:p="http://schemas.openxmlformats.org/presentationml/2006/main" xmlns:r="http://schemas.openxmlformats.org/officeDocument/2006/relationships">
+  <p:cSld>
+    <p:spTree>
+      <p:nvGrpSpPr>
+        <p:cNvPr id="1" name=""/>
+        <p:cNvGrpSpPr/>
+        <p:nvPr/>
+      </p:nvGrpSpPr>
+      <p:grpSpPr/>
+      <p:sp>
+        <p:nvSpPr>
+          <p:cNvPr id="2" name="TextBox 1"/>
+          <p:cNvSpPr txBox="1"/>
+          <p:nvPr/>
+        </p:nvSpPr>
+        <p:spPr>
+          <a:xfrm>
+            <a:off x="548640" y="411480"/>
+            <a:ext cx="11064240" cy="777240"/>
+          </a:xfrm>
+          <a:prstGeom prst="rect">
+            <a:avLst/>
+          </a:prstGeom>
+          <a:noFill/>
+        </p:spPr>
+        <p:txBody>
+          <a:bodyPr wrap="square">
+            <a:noAutofit/>
+          </a:bodyPr>
+          <a:lstStyle/>
+          <a:p>
+            <a:pPr>
+              <a:lnSpc>
+                <a:spcPts val="2200"/>
+              </a:lnSpc>
+              <a:defRPr sz="2800" b="1">
+                <a:solidFill>
+                  <a:srgbClr val="1A1A2E"/>
+                </a:solidFill>
+                <a:latin typeface="Calibri"/>
+              </a:defRPr>
+            </a:pPr>
+            <a:r>
+              <a:t>What you should know</a:t>
+            </a:r>
+          </a:p>
+        </p:txBody>
+      </p:sp>
+      <p:sp>
+        <p:nvSpPr>
+          <p:cNvPr id="3" name="TextBox 2"/>
+          <p:cNvSpPr txBox="1"/>
+          <p:nvPr/>
+        </p:nvSpPr>
+        <p:spPr>
+          <a:xfrm>
+            <a:off x="548640" y="1234440"/>
+            <a:ext cx="11064240" cy="4937760"/>
+          </a:xfrm>
+          <a:prstGeom prst="rect">
+            <a:avLst/>
+          </a:prstGeom>
+          <a:noFill/>
+        </p:spPr>
+        <p:txBody>
+          <a:bodyPr wrap="square">
+            <a:noAutofit/>
+          </a:bodyPr>
+          <a:lstStyle/>
+          <a:p>
+            <a:pPr>
+              <a:lnSpc>
+                <a:spcPts val="2200"/>
+              </a:lnSpc>
+              <a:spcAft>
+                <a:spcPts val="1000"/>
+              </a:spcAft>
+              <a:defRPr sz="2000" b="0">
+                <a:solidFill>
+                  <a:srgbClr val="333333"/>
+                </a:solidFill>
+                <a:latin typeface="Calibri"/>
+              </a:defRPr>
+            </a:pPr>
+            <a:r>
+              <a:t>• Describe the specification → RTL flow and why a</a:t>
+            </a:r>
+          </a:p>
+          <a:p>
+            <a:pPr>
+              <a:lnSpc>
+                <a:spcPts val="2200"/>
+              </a:lnSpc>
+              <a:spcAft>
+                <a:spcPts val="1000"/>
+              </a:spcAft>
+              <a:defRPr sz="2000" b="0">
+                <a:solidFill>
+                  <a:srgbClr val="333333"/>
+                </a:solidFill>
+                <a:latin typeface="Calibri"/>
+              </a:defRPr>
+            </a:pPr>
+            <a:r>
+              <a:t>      written spec matters.</a:t>
+            </a:r>
+          </a:p>
+          <a:p>
+            <a:pPr>
+              <a:lnSpc>
+                <a:spcPts val="2200"/>
+              </a:lnSpc>
+              <a:spcAft>
+                <a:spcPts val="1000"/>
+              </a:spcAft>
+              <a:defRPr sz="2000" b="0">
+                <a:solidFill>
+                  <a:srgbClr val="333333"/>
+                </a:solidFill>
+                <a:latin typeface="Calibri"/>
+              </a:defRPr>
+            </a:pPr>
+            <a:r>
+              <a:t>• Explain what we verify (RTL vs spec) and why (cost</a:t>
+            </a:r>
+          </a:p>
+          <a:p>
+            <a:pPr>
+              <a:lnSpc>
+                <a:spcPts val="2200"/>
+              </a:lnSpc>
+              <a:spcAft>
+                <a:spcPts val="1000"/>
+              </a:spcAft>
+              <a:defRPr sz="2000" b="0">
+                <a:solidFill>
+                  <a:srgbClr val="333333"/>
+                </a:solidFill>
+                <a:latin typeface="Calibri"/>
+              </a:defRPr>
+            </a:pPr>
+            <a:r>
+              <a:t>      of bugs, repeatability).</a:t>
+            </a:r>
+          </a:p>
+          <a:p>
+            <a:pPr>
+              <a:lnSpc>
+                <a:spcPts val="2200"/>
+              </a:lnSpc>
+              <a:spcAft>
+                <a:spcPts val="1000"/>
+              </a:spcAft>
+              <a:defRPr sz="2000" b="0">
+                <a:solidFill>
+                  <a:srgbClr val="333333"/>
+                </a:solidFill>
+                <a:latin typeface="Calibri"/>
+              </a:defRPr>
+            </a:pPr>
+            <a:r>
+              <a:t>• Run the spec_to_rtl example (make run) and relate</a:t>
+            </a:r>
+          </a:p>
+          <a:p>
+            <a:pPr>
+              <a:lnSpc>
+                <a:spcPts val="2200"/>
+              </a:lnSpc>
+              <a:spcAft>
+                <a:spcPts val="1000"/>
+              </a:spcAft>
+              <a:defRPr sz="2000" b="0">
+                <a:solidFill>
+                  <a:srgbClr val="333333"/>
+                </a:solidFill>
+                <a:latin typeface="Calibri"/>
+              </a:defRPr>
+            </a:pPr>
+            <a:r>
+              <a:t>      SPEC.md, counter.v, and sim_main.cpp.</a:t>
+            </a:r>
+          </a:p>
+          <a:p>
+            <a:pPr>
+              <a:lnSpc>
+                <a:spcPts val="2200"/>
+              </a:lnSpc>
+              <a:spcAft>
+                <a:spcPts val="1000"/>
+              </a:spcAft>
+              <a:defRPr sz="2000" b="0">
+                <a:solidFill>
+                  <a:srgbClr val="333333"/>
+                </a:solidFill>
+                <a:latin typeface="Calibri"/>
+              </a:defRPr>
+            </a:pPr>
+            <a:r>
+              <a:t>• Be ready for Module 2: basic testbench patterns and</a:t>
+            </a:r>
+          </a:p>
+          <a:p>
+            <a:pPr>
+              <a:lnSpc>
+                <a:spcPts val="2200"/>
+              </a:lnSpc>
+              <a:spcAft>
+                <a:spcPts val="1000"/>
+              </a:spcAft>
+              <a:defRPr sz="2000" b="0">
+                <a:solidFill>
+                  <a:srgbClr val="333333"/>
+                </a:solidFill>
+                <a:latin typeface="Calibri"/>
+              </a:defRPr>
+            </a:pPr>
+            <a:r>
+              <a:t>      UVM+SV (agents, sequences, drivers, monitors, s…</a:t>
+            </a:r>
+          </a:p>
+        </p:txBody>
+      </p:sp>
+      <p:sp>
+        <p:nvSpPr>
+          <p:cNvPr id="4" name="TextBox 3"/>
+          <p:cNvSpPr txBox="1"/>
+          <p:nvPr/>
+        </p:nvSpPr>
+        <p:spPr>
+          <a:xfrm>
+            <a:off x="548640" y="6355080"/>
+            <a:ext cx="11064240" cy="320040"/>
+          </a:xfrm>
+          <a:prstGeom prst="rect">
+            <a:avLst/>
+          </a:prstGeom>
+          <a:noFill/>
+        </p:spPr>
+        <p:txBody>
+          <a:bodyPr wrap="square">
+            <a:noAutofit/>
+          </a:bodyPr>
+          <a:lstStyle/>
+          <a:p>
+            <a:pPr algn="r">
+              <a:lnSpc>
+                <a:spcPts val="2200"/>
+              </a:lnSpc>
+              <a:defRPr sz="1000" b="0">
+                <a:solidFill>
+                  <a:srgbClr val="666666"/>
+                </a:solidFill>
+                <a:latin typeface="Calibri"/>
+              </a:defRPr>
+            </a:pPr>
+            <a:r>
+              <a:t>learn_uart_spi_i2c / Module 1</a:t>
+            </a:r>
+          </a:p>
+        </p:txBody>
+      </p:sp>
+    </p:spTree>
+  </p:cSld>
+  <p:clrMapOvr>
+    <a:masterClrMapping/>
+  </p:clrMapOvr>
+</p:sld>
+</file>
+
+<file path=ppt/slides/slide44.xml><?xml version="1.0" encoding="utf-8"?>
+<p:sld xmlns:a="http://schemas.openxmlformats.org/drawingml/2006/main" xmlns:p="http://schemas.openxmlformats.org/presentationml/2006/main" xmlns:r="http://schemas.openxmlformats.org/officeDocument/2006/relationships">
+  <p:cSld>
+    <p:spTree>
+      <p:nvGrpSpPr>
+        <p:cNvPr id="1" name=""/>
+        <p:cNvGrpSpPr/>
+        <p:nvPr/>
+      </p:nvGrpSpPr>
+      <p:grpSpPr/>
+      <p:sp>
+        <p:nvSpPr>
+          <p:cNvPr id="2" name="TextBox 1"/>
+          <p:cNvSpPr txBox="1"/>
+          <p:nvPr/>
+        </p:nvSpPr>
+        <p:spPr>
+          <a:xfrm>
+            <a:off x="548640" y="411480"/>
+            <a:ext cx="11064240" cy="777240"/>
+          </a:xfrm>
+          <a:prstGeom prst="rect">
+            <a:avLst/>
+          </a:prstGeom>
+          <a:noFill/>
+        </p:spPr>
+        <p:txBody>
+          <a:bodyPr wrap="square">
+            <a:noAutofit/>
+          </a:bodyPr>
+          <a:lstStyle/>
+          <a:p>
+            <a:pPr>
+              <a:lnSpc>
+                <a:spcPts val="2200"/>
+              </a:lnSpc>
+              <a:defRPr sz="2800" b="1">
+                <a:solidFill>
+                  <a:srgbClr val="1A1A2E"/>
+                </a:solidFill>
+                <a:latin typeface="Calibri"/>
+              </a:defRPr>
+            </a:pPr>
+            <a:r>
+              <a:t>Exercises</a:t>
+            </a:r>
+          </a:p>
+        </p:txBody>
+      </p:sp>
+      <p:sp>
+        <p:nvSpPr>
+          <p:cNvPr id="3" name="TextBox 2"/>
+          <p:cNvSpPr txBox="1"/>
+          <p:nvPr/>
+        </p:nvSpPr>
+        <p:spPr>
+          <a:xfrm>
+            <a:off x="548640" y="1234440"/>
+            <a:ext cx="11064240" cy="4937760"/>
+          </a:xfrm>
+          <a:prstGeom prst="rect">
+            <a:avLst/>
+          </a:prstGeom>
+          <a:noFill/>
+        </p:spPr>
+        <p:txBody>
+          <a:bodyPr wrap="square">
+            <a:noAutofit/>
+          </a:bodyPr>
+          <a:lstStyle/>
+          <a:p>
+            <a:pPr>
+              <a:lnSpc>
+                <a:spcPts val="2200"/>
+              </a:lnSpc>
+              <a:spcAft>
+                <a:spcPts val="1000"/>
+              </a:spcAft>
+              <a:defRPr sz="2000" b="0">
+                <a:solidFill>
+                  <a:srgbClr val="333333"/>
+                </a:solidFill>
+                <a:latin typeface="Calibri"/>
+              </a:defRPr>
+            </a:pPr>
+            <a:r>
+              <a:t>• Read the spec and RTL</a:t>
+            </a:r>
+          </a:p>
+          <a:p>
+            <a:pPr>
+              <a:lnSpc>
+                <a:spcPts val="2200"/>
+              </a:lnSpc>
+              <a:spcAft>
+                <a:spcPts val="1000"/>
+              </a:spcAft>
+              <a:defRPr sz="2000" b="0">
+                <a:solidFill>
+                  <a:srgbClr val="333333"/>
+                </a:solidFill>
+                <a:latin typeface="Calibri"/>
+              </a:defRPr>
+            </a:pPr>
+            <a:r>
+              <a:t>• Run and extend the test</a:t>
+            </a:r>
+          </a:p>
+          <a:p>
+            <a:pPr>
+              <a:lnSpc>
+                <a:spcPts val="2200"/>
+              </a:lnSpc>
+              <a:spcAft>
+                <a:spcPts val="1000"/>
+              </a:spcAft>
+              <a:defRPr sz="2000" b="0">
+                <a:solidFill>
+                  <a:srgbClr val="333333"/>
+                </a:solidFill>
+                <a:latin typeface="Calibri"/>
+              </a:defRPr>
+            </a:pPr>
+            <a:r>
+              <a:t>• Optional: Trace</a:t>
+            </a:r>
+          </a:p>
+        </p:txBody>
+      </p:sp>
+      <p:sp>
+        <p:nvSpPr>
+          <p:cNvPr id="4" name="TextBox 3"/>
+          <p:cNvSpPr txBox="1"/>
+          <p:nvPr/>
+        </p:nvSpPr>
+        <p:spPr>
+          <a:xfrm>
+            <a:off x="548640" y="6355080"/>
+            <a:ext cx="11064240" cy="320040"/>
+          </a:xfrm>
+          <a:prstGeom prst="rect">
+            <a:avLst/>
+          </a:prstGeom>
+          <a:noFill/>
+        </p:spPr>
+        <p:txBody>
+          <a:bodyPr wrap="square">
+            <a:noAutofit/>
+          </a:bodyPr>
+          <a:lstStyle/>
+          <a:p>
+            <a:pPr algn="r">
+              <a:lnSpc>
+                <a:spcPts val="2200"/>
+              </a:lnSpc>
+              <a:defRPr sz="1000" b="0">
+                <a:solidFill>
+                  <a:srgbClr val="666666"/>
+                </a:solidFill>
+                <a:latin typeface="Calibri"/>
+              </a:defRPr>
+            </a:pPr>
+            <a:r>
+              <a:t>learn_uart_spi_i2c / Module 1</a:t>
+            </a:r>
+          </a:p>
+        </p:txBody>
+      </p:sp>
+    </p:spTree>
+  </p:cSld>
+  <p:clrMapOvr>
+    <a:masterClrMapping/>
+  </p:clrMapOvr>
+</p:sld>
+</file>
+
+<file path=ppt/slides/slide45.xml><?xml version="1.0" encoding="utf-8"?>
+<p:sld xmlns:a="http://schemas.openxmlformats.org/drawingml/2006/main" xmlns:p="http://schemas.openxmlformats.org/presentationml/2006/main" xmlns:r="http://schemas.openxmlformats.org/officeDocument/2006/relationships">
+  <p:cSld>
+    <p:spTree>
+      <p:nvGrpSpPr>
+        <p:cNvPr id="1" name=""/>
+        <p:cNvGrpSpPr/>
+        <p:nvPr/>
+      </p:nvGrpSpPr>
+      <p:grpSpPr/>
+      <p:sp>
+        <p:nvSpPr>
+          <p:cNvPr id="2" name="TextBox 1"/>
+          <p:cNvSpPr txBox="1"/>
+          <p:nvPr/>
+        </p:nvSpPr>
+        <p:spPr>
+          <a:xfrm>
+            <a:off x="548640" y="411480"/>
+            <a:ext cx="11064240" cy="777240"/>
+          </a:xfrm>
+          <a:prstGeom prst="rect">
+            <a:avLst/>
+          </a:prstGeom>
+          <a:noFill/>
+        </p:spPr>
+        <p:txBody>
+          <a:bodyPr wrap="square">
+            <a:noAutofit/>
+          </a:bodyPr>
+          <a:lstStyle/>
+          <a:p>
+            <a:pPr>
+              <a:lnSpc>
+                <a:spcPts val="2200"/>
+              </a:lnSpc>
+              <a:defRPr sz="2800" b="1">
+                <a:solidFill>
+                  <a:srgbClr val="1A1A2E"/>
+                </a:solidFill>
+                <a:latin typeface="Calibri"/>
+              </a:defRPr>
+            </a:pPr>
+            <a:r>
+              <a:t>Assessment checklist</a:t>
+            </a:r>
+          </a:p>
+        </p:txBody>
+      </p:sp>
+      <p:sp>
+        <p:nvSpPr>
+          <p:cNvPr id="3" name="TextBox 2"/>
+          <p:cNvSpPr txBox="1"/>
+          <p:nvPr/>
+        </p:nvSpPr>
+        <p:spPr>
+          <a:xfrm>
+            <a:off x="548640" y="1234440"/>
+            <a:ext cx="11064240" cy="4937760"/>
+          </a:xfrm>
+          <a:prstGeom prst="rect">
+            <a:avLst/>
+          </a:prstGeom>
+          <a:noFill/>
+        </p:spPr>
+        <p:txBody>
+          <a:bodyPr wrap="square">
+            <a:noAutofit/>
+          </a:bodyPr>
+          <a:lstStyle/>
+          <a:p>
+            <a:pPr>
+              <a:lnSpc>
+                <a:spcPts val="2200"/>
+              </a:lnSpc>
+              <a:spcAft>
+                <a:spcPts val="1000"/>
+              </a:spcAft>
+              <a:defRPr sz="2000" b="0">
+                <a:solidFill>
+                  <a:srgbClr val="333333"/>
+                </a:solidFill>
+                <a:latin typeface="Calibri"/>
+              </a:defRPr>
+            </a:pPr>
+            <a:r>
+              <a:t>• Can explain the spec → RTL flow and the role of a</a:t>
+            </a:r>
+          </a:p>
+          <a:p>
+            <a:pPr>
+              <a:lnSpc>
+                <a:spcPts val="2200"/>
+              </a:lnSpc>
+              <a:spcAft>
+                <a:spcPts val="1000"/>
+              </a:spcAft>
+              <a:defRPr sz="2000" b="0">
+                <a:solidFill>
+                  <a:srgbClr val="333333"/>
+                </a:solidFill>
+                <a:latin typeface="Calibri"/>
+              </a:defRPr>
+            </a:pPr>
+            <a:r>
+              <a:t>      written specification.</a:t>
+            </a:r>
+          </a:p>
+          <a:p>
+            <a:pPr>
+              <a:lnSpc>
+                <a:spcPts val="2200"/>
+              </a:lnSpc>
+              <a:spcAft>
+                <a:spcPts val="1000"/>
+              </a:spcAft>
+              <a:defRPr sz="2000" b="0">
+                <a:solidFill>
+                  <a:srgbClr val="333333"/>
+                </a:solidFill>
+                <a:latin typeface="Calibri"/>
+              </a:defRPr>
+            </a:pPr>
+            <a:r>
+              <a:t>• Can explain what we verify (RTL vs spec) and why</a:t>
+            </a:r>
+          </a:p>
+          <a:p>
+            <a:pPr>
+              <a:lnSpc>
+                <a:spcPts val="2200"/>
+              </a:lnSpc>
+              <a:spcAft>
+                <a:spcPts val="1000"/>
+              </a:spcAft>
+              <a:defRPr sz="2000" b="0">
+                <a:solidFill>
+                  <a:srgbClr val="333333"/>
+                </a:solidFill>
+                <a:latin typeface="Calibri"/>
+              </a:defRPr>
+            </a:pPr>
+            <a:r>
+              <a:t>      verification is done.</a:t>
+            </a:r>
+          </a:p>
+          <a:p>
+            <a:pPr>
+              <a:lnSpc>
+                <a:spcPts val="2200"/>
+              </a:lnSpc>
+              <a:spcAft>
+                <a:spcPts val="1000"/>
+              </a:spcAft>
+              <a:defRPr sz="2000" b="0">
+                <a:solidFill>
+                  <a:srgbClr val="333333"/>
+                </a:solidFill>
+                <a:latin typeface="Calibri"/>
+              </a:defRPr>
+            </a:pPr>
+            <a:r>
+              <a:t>• Can run the spec_to_rtl example and describe what</a:t>
+            </a:r>
+          </a:p>
+          <a:p>
+            <a:pPr>
+              <a:lnSpc>
+                <a:spcPts val="2200"/>
+              </a:lnSpc>
+              <a:spcAft>
+                <a:spcPts val="1000"/>
+              </a:spcAft>
+              <a:defRPr sz="2000" b="0">
+                <a:solidFill>
+                  <a:srgbClr val="333333"/>
+                </a:solidFill>
+                <a:latin typeface="Calibri"/>
+              </a:defRPr>
+            </a:pPr>
+            <a:r>
+              <a:t>      SPEC.md, counter.v, and sim_main.cpp do.</a:t>
+            </a:r>
+          </a:p>
+          <a:p>
+            <a:pPr>
+              <a:lnSpc>
+                <a:spcPts val="2200"/>
+              </a:lnSpc>
+              <a:spcAft>
+                <a:spcPts val="1000"/>
+              </a:spcAft>
+              <a:defRPr sz="2000" b="0">
+                <a:solidFill>
+                  <a:srgbClr val="333333"/>
+                </a:solidFill>
+                <a:latin typeface="Calibri"/>
+              </a:defRPr>
+            </a:pPr>
+            <a:r>
+              <a:t>• Ready to move to Module 2 (basic TB, UVM+SV,</a:t>
+            </a:r>
+          </a:p>
+          <a:p>
+            <a:pPr>
+              <a:lnSpc>
+                <a:spcPts val="2200"/>
+              </a:lnSpc>
+              <a:spcAft>
+                <a:spcPts val="1000"/>
+              </a:spcAft>
+              <a:defRPr sz="2000" b="0">
+                <a:solidFill>
+                  <a:srgbClr val="333333"/>
+                </a:solidFill>
+                <a:latin typeface="Calibri"/>
+              </a:defRPr>
+            </a:pPr>
+            <a:r>
+              <a:t>      toolchain).</a:t>
+            </a:r>
+          </a:p>
+        </p:txBody>
+      </p:sp>
+      <p:sp>
+        <p:nvSpPr>
+          <p:cNvPr id="4" name="TextBox 3"/>
+          <p:cNvSpPr txBox="1"/>
+          <p:nvPr/>
+        </p:nvSpPr>
+        <p:spPr>
+          <a:xfrm>
+            <a:off x="548640" y="6355080"/>
+            <a:ext cx="11064240" cy="320040"/>
+          </a:xfrm>
+          <a:prstGeom prst="rect">
+            <a:avLst/>
+          </a:prstGeom>
+          <a:noFill/>
+        </p:spPr>
+        <p:txBody>
+          <a:bodyPr wrap="square">
+            <a:noAutofit/>
+          </a:bodyPr>
+          <a:lstStyle/>
+          <a:p>
+            <a:pPr algn="r">
+              <a:lnSpc>
+                <a:spcPts val="2200"/>
+              </a:lnSpc>
+              <a:defRPr sz="1000" b="0">
+                <a:solidFill>
+                  <a:srgbClr val="666666"/>
+                </a:solidFill>
+                <a:latin typeface="Calibri"/>
+              </a:defRPr>
+            </a:pPr>
+            <a:r>
+              <a:t>learn_uart_spi_i2c / Module 1</a:t>
+            </a:r>
+          </a:p>
+        </p:txBody>
+      </p:sp>
+    </p:spTree>
+  </p:cSld>
+  <p:clrMapOvr>
+    <a:masterClrMapping/>
+  </p:clrMapOvr>
+</p:sld>
+</file>
+
+<file path=ppt/slides/slide46.xml><?xml version="1.0" encoding="utf-8"?>
+<p:sld xmlns:a="http://schemas.openxmlformats.org/drawingml/2006/main" xmlns:p="http://schemas.openxmlformats.org/presentationml/2006/main" xmlns:r="http://schemas.openxmlformats.org/officeDocument/2006/relationships">
+  <p:cSld>
+    <p:spTree>
+      <p:nvGrpSpPr>
+        <p:cNvPr id="1" name=""/>
+        <p:cNvGrpSpPr/>
+        <p:nvPr/>
+      </p:nvGrpSpPr>
+      <p:grpSpPr/>
+      <p:sp>
+        <p:nvSpPr>
+          <p:cNvPr id="2" name="TextBox 1"/>
+          <p:cNvSpPr txBox="1"/>
+          <p:nvPr/>
+        </p:nvSpPr>
+        <p:spPr>
+          <a:xfrm>
+            <a:off x="548640" y="411480"/>
+            <a:ext cx="11064240" cy="777240"/>
+          </a:xfrm>
+          <a:prstGeom prst="rect">
+            <a:avLst/>
+          </a:prstGeom>
+          <a:noFill/>
+        </p:spPr>
+        <p:txBody>
+          <a:bodyPr wrap="square">
+            <a:noAutofit/>
+          </a:bodyPr>
+          <a:lstStyle/>
+          <a:p>
+            <a:pPr>
+              <a:lnSpc>
+                <a:spcPts val="2200"/>
+              </a:lnSpc>
+              <a:defRPr sz="2800" b="1">
+                <a:solidFill>
+                  <a:srgbClr val="1A1A2E"/>
+                </a:solidFill>
+                <a:latin typeface="Calibri"/>
+              </a:defRPr>
+            </a:pPr>
+            <a:r>
+              <a:t>Summary &amp; next steps</a:t>
+            </a:r>
+          </a:p>
+        </p:txBody>
+      </p:sp>
+      <p:sp>
+        <p:nvSpPr>
+          <p:cNvPr id="3" name="TextBox 2"/>
+          <p:cNvSpPr txBox="1"/>
+          <p:nvPr/>
+        </p:nvSpPr>
+        <p:spPr>
+          <a:xfrm>
+            <a:off x="548640" y="1234440"/>
+            <a:ext cx="11064240" cy="4937760"/>
+          </a:xfrm>
+          <a:prstGeom prst="rect">
+            <a:avLst/>
+          </a:prstGeom>
+          <a:noFill/>
+        </p:spPr>
+        <p:txBody>
+          <a:bodyPr wrap="square">
+            <a:noAutofit/>
+          </a:bodyPr>
+          <a:lstStyle/>
+          <a:p>
+            <a:pPr>
+              <a:lnSpc>
+                <a:spcPts val="2200"/>
+              </a:lnSpc>
+              <a:spcAft>
+                <a:spcPts val="1000"/>
+              </a:spcAft>
+              <a:defRPr sz="2000" b="0">
+                <a:solidFill>
+                  <a:srgbClr val="333333"/>
+                </a:solidFill>
+                <a:latin typeface="Calibri"/>
+              </a:defRPr>
+            </a:pPr>
+            <a:r>
+              <a:t>• Understand the specification → RTL design flow,</a:t>
+            </a:r>
+          </a:p>
+          <a:p>
+            <a:pPr>
+              <a:lnSpc>
+                <a:spcPts val="2200"/>
+              </a:lnSpc>
+              <a:spcAft>
+                <a:spcPts val="1000"/>
+              </a:spcAft>
+              <a:defRPr sz="2000" b="0">
+                <a:solidFill>
+                  <a:srgbClr val="333333"/>
+                </a:solidFill>
+                <a:latin typeface="Calibri"/>
+              </a:defRPr>
+            </a:pPr>
+            <a:r>
+              <a:t>      design methodology, and why we verify.</a:t>
+            </a:r>
+          </a:p>
+          <a:p>
+            <a:pPr>
+              <a:lnSpc>
+                <a:spcPts val="2200"/>
+              </a:lnSpc>
+              <a:spcAft>
+                <a:spcPts val="1000"/>
+              </a:spcAft>
+              <a:defRPr sz="2000" b="0">
+                <a:solidFill>
+                  <a:srgbClr val="333333"/>
+                </a:solidFill>
+                <a:latin typeface="Calibri"/>
+              </a:defRPr>
+            </a:pPr>
+            <a:r>
+              <a:t>• Complete module1/CHECKLIST.md</a:t>
+            </a:r>
+          </a:p>
+          <a:p>
+            <a:pPr>
+              <a:lnSpc>
+                <a:spcPts val="2200"/>
+              </a:lnSpc>
+              <a:spcAft>
+                <a:spcPts val="1000"/>
+              </a:spcAft>
+              <a:defRPr sz="2000" b="0">
+                <a:solidFill>
+                  <a:srgbClr val="333333"/>
+                </a:solidFill>
+                <a:latin typeface="Calibri"/>
+              </a:defRPr>
+            </a:pPr>
+            <a:r>
+              <a:t>• Review module1/EXAMPLES.md and run each lab</a:t>
+            </a:r>
+          </a:p>
+          <a:p>
+            <a:pPr>
+              <a:lnSpc>
+                <a:spcPts val="2200"/>
+              </a:lnSpc>
+              <a:spcAft>
+                <a:spcPts val="1000"/>
+              </a:spcAft>
+              <a:defRPr sz="2000" b="0">
+                <a:solidFill>
+                  <a:srgbClr val="333333"/>
+                </a:solidFill>
+                <a:latin typeface="Calibri"/>
+              </a:defRPr>
+            </a:pPr>
+            <a:r>
+              <a:t>• Next: Design &amp; Verification Methodology (Part 2)</a:t>
+            </a:r>
+          </a:p>
+        </p:txBody>
+      </p:sp>
+      <p:sp>
+        <p:nvSpPr>
+          <p:cNvPr id="4" name="TextBox 3"/>
+          <p:cNvSpPr txBox="1"/>
+          <p:nvPr/>
+        </p:nvSpPr>
+        <p:spPr>
+          <a:xfrm>
+            <a:off x="548640" y="6355080"/>
+            <a:ext cx="11064240" cy="320040"/>
+          </a:xfrm>
+          <a:prstGeom prst="rect">
+            <a:avLst/>
+          </a:prstGeom>
+          <a:noFill/>
+        </p:spPr>
+        <p:txBody>
+          <a:bodyPr wrap="square">
+            <a:noAutofit/>
+          </a:bodyPr>
+          <a:lstStyle/>
+          <a:p>
+            <a:pPr algn="r">
+              <a:lnSpc>
+                <a:spcPts val="2200"/>
+              </a:lnSpc>
+              <a:defRPr sz="1000" b="0">
+                <a:solidFill>
+                  <a:srgbClr val="666666"/>
+                </a:solidFill>
+                <a:latin typeface="Calibri"/>
+              </a:defRPr>
+            </a:pPr>
+            <a:r>
+              <a:t>learn_uart_spi_i2c / Module 1</a:t>
+            </a:r>
+          </a:p>
+        </p:txBody>
+      </p:sp>
+    </p:spTree>
+  </p:cSld>
+  <p:clrMapOvr>
+    <a:masterClrMapping/>
+  </p:clrMapOvr>
+</p:sld>
+</file>
+
 <file path=ppt/slides/slide5.xml><?xml version="1.0" encoding="utf-8"?>
 <p:sld xmlns:a="http://schemas.openxmlformats.org/drawingml/2006/main" xmlns:p="http://schemas.openxmlformats.org/presentationml/2006/main" xmlns:r="http://schemas.openxmlformats.org/officeDocument/2006/relationships">
   <p:cSld>
@@ -10831,14 +14129,227 @@
               </a:defRPr>
             </a:pPr>
             <a:r>
-              <a:t>RTL / block architecture</a:t>
+              <a:t>1. Artifact flow (spec_to_rtl)</a:t>
+            </a:r>
+          </a:p>
+        </p:txBody>
+      </p:sp>
+      <p:sp>
+        <p:nvSpPr>
+          <p:cNvPr id="3" name="TextBox 2"/>
+          <p:cNvSpPr txBox="1"/>
+          <p:nvPr/>
+        </p:nvSpPr>
+        <p:spPr>
+          <a:xfrm>
+            <a:off x="548640" y="1234440"/>
+            <a:ext cx="5303520" cy="4754880"/>
+          </a:xfrm>
+          <a:prstGeom prst="rect">
+            <a:avLst/>
+          </a:prstGeom>
+          <a:noFill/>
+        </p:spPr>
+        <p:txBody>
+          <a:bodyPr wrap="square">
+            <a:noAutofit/>
+          </a:bodyPr>
+          <a:lstStyle/>
+          <a:p>
+            <a:pPr>
+              <a:lnSpc>
+                <a:spcPts val="2200"/>
+              </a:lnSpc>
+              <a:spcAft>
+                <a:spcPts val="1000"/>
+              </a:spcAft>
+              <a:defRPr sz="2000" b="0">
+                <a:solidFill>
+                  <a:srgbClr val="333333"/>
+                </a:solidFill>
+                <a:latin typeface="Calibri"/>
+              </a:defRPr>
+            </a:pPr>
+            <a:r>
+              <a:t>• SPEC.md → requirements in plain</a:t>
+            </a:r>
+          </a:p>
+          <a:p>
+            <a:pPr>
+              <a:lnSpc>
+                <a:spcPts val="2200"/>
+              </a:lnSpc>
+              <a:spcAft>
+                <a:spcPts val="1000"/>
+              </a:spcAft>
+              <a:defRPr sz="2000" b="0">
+                <a:solidFill>
+                  <a:srgbClr val="333333"/>
+                </a:solidFill>
+                <a:latin typeface="Calibri"/>
+              </a:defRPr>
+            </a:pPr>
+            <a:r>
+              <a:t>      language (interface, behavior,</a:t>
+            </a:r>
+          </a:p>
+          <a:p>
+            <a:pPr>
+              <a:lnSpc>
+                <a:spcPts val="2200"/>
+              </a:lnSpc>
+              <a:spcAft>
+                <a:spcPts val="1000"/>
+              </a:spcAft>
+              <a:defRPr sz="2000" b="0">
+                <a:solidFill>
+                  <a:srgbClr val="333333"/>
+                </a:solidFill>
+                <a:latin typeface="Calibri"/>
+              </a:defRPr>
+            </a:pPr>
+            <a:r>
+              <a:t>      timing).</a:t>
+            </a:r>
+          </a:p>
+          <a:p>
+            <a:pPr>
+              <a:lnSpc>
+                <a:spcPts val="2200"/>
+              </a:lnSpc>
+              <a:spcAft>
+                <a:spcPts val="1000"/>
+              </a:spcAft>
+              <a:defRPr sz="2000" b="0">
+                <a:solidFill>
+                  <a:srgbClr val="333333"/>
+                </a:solidFill>
+                <a:latin typeface="Calibri"/>
+              </a:defRPr>
+            </a:pPr>
+            <a:r>
+              <a:t>• dut/counter.v → synthesizable</a:t>
+            </a:r>
+          </a:p>
+          <a:p>
+            <a:pPr>
+              <a:lnSpc>
+                <a:spcPts val="2200"/>
+              </a:lnSpc>
+              <a:spcAft>
+                <a:spcPts val="1000"/>
+              </a:spcAft>
+              <a:defRPr sz="2000" b="0">
+                <a:solidFill>
+                  <a:srgbClr val="333333"/>
+                </a:solidFill>
+                <a:latin typeface="Calibri"/>
+              </a:defRPr>
+            </a:pPr>
+            <a:r>
+              <a:t>      RTL implementing the spec.</a:t>
+            </a:r>
+          </a:p>
+          <a:p>
+            <a:pPr>
+              <a:lnSpc>
+                <a:spcPts val="2200"/>
+              </a:lnSpc>
+              <a:spcAft>
+                <a:spcPts val="1000"/>
+              </a:spcAft>
+              <a:defRPr sz="2000" b="0">
+                <a:solidFill>
+                  <a:srgbClr val="333333"/>
+                </a:solidFill>
+                <a:latin typeface="Calibri"/>
+              </a:defRPr>
+            </a:pPr>
+            <a:r>
+              <a:t>• top.v → wrapper connecting DUT</a:t>
+            </a:r>
+          </a:p>
+          <a:p>
+            <a:pPr>
+              <a:lnSpc>
+                <a:spcPts val="2200"/>
+              </a:lnSpc>
+              <a:spcAft>
+                <a:spcPts val="1000"/>
+              </a:spcAft>
+              <a:defRPr sz="2000" b="0">
+                <a:solidFill>
+                  <a:srgbClr val="333333"/>
+                </a:solidFill>
+                <a:latin typeface="Calibri"/>
+              </a:defRPr>
+            </a:pPr>
+            <a:r>
+              <a:t>      pins to the simulation harness.</a:t>
+            </a:r>
+          </a:p>
+          <a:p>
+            <a:pPr>
+              <a:lnSpc>
+                <a:spcPts val="2200"/>
+              </a:lnSpc>
+              <a:spcAft>
+                <a:spcPts val="1000"/>
+              </a:spcAft>
+              <a:defRPr sz="2000" b="0">
+                <a:solidFill>
+                  <a:srgbClr val="333333"/>
+                </a:solidFill>
+                <a:latin typeface="Calibri"/>
+              </a:defRPr>
+            </a:pPr>
+            <a:r>
+              <a:t>• sim_main.cpp → clock, reset,</a:t>
+            </a:r>
+          </a:p>
+          <a:p>
+            <a:pPr>
+              <a:lnSpc>
+                <a:spcPts val="2200"/>
+              </a:lnSpc>
+              <a:spcAft>
+                <a:spcPts val="1000"/>
+              </a:spcAft>
+              <a:defRPr sz="2000" b="0">
+                <a:solidFill>
+                  <a:srgbClr val="333333"/>
+                </a:solidFill>
+                <a:latin typeface="Calibri"/>
+              </a:defRPr>
+            </a:pPr>
+            <a:r>
+              <a:t>      stimulus, and result checking</a:t>
+            </a:r>
+          </a:p>
+          <a:p>
+            <a:pPr>
+              <a:lnSpc>
+                <a:spcPts val="2200"/>
+              </a:lnSpc>
+              <a:spcAft>
+                <a:spcPts val="1000"/>
+              </a:spcAft>
+              <a:defRPr sz="2000" b="0">
+                <a:solidFill>
+                  <a:srgbClr val="333333"/>
+                </a:solidFill>
+                <a:latin typeface="Calibri"/>
+              </a:defRPr>
+            </a:pPr>
+            <a:r>
+              <a:t>      outside RTL.</a:t>
             </a:r>
           </a:p>
         </p:txBody>
       </p:sp>
       <p:pic>
         <p:nvPicPr>
-          <p:cNvPr id="3" name="Picture 2" descr="rtl_architecture.png"/>
+          <p:cNvPr id="4" name="Picture 3" descr="rtl_architecture.png"/>
           <p:cNvPicPr>
             <a:picLocks noChangeAspect="1"/>
           </p:cNvPicPr>
@@ -10852,53 +14363,14 @@
         </p:blipFill>
         <p:spPr>
           <a:xfrm>
-            <a:off x="548640" y="1143000"/>
-            <a:ext cx="8128000" cy="4572000"/>
+            <a:off x="6172200" y="2094547"/>
+            <a:ext cx="5394960" cy="3034665"/>
           </a:xfrm>
           <a:prstGeom prst="rect">
             <a:avLst/>
           </a:prstGeom>
         </p:spPr>
       </p:pic>
-      <p:sp>
-        <p:nvSpPr>
-          <p:cNvPr id="4" name="TextBox 3"/>
-          <p:cNvSpPr txBox="1"/>
-          <p:nvPr/>
-        </p:nvSpPr>
-        <p:spPr>
-          <a:xfrm>
-            <a:off x="548640" y="5897880"/>
-            <a:ext cx="11064240" cy="411480"/>
-          </a:xfrm>
-          <a:prstGeom prst="rect">
-            <a:avLst/>
-          </a:prstGeom>
-          <a:noFill/>
-        </p:spPr>
-        <p:txBody>
-          <a:bodyPr wrap="square">
-            <a:noAutofit/>
-          </a:bodyPr>
-          <a:lstStyle/>
-          <a:p>
-            <a:pPr>
-              <a:lnSpc>
-                <a:spcPts val="2200"/>
-              </a:lnSpc>
-              <a:defRPr sz="1200" b="0">
-                <a:solidFill>
-                  <a:srgbClr val="333333"/>
-                </a:solidFill>
-                <a:latin typeface="Calibri"/>
-              </a:defRPr>
-            </a:pPr>
-            <a:r>
-              <a:t>Module 1: DUT / block hierarchy (see module1/examples/).</a:t>
-            </a:r>
-          </a:p>
-        </p:txBody>
-      </p:sp>
       <p:sp>
         <p:nvSpPr>
           <p:cNvPr id="5" name="TextBox 4"/>
